--- a/pitch/PromoteGate-ABB-Accelerator.pptx
+++ b/pitch/PromoteGate-ABB-Accelerator.pptx
@@ -13,9 +13,12 @@
     <p:sldId id="261" r:id="rId7"/>
     <p:sldId id="262" r:id="rId8"/>
     <p:sldId id="263" r:id="rId9"/>
+    <p:sldId id="264" r:id="rId10"/>
+    <p:sldId id="265" r:id="rId11"/>
+    <p:sldId id="266" r:id="rId12"/>
   </p:sldIdLst>
   <p:notesMasterIdLst>
-    <p:notesMasterId r:id="rId10"/>
+    <p:notesMasterId r:id="rId13"/>
   </p:notesMasterIdLst>
   <p:sldSz cx="12191695" cy="6858000"/>
   <p:notesSz cx="6858000" cy="12191695"/>
@@ -551,6 +554,182 @@
 </p:notes>
 </file>
 
+<file path=ppt/notesSlides/notesSlide10.xml><?xml version="1.0" encoding="utf-8"?>
+<p:notes xmlns:a="http://schemas.openxmlformats.org/drawingml/2006/main" xmlns:r="http://schemas.openxmlformats.org/officeDocument/2006/relationships" xmlns:p="http://schemas.openxmlformats.org/presentationml/2006/main">
+  <p:cSld>
+    <p:spTree>
+      <p:nvGrpSpPr>
+        <p:cNvPr id="1" name=""/>
+        <p:cNvGrpSpPr/>
+        <p:nvPr/>
+      </p:nvGrpSpPr>
+      <p:grpSpPr>
+        <a:xfrm>
+          <a:off x="0" y="0"/>
+          <a:ext cx="0" cy="0"/>
+          <a:chOff x="0" y="0"/>
+          <a:chExt cx="0" cy="0"/>
+        </a:xfrm>
+      </p:grpSpPr>
+      <p:sp>
+        <p:nvSpPr>
+          <p:cNvPr id="2" name="Slide Image Placeholder 1"/>
+          <p:cNvSpPr>
+            <a:spLocks noGrp="1" noRot="1" noChangeAspect="1"/>
+          </p:cNvSpPr>
+          <p:nvPr>
+            <p:ph type="sldImg"/>
+          </p:nvPr>
+        </p:nvSpPr>
+        <p:spPr/>
+      </p:sp>
+      <p:sp>
+        <p:nvSpPr>
+          <p:cNvPr id="3" name="Notes Placeholder 2"/>
+          <p:cNvSpPr>
+            <a:spLocks noGrp="1"/>
+          </p:cNvSpPr>
+          <p:nvPr>
+            <p:ph type="body" idx="1"/>
+          </p:nvPr>
+        </p:nvSpPr>
+        <p:spPr/>
+        <p:txBody>
+          <a:bodyPr/>
+          <a:lstStyle/>
+          <a:p>
+            <a:r>
+              <a:rPr lang="en-US" dirty="0"/>
+              <a:t/>
+            </a:r>
+            <a:endParaRPr lang="en-US" dirty="0"/>
+          </a:p>
+        </p:txBody>
+      </p:sp>
+      <p:sp>
+        <p:nvSpPr>
+          <p:cNvPr id="4" name="Slide Number Placeholder 3"/>
+          <p:cNvSpPr>
+            <a:spLocks noGrp="1"/>
+          </p:cNvSpPr>
+          <p:nvPr>
+            <p:ph type="sldNum" sz="quarter" idx="10"/>
+          </p:nvPr>
+        </p:nvSpPr>
+        <p:spPr/>
+        <p:txBody>
+          <a:bodyPr/>
+          <a:lstStyle/>
+          <a:p>
+            <a:fld id="{F7021451-1387-4CA6-816F-3879F97B5CBC}" type="slidenum">
+              <a:rPr lang="en-US"/>
+              <a:t>10</a:t>
+            </a:fld>
+            <a:endParaRPr lang="en-US"/>
+          </a:p>
+        </p:txBody>
+      </p:sp>
+    </p:spTree>
+    <p:extLst>
+      <p:ext uri="{BB962C8B-B14F-4D97-AF65-F5344CB8AC3E}">
+        <p14:creationId xmlns:p14="http://schemas.microsoft.com/office/powerpoint/2010/main" val="1024086991"/>
+      </p:ext>
+    </p:extLst>
+  </p:cSld>
+  <p:clrMapOvr>
+    <a:masterClrMapping/>
+  </p:clrMapOvr>
+</p:notes>
+</file>
+
+<file path=ppt/notesSlides/notesSlide11.xml><?xml version="1.0" encoding="utf-8"?>
+<p:notes xmlns:a="http://schemas.openxmlformats.org/drawingml/2006/main" xmlns:r="http://schemas.openxmlformats.org/officeDocument/2006/relationships" xmlns:p="http://schemas.openxmlformats.org/presentationml/2006/main">
+  <p:cSld>
+    <p:spTree>
+      <p:nvGrpSpPr>
+        <p:cNvPr id="1" name=""/>
+        <p:cNvGrpSpPr/>
+        <p:nvPr/>
+      </p:nvGrpSpPr>
+      <p:grpSpPr>
+        <a:xfrm>
+          <a:off x="0" y="0"/>
+          <a:ext cx="0" cy="0"/>
+          <a:chOff x="0" y="0"/>
+          <a:chExt cx="0" cy="0"/>
+        </a:xfrm>
+      </p:grpSpPr>
+      <p:sp>
+        <p:nvSpPr>
+          <p:cNvPr id="2" name="Slide Image Placeholder 1"/>
+          <p:cNvSpPr>
+            <a:spLocks noGrp="1" noRot="1" noChangeAspect="1"/>
+          </p:cNvSpPr>
+          <p:nvPr>
+            <p:ph type="sldImg"/>
+          </p:nvPr>
+        </p:nvSpPr>
+        <p:spPr/>
+      </p:sp>
+      <p:sp>
+        <p:nvSpPr>
+          <p:cNvPr id="3" name="Notes Placeholder 2"/>
+          <p:cNvSpPr>
+            <a:spLocks noGrp="1"/>
+          </p:cNvSpPr>
+          <p:nvPr>
+            <p:ph type="body" idx="1"/>
+          </p:nvPr>
+        </p:nvSpPr>
+        <p:spPr/>
+        <p:txBody>
+          <a:bodyPr/>
+          <a:lstStyle/>
+          <a:p>
+            <a:r>
+              <a:rPr lang="en-US" dirty="0"/>
+              <a:t/>
+            </a:r>
+            <a:endParaRPr lang="en-US" dirty="0"/>
+          </a:p>
+        </p:txBody>
+      </p:sp>
+      <p:sp>
+        <p:nvSpPr>
+          <p:cNvPr id="4" name="Slide Number Placeholder 3"/>
+          <p:cNvSpPr>
+            <a:spLocks noGrp="1"/>
+          </p:cNvSpPr>
+          <p:nvPr>
+            <p:ph type="sldNum" sz="quarter" idx="10"/>
+          </p:nvPr>
+        </p:nvSpPr>
+        <p:spPr/>
+        <p:txBody>
+          <a:bodyPr/>
+          <a:lstStyle/>
+          <a:p>
+            <a:fld id="{F7021451-1387-4CA6-816F-3879F97B5CBC}" type="slidenum">
+              <a:rPr lang="en-US"/>
+              <a:t>11</a:t>
+            </a:fld>
+            <a:endParaRPr lang="en-US"/>
+          </a:p>
+        </p:txBody>
+      </p:sp>
+    </p:spTree>
+    <p:extLst>
+      <p:ext uri="{BB962C8B-B14F-4D97-AF65-F5344CB8AC3E}">
+        <p14:creationId xmlns:p14="http://schemas.microsoft.com/office/powerpoint/2010/main" val="1024086991"/>
+      </p:ext>
+    </p:extLst>
+  </p:cSld>
+  <p:clrMapOvr>
+    <a:masterClrMapping/>
+  </p:clrMapOvr>
+</p:notes>
+</file>
+
 <file path=ppt/notesSlides/notesSlide2.xml><?xml version="1.0" encoding="utf-8"?>
 <p:notes xmlns:a="http://schemas.openxmlformats.org/drawingml/2006/main" xmlns:r="http://schemas.openxmlformats.org/officeDocument/2006/relationships" xmlns:p="http://schemas.openxmlformats.org/presentationml/2006/main">
   <p:cSld>
@@ -1149,6 +1328,94 @@
             <a:fld id="{F7021451-1387-4CA6-816F-3879F97B5CBC}" type="slidenum">
               <a:rPr lang="en-US"/>
               <a:t>8</a:t>
+            </a:fld>
+            <a:endParaRPr lang="en-US"/>
+          </a:p>
+        </p:txBody>
+      </p:sp>
+    </p:spTree>
+    <p:extLst>
+      <p:ext uri="{BB962C8B-B14F-4D97-AF65-F5344CB8AC3E}">
+        <p14:creationId xmlns:p14="http://schemas.microsoft.com/office/powerpoint/2010/main" val="1024086991"/>
+      </p:ext>
+    </p:extLst>
+  </p:cSld>
+  <p:clrMapOvr>
+    <a:masterClrMapping/>
+  </p:clrMapOvr>
+</p:notes>
+</file>
+
+<file path=ppt/notesSlides/notesSlide9.xml><?xml version="1.0" encoding="utf-8"?>
+<p:notes xmlns:a="http://schemas.openxmlformats.org/drawingml/2006/main" xmlns:r="http://schemas.openxmlformats.org/officeDocument/2006/relationships" xmlns:p="http://schemas.openxmlformats.org/presentationml/2006/main">
+  <p:cSld>
+    <p:spTree>
+      <p:nvGrpSpPr>
+        <p:cNvPr id="1" name=""/>
+        <p:cNvGrpSpPr/>
+        <p:nvPr/>
+      </p:nvGrpSpPr>
+      <p:grpSpPr>
+        <a:xfrm>
+          <a:off x="0" y="0"/>
+          <a:ext cx="0" cy="0"/>
+          <a:chOff x="0" y="0"/>
+          <a:chExt cx="0" cy="0"/>
+        </a:xfrm>
+      </p:grpSpPr>
+      <p:sp>
+        <p:nvSpPr>
+          <p:cNvPr id="2" name="Slide Image Placeholder 1"/>
+          <p:cNvSpPr>
+            <a:spLocks noGrp="1" noRot="1" noChangeAspect="1"/>
+          </p:cNvSpPr>
+          <p:nvPr>
+            <p:ph type="sldImg"/>
+          </p:nvPr>
+        </p:nvSpPr>
+        <p:spPr/>
+      </p:sp>
+      <p:sp>
+        <p:nvSpPr>
+          <p:cNvPr id="3" name="Notes Placeholder 2"/>
+          <p:cNvSpPr>
+            <a:spLocks noGrp="1"/>
+          </p:cNvSpPr>
+          <p:nvPr>
+            <p:ph type="body" idx="1"/>
+          </p:nvPr>
+        </p:nvSpPr>
+        <p:spPr/>
+        <p:txBody>
+          <a:bodyPr/>
+          <a:lstStyle/>
+          <a:p>
+            <a:r>
+              <a:rPr lang="en-US" dirty="0"/>
+              <a:t/>
+            </a:r>
+            <a:endParaRPr lang="en-US" dirty="0"/>
+          </a:p>
+        </p:txBody>
+      </p:sp>
+      <p:sp>
+        <p:nvSpPr>
+          <p:cNvPr id="4" name="Slide Number Placeholder 3"/>
+          <p:cNvSpPr>
+            <a:spLocks noGrp="1"/>
+          </p:cNvSpPr>
+          <p:nvPr>
+            <p:ph type="sldNum" sz="quarter" idx="10"/>
+          </p:nvPr>
+        </p:nvSpPr>
+        <p:spPr/>
+        <p:txBody>
+          <a:bodyPr/>
+          <a:lstStyle/>
+          <a:p>
+            <a:fld id="{F7021451-1387-4CA6-816F-3879F97B5CBC}" type="slidenum">
+              <a:rPr lang="en-US"/>
+              <a:t>9</a:t>
             </a:fld>
             <a:endParaRPr lang="en-US"/>
           </a:p>
@@ -2209,6 +2476,1305 @@
 </p:sld>
 </file>
 
+<file path=ppt/slides/slide10.xml><?xml version="1.0" encoding="utf-8"?>
+<p:sld xmlns:a="http://schemas.openxmlformats.org/drawingml/2006/main" xmlns:r="http://schemas.openxmlformats.org/officeDocument/2006/relationships" xmlns:p="http://schemas.openxmlformats.org/presentationml/2006/main">
+  <p:cSld name="Slide 10">
+    <p:bg>
+      <p:bgPr>
+        <a:solidFill>
+          <a:srgbClr val="F4F0E8"/>
+        </a:solidFill>
+      </p:bgPr>
+    </p:bg>
+    <p:spTree>
+      <p:nvGrpSpPr>
+        <p:cNvPr id="1" name=""/>
+        <p:cNvGrpSpPr/>
+        <p:nvPr/>
+      </p:nvGrpSpPr>
+      <p:grpSpPr>
+        <a:xfrm>
+          <a:off x="0" y="0"/>
+          <a:ext cx="0" cy="0"/>
+          <a:chOff x="0" y="0"/>
+          <a:chExt cx="0" cy="0"/>
+        </a:xfrm>
+      </p:grpSpPr>
+      <p:sp>
+        <p:nvSpPr>
+          <p:cNvPr id="2" name="Text 0"/>
+          <p:cNvSpPr/>
+          <p:nvPr/>
+        </p:nvSpPr>
+        <p:spPr>
+          <a:xfrm>
+            <a:off x="457200" y="256032"/>
+            <a:ext cx="640080" cy="256032"/>
+          </a:xfrm>
+          <a:prstGeom prst="rect">
+            <a:avLst/>
+          </a:prstGeom>
+          <a:noFill/>
+          <a:ln/>
+        </p:spPr>
+        <p:txBody>
+          <a:bodyPr wrap="square" lIns="0" tIns="0" rIns="0" bIns="0" rtlCol="0" anchor="ctr"/>
+          <a:lstStyle/>
+          <a:p>
+            <a:pPr indent="0" marL="0">
+              <a:buNone/>
+            </a:pPr>
+            <a:r>
+              <a:rPr lang="en-US" sz="1200" b="1" dirty="0">
+                <a:solidFill>
+                  <a:srgbClr val="5C6573"/>
+                </a:solidFill>
+                <a:latin typeface="Arial" pitchFamily="34" charset="0"/>
+                <a:ea typeface="Arial" pitchFamily="34" charset="-122"/>
+                <a:cs typeface="Arial" pitchFamily="34" charset="-120"/>
+              </a:rPr>
+              <a:t>10</a:t>
+            </a:r>
+            <a:endParaRPr lang="en-US" sz="1200" dirty="0"/>
+          </a:p>
+        </p:txBody>
+      </p:sp>
+      <p:sp>
+        <p:nvSpPr>
+          <p:cNvPr id="3" name="Text 1"/>
+          <p:cNvSpPr/>
+          <p:nvPr/>
+        </p:nvSpPr>
+        <p:spPr>
+          <a:xfrm>
+            <a:off x="1051560" y="256032"/>
+            <a:ext cx="5943600" cy="256032"/>
+          </a:xfrm>
+          <a:prstGeom prst="rect">
+            <a:avLst/>
+          </a:prstGeom>
+          <a:noFill/>
+          <a:ln/>
+        </p:spPr>
+        <p:txBody>
+          <a:bodyPr wrap="square" lIns="0" tIns="0" rIns="0" bIns="0" rtlCol="0" anchor="ctr"/>
+          <a:lstStyle/>
+          <a:p>
+            <a:pPr indent="0" marL="0">
+              <a:buNone/>
+            </a:pPr>
+            <a:r>
+              <a:rPr lang="en-US" sz="1200" b="1" spc="140" kern="0" dirty="0">
+                <a:solidFill>
+                  <a:srgbClr val="C4501A"/>
+                </a:solidFill>
+                <a:latin typeface="Arial" pitchFamily="34" charset="0"/>
+                <a:ea typeface="Arial" pitchFamily="34" charset="-122"/>
+                <a:cs typeface="Arial" pitchFamily="34" charset="-120"/>
+              </a:rPr>
+              <a:t>WITH ABB</a:t>
+            </a:r>
+            <a:endParaRPr lang="en-US" sz="1200" dirty="0"/>
+          </a:p>
+        </p:txBody>
+      </p:sp>
+      <p:sp>
+        <p:nvSpPr>
+          <p:cNvPr id="4" name="Text 2"/>
+          <p:cNvSpPr/>
+          <p:nvPr/>
+        </p:nvSpPr>
+        <p:spPr>
+          <a:xfrm>
+            <a:off x="7589520" y="256032"/>
+            <a:ext cx="4114800" cy="256032"/>
+          </a:xfrm>
+          <a:prstGeom prst="rect">
+            <a:avLst/>
+          </a:prstGeom>
+          <a:noFill/>
+          <a:ln/>
+        </p:spPr>
+        <p:txBody>
+          <a:bodyPr wrap="square" lIns="0" tIns="0" rIns="0" bIns="0" rtlCol="0" anchor="ctr"/>
+          <a:lstStyle/>
+          <a:p>
+            <a:pPr algn="r" indent="0" marL="0">
+              <a:buNone/>
+            </a:pPr>
+            <a:r>
+              <a:rPr lang="en-US" sz="1200" spc="120" kern="0" dirty="0">
+                <a:solidFill>
+                  <a:srgbClr val="5C6573"/>
+                </a:solidFill>
+                <a:latin typeface="Arial" pitchFamily="34" charset="0"/>
+                <a:ea typeface="Arial" pitchFamily="34" charset="-122"/>
+                <a:cs typeface="Arial" pitchFamily="34" charset="-120"/>
+              </a:rPr>
+              <a:t>PROMOTEGATE</a:t>
+            </a:r>
+            <a:endParaRPr lang="en-US" sz="1200" dirty="0"/>
+          </a:p>
+        </p:txBody>
+      </p:sp>
+      <p:sp>
+        <p:nvSpPr>
+          <p:cNvPr id="5" name="Shape 3"/>
+          <p:cNvSpPr/>
+          <p:nvPr/>
+        </p:nvSpPr>
+        <p:spPr>
+          <a:xfrm>
+            <a:off x="457200" y="621792"/>
+            <a:ext cx="11274552" cy="13716"/>
+          </a:xfrm>
+          <a:prstGeom prst="rect">
+            <a:avLst/>
+          </a:prstGeom>
+          <a:solidFill>
+            <a:srgbClr val="D5CBBC"/>
+          </a:solidFill>
+          <a:ln w="12700">
+            <a:solidFill>
+              <a:srgbClr val="D5CBBC"/>
+            </a:solidFill>
+            <a:prstDash val="solid"/>
+          </a:ln>
+        </p:spPr>
+      </p:sp>
+      <p:sp>
+        <p:nvSpPr>
+          <p:cNvPr id="6" name="Text 4"/>
+          <p:cNvSpPr/>
+          <p:nvPr/>
+        </p:nvSpPr>
+        <p:spPr>
+          <a:xfrm>
+            <a:off x="457200" y="822960"/>
+            <a:ext cx="11247120" cy="502920"/>
+          </a:xfrm>
+          <a:prstGeom prst="rect">
+            <a:avLst/>
+          </a:prstGeom>
+          <a:noFill/>
+          <a:ln/>
+        </p:spPr>
+        <p:txBody>
+          <a:bodyPr wrap="square" lIns="0" tIns="0" rIns="0" bIns="0" rtlCol="0" anchor="ctr"/>
+          <a:lstStyle/>
+          <a:p>
+            <a:pPr indent="0" marL="0">
+              <a:buNone/>
+            </a:pPr>
+            <a:r>
+              <a:rPr lang="en-US" sz="3200" b="1" dirty="0">
+                <a:solidFill>
+                  <a:srgbClr val="12171F"/>
+                </a:solidFill>
+                <a:latin typeface="Arial" pitchFamily="34" charset="0"/>
+                <a:ea typeface="Arial" pitchFamily="34" charset="-122"/>
+                <a:cs typeface="Arial" pitchFamily="34" charset="-120"/>
+              </a:rPr>
+              <a:t>What the accelerator unlocks.</a:t>
+            </a:r>
+            <a:endParaRPr lang="en-US" sz="3200" dirty="0"/>
+          </a:p>
+        </p:txBody>
+      </p:sp>
+      <p:sp>
+        <p:nvSpPr>
+          <p:cNvPr id="7" name="Text 5"/>
+          <p:cNvSpPr/>
+          <p:nvPr/>
+        </p:nvSpPr>
+        <p:spPr>
+          <a:xfrm>
+            <a:off x="457200" y="1389888"/>
+            <a:ext cx="11155680" cy="457200"/>
+          </a:xfrm>
+          <a:prstGeom prst="rect">
+            <a:avLst/>
+          </a:prstGeom>
+          <a:noFill/>
+          <a:ln/>
+        </p:spPr>
+        <p:txBody>
+          <a:bodyPr wrap="square" lIns="0" tIns="0" rIns="0" bIns="0" rtlCol="0" anchor="ctr"/>
+          <a:lstStyle/>
+          <a:p>
+            <a:pPr indent="0" marL="0">
+              <a:buNone/>
+            </a:pPr>
+            <a:r>
+              <a:rPr lang="en-US" sz="1600" dirty="0">
+                <a:solidFill>
+                  <a:srgbClr val="5C6573"/>
+                </a:solidFill>
+                <a:latin typeface="Arial" pitchFamily="34" charset="0"/>
+                <a:ea typeface="Arial" pitchFamily="34" charset="-122"/>
+                <a:cs typeface="Arial" pitchFamily="34" charset="-120"/>
+              </a:rPr>
+              <a:t>The gate works on one public dataset from one robot. Three things only ABB can put in front of it.</a:t>
+            </a:r>
+            <a:endParaRPr lang="en-US" sz="1600" dirty="0"/>
+          </a:p>
+        </p:txBody>
+      </p:sp>
+      <p:sp>
+        <p:nvSpPr>
+          <p:cNvPr id="8" name="Text 6"/>
+          <p:cNvSpPr/>
+          <p:nvPr/>
+        </p:nvSpPr>
+        <p:spPr>
+          <a:xfrm>
+            <a:off x="457200" y="2148840"/>
+            <a:ext cx="3383280" cy="365760"/>
+          </a:xfrm>
+          <a:prstGeom prst="rect">
+            <a:avLst/>
+          </a:prstGeom>
+          <a:noFill/>
+          <a:ln/>
+        </p:spPr>
+        <p:txBody>
+          <a:bodyPr wrap="square" lIns="0" tIns="0" rIns="0" bIns="0" rtlCol="0" anchor="ctr"/>
+          <a:lstStyle/>
+          <a:p>
+            <a:pPr indent="0" marL="0">
+              <a:buNone/>
+            </a:pPr>
+            <a:r>
+              <a:rPr lang="en-US" sz="1800" b="1" dirty="0">
+                <a:solidFill>
+                  <a:srgbClr val="C4501A"/>
+                </a:solidFill>
+                <a:latin typeface="Arial" pitchFamily="34" charset="0"/>
+                <a:ea typeface="Arial" pitchFamily="34" charset="-122"/>
+                <a:cs typeface="Arial" pitchFamily="34" charset="-120"/>
+              </a:rPr>
+              <a:t>01</a:t>
+            </a:r>
+            <a:endParaRPr lang="en-US" sz="1800" dirty="0"/>
+          </a:p>
+        </p:txBody>
+      </p:sp>
+      <p:sp>
+        <p:nvSpPr>
+          <p:cNvPr id="9" name="Text 7"/>
+          <p:cNvSpPr/>
+          <p:nvPr/>
+        </p:nvSpPr>
+        <p:spPr>
+          <a:xfrm>
+            <a:off x="457200" y="2651760"/>
+            <a:ext cx="3429000" cy="548640"/>
+          </a:xfrm>
+          <a:prstGeom prst="rect">
+            <a:avLst/>
+          </a:prstGeom>
+          <a:noFill/>
+          <a:ln/>
+        </p:spPr>
+        <p:txBody>
+          <a:bodyPr wrap="square" lIns="0" tIns="0" rIns="0" bIns="0" rtlCol="0" anchor="ctr"/>
+          <a:lstStyle/>
+          <a:p>
+            <a:pPr indent="0" marL="0">
+              <a:buNone/>
+            </a:pPr>
+            <a:r>
+              <a:rPr lang="en-US" sz="2400" b="1" dirty="0">
+                <a:solidFill>
+                  <a:srgbClr val="12171F"/>
+                </a:solidFill>
+                <a:latin typeface="Arial" pitchFamily="34" charset="0"/>
+                <a:ea typeface="Arial" pitchFamily="34" charset="-122"/>
+                <a:cs typeface="Arial" pitchFamily="34" charset="-120"/>
+              </a:rPr>
+              <a:t>A second cell</a:t>
+            </a:r>
+            <a:endParaRPr lang="en-US" sz="2400" dirty="0"/>
+          </a:p>
+        </p:txBody>
+      </p:sp>
+      <p:sp>
+        <p:nvSpPr>
+          <p:cNvPr id="10" name="Text 8"/>
+          <p:cNvSpPr/>
+          <p:nvPr/>
+        </p:nvSpPr>
+        <p:spPr>
+          <a:xfrm>
+            <a:off x="457200" y="3291840"/>
+            <a:ext cx="3429000" cy="1554480"/>
+          </a:xfrm>
+          <a:prstGeom prst="rect">
+            <a:avLst/>
+          </a:prstGeom>
+          <a:noFill/>
+          <a:ln/>
+        </p:spPr>
+        <p:txBody>
+          <a:bodyPr wrap="square" lIns="0" tIns="0" rIns="0" bIns="0" rtlCol="0" anchor="ctr"/>
+          <a:lstStyle/>
+          <a:p>
+            <a:pPr indent="0" marL="0">
+              <a:buNone/>
+            </a:pPr>
+            <a:r>
+              <a:rPr lang="en-US" sz="1500" dirty="0">
+                <a:solidFill>
+                  <a:srgbClr val="5C6573"/>
+                </a:solidFill>
+                <a:latin typeface="Arial" pitchFamily="34" charset="0"/>
+                <a:ea typeface="Arial" pitchFamily="34" charset="-122"/>
+                <a:cs typeface="Arial" pitchFamily="34" charset="-120"/>
+              </a:rPr>
+              <a:t>Logs from a weld or assembly cell, so the same five rules are tested on a different job. The demo is machining. The claim is every cell.</a:t>
+            </a:r>
+            <a:endParaRPr lang="en-US" sz="1500" dirty="0"/>
+          </a:p>
+        </p:txBody>
+      </p:sp>
+      <p:sp>
+        <p:nvSpPr>
+          <p:cNvPr id="11" name="Text 9"/>
+          <p:cNvSpPr/>
+          <p:nvPr/>
+        </p:nvSpPr>
+        <p:spPr>
+          <a:xfrm>
+            <a:off x="457200" y="5230368"/>
+            <a:ext cx="3383280" cy="256032"/>
+          </a:xfrm>
+          <a:prstGeom prst="rect">
+            <a:avLst/>
+          </a:prstGeom>
+          <a:noFill/>
+          <a:ln/>
+        </p:spPr>
+        <p:txBody>
+          <a:bodyPr wrap="square" lIns="0" tIns="0" rIns="0" bIns="0" rtlCol="0" anchor="ctr"/>
+          <a:lstStyle/>
+          <a:p>
+            <a:pPr indent="0" marL="0">
+              <a:buNone/>
+            </a:pPr>
+            <a:r>
+              <a:rPr lang="en-US" sz="1200" b="1" spc="140" kern="0" dirty="0">
+                <a:solidFill>
+                  <a:srgbClr val="C4501A"/>
+                </a:solidFill>
+                <a:latin typeface="Arial" pitchFamily="34" charset="0"/>
+                <a:ea typeface="Arial" pitchFamily="34" charset="-122"/>
+                <a:cs typeface="Arial" pitchFamily="34" charset="-120"/>
+              </a:rPr>
+              <a:t>PROVE IT TRANSFERS</a:t>
+            </a:r>
+            <a:endParaRPr lang="en-US" sz="1200" dirty="0"/>
+          </a:p>
+        </p:txBody>
+      </p:sp>
+      <p:sp>
+        <p:nvSpPr>
+          <p:cNvPr id="12" name="Shape 10"/>
+          <p:cNvSpPr/>
+          <p:nvPr/>
+        </p:nvSpPr>
+        <p:spPr>
+          <a:xfrm>
+            <a:off x="4096512" y="2103120"/>
+            <a:ext cx="13716" cy="3246120"/>
+          </a:xfrm>
+          <a:prstGeom prst="rect">
+            <a:avLst/>
+          </a:prstGeom>
+          <a:solidFill>
+            <a:srgbClr val="D5CBBC"/>
+          </a:solidFill>
+          <a:ln w="12700">
+            <a:solidFill>
+              <a:srgbClr val="D5CBBC"/>
+            </a:solidFill>
+            <a:prstDash val="solid"/>
+          </a:ln>
+        </p:spPr>
+      </p:sp>
+      <p:sp>
+        <p:nvSpPr>
+          <p:cNvPr id="13" name="Text 11"/>
+          <p:cNvSpPr/>
+          <p:nvPr/>
+        </p:nvSpPr>
+        <p:spPr>
+          <a:xfrm>
+            <a:off x="4297680" y="2148840"/>
+            <a:ext cx="3383280" cy="365760"/>
+          </a:xfrm>
+          <a:prstGeom prst="rect">
+            <a:avLst/>
+          </a:prstGeom>
+          <a:noFill/>
+          <a:ln/>
+        </p:spPr>
+        <p:txBody>
+          <a:bodyPr wrap="square" lIns="0" tIns="0" rIns="0" bIns="0" rtlCol="0" anchor="ctr"/>
+          <a:lstStyle/>
+          <a:p>
+            <a:pPr indent="0" marL="0">
+              <a:buNone/>
+            </a:pPr>
+            <a:r>
+              <a:rPr lang="en-US" sz="1800" b="1" dirty="0">
+                <a:solidFill>
+                  <a:srgbClr val="C4501A"/>
+                </a:solidFill>
+                <a:latin typeface="Arial" pitchFamily="34" charset="0"/>
+                <a:ea typeface="Arial" pitchFamily="34" charset="-122"/>
+                <a:cs typeface="Arial" pitchFamily="34" charset="-120"/>
+              </a:rPr>
+              <a:t>02</a:t>
+            </a:r>
+            <a:endParaRPr lang="en-US" sz="1800" dirty="0"/>
+          </a:p>
+        </p:txBody>
+      </p:sp>
+      <p:sp>
+        <p:nvSpPr>
+          <p:cNvPr id="14" name="Text 12"/>
+          <p:cNvSpPr/>
+          <p:nvPr/>
+        </p:nvSpPr>
+        <p:spPr>
+          <a:xfrm>
+            <a:off x="4297680" y="2651760"/>
+            <a:ext cx="3429000" cy="548640"/>
+          </a:xfrm>
+          <a:prstGeom prst="rect">
+            <a:avLst/>
+          </a:prstGeom>
+          <a:noFill/>
+          <a:ln/>
+        </p:spPr>
+        <p:txBody>
+          <a:bodyPr wrap="square" lIns="0" tIns="0" rIns="0" bIns="0" rtlCol="0" anchor="ctr"/>
+          <a:lstStyle/>
+          <a:p>
+            <a:pPr indent="0" marL="0">
+              <a:buNone/>
+            </a:pPr>
+            <a:r>
+              <a:rPr lang="en-US" sz="2400" b="1" dirty="0">
+                <a:solidFill>
+                  <a:srgbClr val="12171F"/>
+                </a:solidFill>
+                <a:latin typeface="Arial" pitchFamily="34" charset="0"/>
+                <a:ea typeface="Arial" pitchFamily="34" charset="-122"/>
+                <a:cs typeface="Arial" pitchFamily="34" charset="-120"/>
+              </a:rPr>
+              <a:t>A failure clock</a:t>
+            </a:r>
+            <a:endParaRPr lang="en-US" sz="2400" dirty="0"/>
+          </a:p>
+        </p:txBody>
+      </p:sp>
+      <p:sp>
+        <p:nvSpPr>
+          <p:cNvPr id="15" name="Text 13"/>
+          <p:cNvSpPr/>
+          <p:nvPr/>
+        </p:nvSpPr>
+        <p:spPr>
+          <a:xfrm>
+            <a:off x="4297680" y="3291840"/>
+            <a:ext cx="3429000" cy="1554480"/>
+          </a:xfrm>
+          <a:prstGeom prst="rect">
+            <a:avLst/>
+          </a:prstGeom>
+          <a:noFill/>
+          <a:ln/>
+        </p:spPr>
+        <p:txBody>
+          <a:bodyPr wrap="square" lIns="0" tIns="0" rIns="0" bIns="0" rtlCol="0" anchor="ctr"/>
+          <a:lstStyle/>
+          <a:p>
+            <a:pPr indent="0" marL="0">
+              <a:buNone/>
+            </a:pPr>
+            <a:r>
+              <a:rPr lang="en-US" sz="1500" dirty="0">
+                <a:solidFill>
+                  <a:srgbClr val="5C6573"/>
+                </a:solidFill>
+                <a:latin typeface="Arial" pitchFamily="34" charset="0"/>
+                <a:ea typeface="Arial" pitchFamily="34" charset="-122"/>
+                <a:cs typeface="Arial" pitchFamily="34" charset="-120"/>
+              </a:rPr>
+              <a:t>Recordings that run up to a real breakdown, so warning time becomes a scored rule instead of the one we refuse to fake.</a:t>
+            </a:r>
+            <a:endParaRPr lang="en-US" sz="1500" dirty="0"/>
+          </a:p>
+        </p:txBody>
+      </p:sp>
+      <p:sp>
+        <p:nvSpPr>
+          <p:cNvPr id="16" name="Text 14"/>
+          <p:cNvSpPr/>
+          <p:nvPr/>
+        </p:nvSpPr>
+        <p:spPr>
+          <a:xfrm>
+            <a:off x="4297680" y="5230368"/>
+            <a:ext cx="3383280" cy="256032"/>
+          </a:xfrm>
+          <a:prstGeom prst="rect">
+            <a:avLst/>
+          </a:prstGeom>
+          <a:noFill/>
+          <a:ln/>
+        </p:spPr>
+        <p:txBody>
+          <a:bodyPr wrap="square" lIns="0" tIns="0" rIns="0" bIns="0" rtlCol="0" anchor="ctr"/>
+          <a:lstStyle/>
+          <a:p>
+            <a:pPr indent="0" marL="0">
+              <a:buNone/>
+            </a:pPr>
+            <a:r>
+              <a:rPr lang="en-US" sz="1200" b="1" spc="140" kern="0" dirty="0">
+                <a:solidFill>
+                  <a:srgbClr val="C4501A"/>
+                </a:solidFill>
+                <a:latin typeface="Arial" pitchFamily="34" charset="0"/>
+                <a:ea typeface="Arial" pitchFamily="34" charset="-122"/>
+                <a:cs typeface="Arial" pitchFamily="34" charset="-120"/>
+              </a:rPr>
+              <a:t>SCORE THE THIRD METRIC</a:t>
+            </a:r>
+            <a:endParaRPr lang="en-US" sz="1200" dirty="0"/>
+          </a:p>
+        </p:txBody>
+      </p:sp>
+      <p:sp>
+        <p:nvSpPr>
+          <p:cNvPr id="17" name="Shape 15"/>
+          <p:cNvSpPr/>
+          <p:nvPr/>
+        </p:nvSpPr>
+        <p:spPr>
+          <a:xfrm>
+            <a:off x="7936992" y="2103120"/>
+            <a:ext cx="13716" cy="3246120"/>
+          </a:xfrm>
+          <a:prstGeom prst="rect">
+            <a:avLst/>
+          </a:prstGeom>
+          <a:solidFill>
+            <a:srgbClr val="D5CBBC"/>
+          </a:solidFill>
+          <a:ln w="12700">
+            <a:solidFill>
+              <a:srgbClr val="D5CBBC"/>
+            </a:solidFill>
+            <a:prstDash val="solid"/>
+          </a:ln>
+        </p:spPr>
+      </p:sp>
+      <p:sp>
+        <p:nvSpPr>
+          <p:cNvPr id="18" name="Text 16"/>
+          <p:cNvSpPr/>
+          <p:nvPr/>
+        </p:nvSpPr>
+        <p:spPr>
+          <a:xfrm>
+            <a:off x="8138160" y="2148840"/>
+            <a:ext cx="3383280" cy="365760"/>
+          </a:xfrm>
+          <a:prstGeom prst="rect">
+            <a:avLst/>
+          </a:prstGeom>
+          <a:noFill/>
+          <a:ln/>
+        </p:spPr>
+        <p:txBody>
+          <a:bodyPr wrap="square" lIns="0" tIns="0" rIns="0" bIns="0" rtlCol="0" anchor="ctr"/>
+          <a:lstStyle/>
+          <a:p>
+            <a:pPr indent="0" marL="0">
+              <a:buNone/>
+            </a:pPr>
+            <a:r>
+              <a:rPr lang="en-US" sz="1800" b="1" dirty="0">
+                <a:solidFill>
+                  <a:srgbClr val="C4501A"/>
+                </a:solidFill>
+                <a:latin typeface="Arial" pitchFamily="34" charset="0"/>
+                <a:ea typeface="Arial" pitchFamily="34" charset="-122"/>
+                <a:cs typeface="Arial" pitchFamily="34" charset="-120"/>
+              </a:rPr>
+              <a:t>03</a:t>
+            </a:r>
+            <a:endParaRPr lang="en-US" sz="1800" dirty="0"/>
+          </a:p>
+        </p:txBody>
+      </p:sp>
+      <p:sp>
+        <p:nvSpPr>
+          <p:cNvPr id="19" name="Text 17"/>
+          <p:cNvSpPr/>
+          <p:nvPr/>
+        </p:nvSpPr>
+        <p:spPr>
+          <a:xfrm>
+            <a:off x="8138160" y="2651760"/>
+            <a:ext cx="3429000" cy="548640"/>
+          </a:xfrm>
+          <a:prstGeom prst="rect">
+            <a:avLst/>
+          </a:prstGeom>
+          <a:noFill/>
+          <a:ln/>
+        </p:spPr>
+        <p:txBody>
+          <a:bodyPr wrap="square" lIns="0" tIns="0" rIns="0" bIns="0" rtlCol="0" anchor="ctr"/>
+          <a:lstStyle/>
+          <a:p>
+            <a:pPr indent="0" marL="0">
+              <a:buNone/>
+            </a:pPr>
+            <a:r>
+              <a:rPr lang="en-US" sz="2400" b="1" dirty="0">
+                <a:solidFill>
+                  <a:srgbClr val="12171F"/>
+                </a:solidFill>
+                <a:latin typeface="Arial" pitchFamily="34" charset="0"/>
+                <a:ea typeface="Arial" pitchFamily="34" charset="-122"/>
+                <a:cs typeface="Arial" pitchFamily="34" charset="-120"/>
+              </a:rPr>
+              <a:t>A maintenance lead</a:t>
+            </a:r>
+            <a:endParaRPr lang="en-US" sz="2400" dirty="0"/>
+          </a:p>
+        </p:txBody>
+      </p:sp>
+      <p:sp>
+        <p:nvSpPr>
+          <p:cNvPr id="20" name="Text 18"/>
+          <p:cNvSpPr/>
+          <p:nvPr/>
+        </p:nvSpPr>
+        <p:spPr>
+          <a:xfrm>
+            <a:off x="8138160" y="3291840"/>
+            <a:ext cx="3429000" cy="1554480"/>
+          </a:xfrm>
+          <a:prstGeom prst="rect">
+            <a:avLst/>
+          </a:prstGeom>
+          <a:noFill/>
+          <a:ln/>
+        </p:spPr>
+        <p:txBody>
+          <a:bodyPr wrap="square" lIns="0" tIns="0" rIns="0" bIns="0" rtlCol="0" anchor="ctr"/>
+          <a:lstStyle/>
+          <a:p>
+            <a:pPr indent="0" marL="0">
+              <a:buNone/>
+            </a:pPr>
+            <a:r>
+              <a:rPr lang="en-US" sz="1500" dirty="0">
+                <a:solidFill>
+                  <a:srgbClr val="5C6573"/>
+                </a:solidFill>
+                <a:latin typeface="Arial" pitchFamily="34" charset="0"/>
+                <a:ea typeface="Arial" pitchFamily="34" charset="-122"/>
+                <a:cs typeface="Arial" pitchFamily="34" charset="-120"/>
+              </a:rPr>
+              <a:t>One person with a live cell and the Promote click for a season. The audit log of what they shipped, and what the gate refused, is the deliverable.</a:t>
+            </a:r>
+            <a:endParaRPr lang="en-US" sz="1500" dirty="0"/>
+          </a:p>
+        </p:txBody>
+      </p:sp>
+      <p:sp>
+        <p:nvSpPr>
+          <p:cNvPr id="21" name="Text 19"/>
+          <p:cNvSpPr/>
+          <p:nvPr/>
+        </p:nvSpPr>
+        <p:spPr>
+          <a:xfrm>
+            <a:off x="8138160" y="5230368"/>
+            <a:ext cx="3383280" cy="256032"/>
+          </a:xfrm>
+          <a:prstGeom prst="rect">
+            <a:avLst/>
+          </a:prstGeom>
+          <a:noFill/>
+          <a:ln/>
+        </p:spPr>
+        <p:txBody>
+          <a:bodyPr wrap="square" lIns="0" tIns="0" rIns="0" bIns="0" rtlCol="0" anchor="ctr"/>
+          <a:lstStyle/>
+          <a:p>
+            <a:pPr indent="0" marL="0">
+              <a:buNone/>
+            </a:pPr>
+            <a:r>
+              <a:rPr lang="en-US" sz="1200" b="1" spc="140" kern="0" dirty="0">
+                <a:solidFill>
+                  <a:srgbClr val="C4501A"/>
+                </a:solidFill>
+                <a:latin typeface="Arial" pitchFamily="34" charset="0"/>
+                <a:ea typeface="Arial" pitchFamily="34" charset="-122"/>
+                <a:cs typeface="Arial" pitchFamily="34" charset="-120"/>
+              </a:rPr>
+              <a:t>PUT THE CLICK IN A HAND</a:t>
+            </a:r>
+            <a:endParaRPr lang="en-US" sz="1200" dirty="0"/>
+          </a:p>
+        </p:txBody>
+      </p:sp>
+      <p:sp>
+        <p:nvSpPr>
+          <p:cNvPr id="22" name="Shape 20"/>
+          <p:cNvSpPr/>
+          <p:nvPr/>
+        </p:nvSpPr>
+        <p:spPr>
+          <a:xfrm>
+            <a:off x="457200" y="5669280"/>
+            <a:ext cx="11274552" cy="13716"/>
+          </a:xfrm>
+          <a:prstGeom prst="rect">
+            <a:avLst/>
+          </a:prstGeom>
+          <a:solidFill>
+            <a:srgbClr val="D5CBBC"/>
+          </a:solidFill>
+          <a:ln w="12700">
+            <a:solidFill>
+              <a:srgbClr val="D5CBBC"/>
+            </a:solidFill>
+            <a:prstDash val="solid"/>
+          </a:ln>
+        </p:spPr>
+      </p:sp>
+      <p:sp>
+        <p:nvSpPr>
+          <p:cNvPr id="23" name="Text 21"/>
+          <p:cNvSpPr/>
+          <p:nvPr/>
+        </p:nvSpPr>
+        <p:spPr>
+          <a:xfrm>
+            <a:off x="457200" y="5760720"/>
+            <a:ext cx="11247120" cy="457200"/>
+          </a:xfrm>
+          <a:prstGeom prst="rect">
+            <a:avLst/>
+          </a:prstGeom>
+          <a:noFill/>
+          <a:ln/>
+        </p:spPr>
+        <p:txBody>
+          <a:bodyPr wrap="square" lIns="0" tIns="0" rIns="0" bIns="0" rtlCol="0" anchor="ctr"/>
+          <a:lstStyle/>
+          <a:p>
+            <a:pPr indent="0" marL="0">
+              <a:buNone/>
+            </a:pPr>
+            <a:r>
+              <a:rPr lang="en-US" sz="1400" i="1" dirty="0">
+                <a:solidFill>
+                  <a:srgbClr val="5C6573"/>
+                </a:solidFill>
+                <a:latin typeface="Arial" pitchFamily="34" charset="0"/>
+                <a:ea typeface="Arial" pitchFamily="34" charset="-122"/>
+                <a:cs typeface="Arial" pitchFamily="34" charset="-120"/>
+              </a:rPr>
+              <a:t>Nothing here touches the controller. The input is the log the robot already writes, and the output is a verdict a person acts on.</a:t>
+            </a:r>
+            <a:endParaRPr lang="en-US" sz="1400" dirty="0"/>
+          </a:p>
+        </p:txBody>
+      </p:sp>
+      <p:sp>
+        <p:nvSpPr>
+          <p:cNvPr id="24" name="Text 22"/>
+          <p:cNvSpPr/>
+          <p:nvPr/>
+        </p:nvSpPr>
+        <p:spPr>
+          <a:xfrm>
+            <a:off x="457200" y="6510528"/>
+            <a:ext cx="5486400" cy="201168"/>
+          </a:xfrm>
+          <a:prstGeom prst="rect">
+            <a:avLst/>
+          </a:prstGeom>
+          <a:noFill/>
+          <a:ln/>
+        </p:spPr>
+        <p:txBody>
+          <a:bodyPr wrap="square" lIns="0" tIns="0" rIns="0" bIns="0" rtlCol="0" anchor="ctr"/>
+          <a:lstStyle/>
+          <a:p>
+            <a:pPr indent="0" marL="0">
+              <a:buNone/>
+            </a:pPr>
+            <a:r>
+              <a:rPr lang="en-US" sz="1100" dirty="0">
+                <a:solidFill>
+                  <a:srgbClr val="5C6573"/>
+                </a:solidFill>
+                <a:latin typeface="Arial" pitchFamily="34" charset="0"/>
+                <a:ea typeface="Arial" pitchFamily="34" charset="-122"/>
+                <a:cs typeface="Arial" pitchFamily="34" charset="-120"/>
+              </a:rPr>
+              <a:t>ABB Accelerator 2026</a:t>
+            </a:r>
+            <a:endParaRPr lang="en-US" sz="1100" dirty="0"/>
+          </a:p>
+        </p:txBody>
+      </p:sp>
+      <p:sp>
+        <p:nvSpPr>
+          <p:cNvPr id="25" name="Text 23"/>
+          <p:cNvSpPr/>
+          <p:nvPr/>
+        </p:nvSpPr>
+        <p:spPr>
+          <a:xfrm>
+            <a:off x="6217920" y="6510528"/>
+            <a:ext cx="5513832" cy="201168"/>
+          </a:xfrm>
+          <a:prstGeom prst="rect">
+            <a:avLst/>
+          </a:prstGeom>
+          <a:noFill/>
+          <a:ln/>
+        </p:spPr>
+        <p:txBody>
+          <a:bodyPr wrap="square" lIns="0" tIns="0" rIns="0" bIns="0" rtlCol="0" anchor="ctr"/>
+          <a:lstStyle/>
+          <a:p>
+            <a:pPr algn="r" indent="0" marL="0">
+              <a:buNone/>
+            </a:pPr>
+            <a:r>
+              <a:rPr lang="en-US" sz="1100" dirty="0">
+                <a:solidFill>
+                  <a:srgbClr val="5C6573"/>
+                </a:solidFill>
+                <a:latin typeface="Arial" pitchFamily="34" charset="0"/>
+                <a:ea typeface="Arial" pitchFamily="34" charset="-122"/>
+                <a:cs typeface="Arial" pitchFamily="34" charset="-120"/>
+              </a:rPr>
+              <a:t>Theme 1  ·  Predictive maintenance</a:t>
+            </a:r>
+            <a:endParaRPr lang="en-US" sz="1100" dirty="0"/>
+          </a:p>
+        </p:txBody>
+      </p:sp>
+    </p:spTree>
+  </p:cSld>
+  <p:clrMapOvr>
+    <a:masterClrMapping/>
+  </p:clrMapOvr>
+</p:sld>
+</file>
+
+<file path=ppt/slides/slide11.xml><?xml version="1.0" encoding="utf-8"?>
+<p:sld xmlns:a="http://schemas.openxmlformats.org/drawingml/2006/main" xmlns:r="http://schemas.openxmlformats.org/officeDocument/2006/relationships" xmlns:p="http://schemas.openxmlformats.org/presentationml/2006/main">
+  <p:cSld name="Slide 11">
+    <p:bg>
+      <p:bgPr>
+        <a:solidFill>
+          <a:srgbClr val="0E1726"/>
+        </a:solidFill>
+      </p:bgPr>
+    </p:bg>
+    <p:spTree>
+      <p:nvGrpSpPr>
+        <p:cNvPr id="1" name=""/>
+        <p:cNvGrpSpPr/>
+        <p:nvPr/>
+      </p:nvGrpSpPr>
+      <p:grpSpPr>
+        <a:xfrm>
+          <a:off x="0" y="0"/>
+          <a:ext cx="0" cy="0"/>
+          <a:chOff x="0" y="0"/>
+          <a:chExt cx="0" cy="0"/>
+        </a:xfrm>
+      </p:grpSpPr>
+      <p:sp>
+        <p:nvSpPr>
+          <p:cNvPr id="2" name="Text 0"/>
+          <p:cNvSpPr/>
+          <p:nvPr/>
+        </p:nvSpPr>
+        <p:spPr>
+          <a:xfrm>
+            <a:off x="502920" y="384048"/>
+            <a:ext cx="7315200" cy="256032"/>
+          </a:xfrm>
+          <a:prstGeom prst="rect">
+            <a:avLst/>
+          </a:prstGeom>
+          <a:noFill/>
+          <a:ln/>
+        </p:spPr>
+        <p:txBody>
+          <a:bodyPr wrap="square" lIns="0" tIns="0" rIns="0" bIns="0" rtlCol="0" anchor="ctr"/>
+          <a:lstStyle/>
+          <a:p>
+            <a:pPr indent="0" marL="0">
+              <a:buNone/>
+            </a:pPr>
+            <a:r>
+              <a:rPr lang="en-US" sz="1300" b="1" spc="140" kern="0" dirty="0">
+                <a:solidFill>
+                  <a:srgbClr val="C4501A"/>
+                </a:solidFill>
+                <a:latin typeface="Arial" pitchFamily="34" charset="0"/>
+                <a:ea typeface="Arial" pitchFamily="34" charset="-122"/>
+                <a:cs typeface="Arial" pitchFamily="34" charset="-120"/>
+              </a:rPr>
+              <a:t>ABB ACCELERATOR 2026</a:t>
+            </a:r>
+            <a:endParaRPr lang="en-US" sz="1300" dirty="0"/>
+          </a:p>
+        </p:txBody>
+      </p:sp>
+      <p:sp>
+        <p:nvSpPr>
+          <p:cNvPr id="3" name="Text 1"/>
+          <p:cNvSpPr/>
+          <p:nvPr/>
+        </p:nvSpPr>
+        <p:spPr>
+          <a:xfrm>
+            <a:off x="502920" y="1234440"/>
+            <a:ext cx="10972800" cy="777240"/>
+          </a:xfrm>
+          <a:prstGeom prst="rect">
+            <a:avLst/>
+          </a:prstGeom>
+          <a:noFill/>
+          <a:ln/>
+        </p:spPr>
+        <p:txBody>
+          <a:bodyPr wrap="square" lIns="0" tIns="0" rIns="0" bIns="0" rtlCol="0" anchor="ctr"/>
+          <a:lstStyle/>
+          <a:p>
+            <a:pPr indent="0" marL="0">
+              <a:buNone/>
+            </a:pPr>
+            <a:r>
+              <a:rPr lang="en-US" sz="4800" b="1" dirty="0">
+                <a:solidFill>
+                  <a:srgbClr val="F7F4EE"/>
+                </a:solidFill>
+                <a:latin typeface="Arial" pitchFamily="34" charset="0"/>
+                <a:ea typeface="Arial" pitchFamily="34" charset="-122"/>
+                <a:cs typeface="Arial" pitchFamily="34" charset="-120"/>
+              </a:rPr>
+              <a:t>See the decision.</a:t>
+            </a:r>
+            <a:endParaRPr lang="en-US" sz="4800" dirty="0"/>
+          </a:p>
+        </p:txBody>
+      </p:sp>
+      <p:sp>
+        <p:nvSpPr>
+          <p:cNvPr id="4" name="Text 2"/>
+          <p:cNvSpPr/>
+          <p:nvPr/>
+        </p:nvSpPr>
+        <p:spPr>
+          <a:xfrm>
+            <a:off x="502920" y="2103120"/>
+            <a:ext cx="10515600" cy="548640"/>
+          </a:xfrm>
+          <a:prstGeom prst="rect">
+            <a:avLst/>
+          </a:prstGeom>
+          <a:noFill/>
+          <a:ln/>
+        </p:spPr>
+        <p:txBody>
+          <a:bodyPr wrap="square" lIns="0" tIns="0" rIns="0" bIns="0" rtlCol="0" anchor="ctr"/>
+          <a:lstStyle/>
+          <a:p>
+            <a:pPr indent="0" marL="0">
+              <a:buNone/>
+            </a:pPr>
+            <a:r>
+              <a:rPr lang="en-US" sz="1800" dirty="0">
+                <a:solidFill>
+                  <a:srgbClr val="A8B0BC"/>
+                </a:solidFill>
+                <a:latin typeface="Arial" pitchFamily="34" charset="0"/>
+                <a:ea typeface="Arial" pitchFamily="34" charset="-122"/>
+                <a:cs typeface="Arial" pitchFamily="34" charset="-120"/>
+              </a:rPr>
+              <a:t>The demo opens on the IRB 6660 result. Promote turns on for LightGBM, and only for LightGBM.</a:t>
+            </a:r>
+            <a:endParaRPr lang="en-US" sz="1800" dirty="0"/>
+          </a:p>
+        </p:txBody>
+      </p:sp>
+      <p:sp>
+        <p:nvSpPr>
+          <p:cNvPr id="5" name="Shape 3"/>
+          <p:cNvSpPr/>
+          <p:nvPr/>
+        </p:nvSpPr>
+        <p:spPr>
+          <a:xfrm>
+            <a:off x="502920" y="2971800"/>
+            <a:ext cx="11183112" cy="13716"/>
+          </a:xfrm>
+          <a:prstGeom prst="rect">
+            <a:avLst/>
+          </a:prstGeom>
+          <a:solidFill>
+            <a:srgbClr val="2A3342"/>
+          </a:solidFill>
+          <a:ln w="12700">
+            <a:solidFill>
+              <a:srgbClr val="2A3342"/>
+            </a:solidFill>
+            <a:prstDash val="solid"/>
+          </a:ln>
+        </p:spPr>
+      </p:sp>
+      <p:sp>
+        <p:nvSpPr>
+          <p:cNvPr id="6" name="Text 4"/>
+          <p:cNvSpPr/>
+          <p:nvPr/>
+        </p:nvSpPr>
+        <p:spPr>
+          <a:xfrm>
+            <a:off x="502920" y="3246120"/>
+            <a:ext cx="1828800" cy="256032"/>
+          </a:xfrm>
+          <a:prstGeom prst="rect">
+            <a:avLst/>
+          </a:prstGeom>
+          <a:noFill/>
+          <a:ln/>
+        </p:spPr>
+        <p:txBody>
+          <a:bodyPr wrap="square" lIns="0" tIns="0" rIns="0" bIns="0" rtlCol="0" anchor="ctr"/>
+          <a:lstStyle/>
+          <a:p>
+            <a:pPr indent="0" marL="0">
+              <a:buNone/>
+            </a:pPr>
+            <a:r>
+              <a:rPr lang="en-US" sz="1200" b="1" spc="130" kern="0" dirty="0">
+                <a:solidFill>
+                  <a:srgbClr val="C4501A"/>
+                </a:solidFill>
+                <a:latin typeface="Arial" pitchFamily="34" charset="0"/>
+                <a:ea typeface="Arial" pitchFamily="34" charset="-122"/>
+                <a:cs typeface="Arial" pitchFamily="34" charset="-120"/>
+              </a:rPr>
+              <a:t>DEMO</a:t>
+            </a:r>
+            <a:endParaRPr lang="en-US" sz="1200" dirty="0"/>
+          </a:p>
+        </p:txBody>
+      </p:sp>
+      <p:sp>
+        <p:nvSpPr>
+          <p:cNvPr id="7" name="Text 5">
+            <a:hlinkClick r:id="rId1" tooltip=""/>
+          </p:cNvPr>
+          <p:cNvSpPr/>
+          <p:nvPr/>
+        </p:nvSpPr>
+        <p:spPr>
+          <a:xfrm>
+            <a:off x="502920" y="3566160"/>
+            <a:ext cx="10972800" cy="411480"/>
+          </a:xfrm>
+          <a:prstGeom prst="rect">
+            <a:avLst/>
+          </a:prstGeom>
+          <a:noFill/>
+          <a:ln/>
+        </p:spPr>
+        <p:txBody>
+          <a:bodyPr wrap="square" lIns="0" tIns="0" rIns="0" bIns="0" rtlCol="0" anchor="ctr"/>
+          <a:lstStyle/>
+          <a:p>
+            <a:pPr indent="0" marL="0">
+              <a:buNone/>
+            </a:pPr>
+            <a:r>
+              <a:rPr lang="en-US" sz="2200" u="sng" dirty="0">
+                <a:solidFill>
+                  <a:srgbClr val="F7F4EE"/>
+                </a:solidFill>
+                <a:latin typeface="Arial" pitchFamily="34" charset="0"/>
+                <a:ea typeface="Arial" pitchFamily="34" charset="-122"/>
+                <a:cs typeface="Arial" pitchFamily="34" charset="-120"/>
+                <a:hlinkClick r:id="rId1" invalidUrl="" action="" tgtFrame="" tooltip="" history="1" highlightClick="0" endSnd="0">
+                  <a:extLst>
+                    <a:ext uri="{A12FA001-AC4F-418D-AE19-62706E023703}">
+                      <ahyp:hlinkClr xmlns:ahyp="http://schemas.microsoft.com/office/drawing/2018/hyperlinkcolor" val="tx"/>
+                    </a:ext>
+                  </a:extLst>
+                </a:hlinkClick>
+              </a:rPr>
+              <a:t>dhamarit.github.io/promotegate-demo</a:t>
+            </a:r>
+            <a:endParaRPr lang="en-US" sz="2200" dirty="0"/>
+          </a:p>
+        </p:txBody>
+      </p:sp>
+      <p:sp>
+        <p:nvSpPr>
+          <p:cNvPr id="8" name="Text 6"/>
+          <p:cNvSpPr/>
+          <p:nvPr/>
+        </p:nvSpPr>
+        <p:spPr>
+          <a:xfrm>
+            <a:off x="502920" y="4206240"/>
+            <a:ext cx="1828800" cy="256032"/>
+          </a:xfrm>
+          <a:prstGeom prst="rect">
+            <a:avLst/>
+          </a:prstGeom>
+          <a:noFill/>
+          <a:ln/>
+        </p:spPr>
+        <p:txBody>
+          <a:bodyPr wrap="square" lIns="0" tIns="0" rIns="0" bIns="0" rtlCol="0" anchor="ctr"/>
+          <a:lstStyle/>
+          <a:p>
+            <a:pPr indent="0" marL="0">
+              <a:buNone/>
+            </a:pPr>
+            <a:r>
+              <a:rPr lang="en-US" sz="1200" b="1" spc="130" kern="0" dirty="0">
+                <a:solidFill>
+                  <a:srgbClr val="C4501A"/>
+                </a:solidFill>
+                <a:latin typeface="Arial" pitchFamily="34" charset="0"/>
+                <a:ea typeface="Arial" pitchFamily="34" charset="-122"/>
+                <a:cs typeface="Arial" pitchFamily="34" charset="-120"/>
+              </a:rPr>
+              <a:t>CODE</a:t>
+            </a:r>
+            <a:endParaRPr lang="en-US" sz="1200" dirty="0"/>
+          </a:p>
+        </p:txBody>
+      </p:sp>
+      <p:sp>
+        <p:nvSpPr>
+          <p:cNvPr id="9" name="Text 7">
+            <a:hlinkClick r:id="rId2" tooltip=""/>
+          </p:cNvPr>
+          <p:cNvSpPr/>
+          <p:nvPr/>
+        </p:nvSpPr>
+        <p:spPr>
+          <a:xfrm>
+            <a:off x="502920" y="4526280"/>
+            <a:ext cx="10972800" cy="384048"/>
+          </a:xfrm>
+          <a:prstGeom prst="rect">
+            <a:avLst/>
+          </a:prstGeom>
+          <a:noFill/>
+          <a:ln/>
+        </p:spPr>
+        <p:txBody>
+          <a:bodyPr wrap="square" lIns="0" tIns="0" rIns="0" bIns="0" rtlCol="0" anchor="ctr"/>
+          <a:lstStyle/>
+          <a:p>
+            <a:pPr indent="0" marL="0">
+              <a:buNone/>
+            </a:pPr>
+            <a:r>
+              <a:rPr lang="en-US" sz="2200" u="sng" dirty="0">
+                <a:solidFill>
+                  <a:srgbClr val="F7F4EE"/>
+                </a:solidFill>
+                <a:latin typeface="Arial" pitchFamily="34" charset="0"/>
+                <a:ea typeface="Arial" pitchFamily="34" charset="-122"/>
+                <a:cs typeface="Arial" pitchFamily="34" charset="-120"/>
+                <a:hlinkClick r:id="rId2" invalidUrl="" action="" tgtFrame="" tooltip="" history="1" highlightClick="0" endSnd="0">
+                  <a:extLst>
+                    <a:ext uri="{A12FA001-AC4F-418D-AE19-62706E023703}">
+                      <ahyp:hlinkClr xmlns:ahyp="http://schemas.microsoft.com/office/drawing/2018/hyperlinkcolor" val="tx"/>
+                    </a:ext>
+                  </a:extLst>
+                </a:hlinkClick>
+              </a:rPr>
+              <a:t>github.com/dhamariT/promotegate</a:t>
+            </a:r>
+            <a:endParaRPr lang="en-US" sz="2200" dirty="0"/>
+          </a:p>
+        </p:txBody>
+      </p:sp>
+      <p:sp>
+        <p:nvSpPr>
+          <p:cNvPr id="10" name="Text 8"/>
+          <p:cNvSpPr/>
+          <p:nvPr/>
+        </p:nvSpPr>
+        <p:spPr>
+          <a:xfrm>
+            <a:off x="502920" y="6126480"/>
+            <a:ext cx="10972800" cy="274320"/>
+          </a:xfrm>
+          <a:prstGeom prst="rect">
+            <a:avLst/>
+          </a:prstGeom>
+          <a:noFill/>
+          <a:ln/>
+        </p:spPr>
+        <p:txBody>
+          <a:bodyPr wrap="square" lIns="0" tIns="0" rIns="0" bIns="0" rtlCol="0" anchor="ctr"/>
+          <a:lstStyle/>
+          <a:p>
+            <a:pPr indent="0" marL="0">
+              <a:buNone/>
+            </a:pPr>
+            <a:r>
+              <a:rPr lang="en-US" sz="1400" dirty="0">
+                <a:solidFill>
+                  <a:srgbClr val="A8B0BC"/>
+                </a:solidFill>
+                <a:latin typeface="Arial" pitchFamily="34" charset="0"/>
+                <a:ea typeface="Arial" pitchFamily="34" charset="-122"/>
+                <a:cs typeface="Arial" pitchFamily="34" charset="-120"/>
+              </a:rPr>
+              <a:t>PromoteGate  ·  A person still clicks.</a:t>
+            </a:r>
+            <a:endParaRPr lang="en-US" sz="1400" dirty="0"/>
+          </a:p>
+        </p:txBody>
+      </p:sp>
+    </p:spTree>
+  </p:cSld>
+  <p:clrMapOvr>
+    <a:masterClrMapping/>
+  </p:clrMapOvr>
+</p:sld>
+</file>
+
 <file path=ppt/slides/slide2.xml><?xml version="1.0" encoding="utf-8"?>
 <p:sld xmlns:a="http://schemas.openxmlformats.org/drawingml/2006/main" xmlns:r="http://schemas.openxmlformats.org/officeDocument/2006/relationships" xmlns:p="http://schemas.openxmlformats.org/presentationml/2006/main">
   <p:cSld name="Slide 2">
@@ -4307,7 +5873,7 @@
                 <a:ea typeface="Arial" pitchFamily="34" charset="-122"/>
                 <a:cs typeface="Arial" pitchFamily="34" charset="-120"/>
               </a:rPr>
-              <a:t>THE PROOF</a:t>
+              <a:t>THE GATE</a:t>
             </a:r>
             <a:endParaRPr lang="en-US" sz="1200" dirty="0"/>
           </a:p>
@@ -4410,7 +5976,7 @@
                 <a:ea typeface="Arial" pitchFamily="34" charset="-122"/>
                 <a:cs typeface="Arial" pitchFamily="34" charset="-120"/>
               </a:rPr>
-              <a:t>A real ABB IRB 6660. 55 faults held back.</a:t>
+              <a:t>Five rules, pinned before anything is trained.</a:t>
             </a:r>
             <a:endParaRPr lang="en-US" sz="2600" dirty="0"/>
           </a:p>
@@ -4449,7 +6015,7 @@
                 <a:ea typeface="Arial" pitchFamily="34" charset="-122"/>
                 <a:cs typeface="Arial" pitchFamily="34" charset="-120"/>
               </a:rPr>
-              <a:t>272 cutting passes. Healthy tool, damaged tool, or a drifted axis. These 55 faults were never used for training.</a:t>
+              <a:t>Nobody tunes them afterward to let a favourite through. The new model has to clear every one, on faults it has never seen.</a:t>
             </a:r>
             <a:endParaRPr lang="en-US" sz="1400" dirty="0"/>
           </a:p>
@@ -4457,141 +6023,24 @@
       </p:sp>
       <p:sp>
         <p:nvSpPr>
-          <p:cNvPr id="8" name="Text 6"/>
-          <p:cNvSpPr/>
-          <p:nvPr/>
-        </p:nvSpPr>
-        <p:spPr>
-          <a:xfrm>
-            <a:off x="411480" y="1737360"/>
-            <a:ext cx="2103120" cy="868680"/>
-          </a:xfrm>
-          <a:prstGeom prst="rect">
-            <a:avLst/>
-          </a:prstGeom>
-          <a:noFill/>
-          <a:ln/>
-        </p:spPr>
-        <p:txBody>
-          <a:bodyPr wrap="square" lIns="0" tIns="0" rIns="0" bIns="0" rtlCol="0" anchor="ctr"/>
-          <a:lstStyle/>
-          <a:p>
-            <a:pPr indent="0" marL="0">
-              <a:buNone/>
-            </a:pPr>
-            <a:r>
-              <a:rPr lang="en-US" sz="6000" b="1" dirty="0">
-                <a:solidFill>
-                  <a:srgbClr val="12171F"/>
-                </a:solidFill>
-                <a:latin typeface="Arial" pitchFamily="34" charset="0"/>
-                <a:ea typeface="Arial" pitchFamily="34" charset="-122"/>
-                <a:cs typeface="Arial" pitchFamily="34" charset="-120"/>
-              </a:rPr>
-              <a:t>43</a:t>
-            </a:r>
-            <a:endParaRPr lang="en-US" sz="6000" dirty="0"/>
-          </a:p>
-        </p:txBody>
-      </p:sp>
-      <p:sp>
-        <p:nvSpPr>
-          <p:cNvPr id="9" name="Text 7"/>
-          <p:cNvSpPr/>
-          <p:nvPr/>
-        </p:nvSpPr>
-        <p:spPr>
-          <a:xfrm>
-            <a:off x="2468880" y="1874520"/>
-            <a:ext cx="2926080" cy="274320"/>
-          </a:xfrm>
-          <a:prstGeom prst="rect">
-            <a:avLst/>
-          </a:prstGeom>
-          <a:noFill/>
-          <a:ln/>
-        </p:spPr>
-        <p:txBody>
-          <a:bodyPr wrap="square" lIns="0" tIns="0" rIns="0" bIns="0" rtlCol="0" anchor="ctr"/>
-          <a:lstStyle/>
-          <a:p>
-            <a:pPr indent="0" marL="0">
-              <a:buNone/>
-            </a:pPr>
-            <a:r>
-              <a:rPr lang="en-US" sz="1400" b="1" dirty="0">
-                <a:solidFill>
-                  <a:srgbClr val="5C6573"/>
-                </a:solidFill>
-                <a:latin typeface="Arial" pitchFamily="34" charset="0"/>
-                <a:ea typeface="Arial" pitchFamily="34" charset="-122"/>
-                <a:cs typeface="Arial" pitchFamily="34" charset="-120"/>
-              </a:rPr>
-              <a:t>of 55 missed</a:t>
-            </a:r>
-            <a:endParaRPr lang="en-US" sz="1400" dirty="0"/>
-          </a:p>
-        </p:txBody>
-      </p:sp>
-      <p:sp>
-        <p:nvSpPr>
-          <p:cNvPr id="10" name="Text 8"/>
-          <p:cNvSpPr/>
-          <p:nvPr/>
-        </p:nvSpPr>
-        <p:spPr>
-          <a:xfrm>
-            <a:off x="2468880" y="2176272"/>
-            <a:ext cx="3840480" cy="292608"/>
-          </a:xfrm>
-          <a:prstGeom prst="rect">
-            <a:avLst/>
-          </a:prstGeom>
-          <a:noFill/>
-          <a:ln/>
-        </p:spPr>
-        <p:txBody>
-          <a:bodyPr wrap="square" lIns="0" tIns="0" rIns="0" bIns="0" rtlCol="0" anchor="ctr"/>
-          <a:lstStyle/>
-          <a:p>
-            <a:pPr indent="0" marL="0">
-              <a:buNone/>
-            </a:pPr>
-            <a:r>
-              <a:rPr lang="en-US" sz="1500" dirty="0">
-                <a:solidFill>
-                  <a:srgbClr val="12171F"/>
-                </a:solidFill>
-                <a:latin typeface="Arial" pitchFamily="34" charset="0"/>
-                <a:ea typeface="Arial" pitchFamily="34" charset="-122"/>
-                <a:cs typeface="Arial" pitchFamily="34" charset="-120"/>
-              </a:rPr>
-              <a:t>Vibration limit already in production</a:t>
-            </a:r>
-            <a:endParaRPr lang="en-US" sz="1500" dirty="0"/>
-          </a:p>
-        </p:txBody>
-      </p:sp>
-      <p:sp>
-        <p:nvSpPr>
-          <p:cNvPr id="11" name="Shape 9"/>
-          <p:cNvSpPr/>
-          <p:nvPr/>
-        </p:nvSpPr>
-        <p:spPr>
-          <a:xfrm>
-            <a:off x="6675120" y="2029968"/>
-            <a:ext cx="5029200" cy="256032"/>
+          <p:cNvPr id="8" name="Shape 6"/>
+          <p:cNvSpPr/>
+          <p:nvPr/>
+        </p:nvSpPr>
+        <p:spPr>
+          <a:xfrm>
+            <a:off x="457200" y="1737360"/>
+            <a:ext cx="7406640" cy="13716"/>
           </a:xfrm>
           <a:prstGeom prst="rect">
             <a:avLst/>
           </a:prstGeom>
           <a:solidFill>
-            <a:srgbClr val="E6DDD0"/>
+            <a:srgbClr val="D5CBBC"/>
           </a:solidFill>
           <a:ln w="12700">
             <a:solidFill>
-              <a:srgbClr val="E6DDD0"/>
+              <a:srgbClr val="D5CBBC"/>
             </a:solidFill>
             <a:prstDash val="solid"/>
           </a:ln>
@@ -4599,24 +6048,180 @@
       </p:sp>
       <p:sp>
         <p:nvSpPr>
-          <p:cNvPr id="12" name="Shape 10"/>
-          <p:cNvSpPr/>
-          <p:nvPr/>
-        </p:nvSpPr>
-        <p:spPr>
-          <a:xfrm>
-            <a:off x="6675120" y="2029968"/>
-            <a:ext cx="3931920" cy="256032"/>
+          <p:cNvPr id="9" name="Text 7"/>
+          <p:cNvSpPr/>
+          <p:nvPr/>
+        </p:nvSpPr>
+        <p:spPr>
+          <a:xfrm>
+            <a:off x="457200" y="1883664"/>
+            <a:ext cx="640080" cy="320040"/>
+          </a:xfrm>
+          <a:prstGeom prst="rect">
+            <a:avLst/>
+          </a:prstGeom>
+          <a:noFill/>
+          <a:ln/>
+        </p:spPr>
+        <p:txBody>
+          <a:bodyPr wrap="square" lIns="0" tIns="0" rIns="0" bIns="0" rtlCol="0" anchor="ctr"/>
+          <a:lstStyle/>
+          <a:p>
+            <a:pPr indent="0" marL="0">
+              <a:buNone/>
+            </a:pPr>
+            <a:r>
+              <a:rPr lang="en-US" sz="1600" b="1" dirty="0">
+                <a:solidFill>
+                  <a:srgbClr val="C4501A"/>
+                </a:solidFill>
+                <a:latin typeface="Arial" pitchFamily="34" charset="0"/>
+                <a:ea typeface="Arial" pitchFamily="34" charset="-122"/>
+                <a:cs typeface="Arial" pitchFamily="34" charset="-120"/>
+              </a:rPr>
+              <a:t>01</a:t>
+            </a:r>
+            <a:endParaRPr lang="en-US" sz="1600" dirty="0"/>
+          </a:p>
+        </p:txBody>
+      </p:sp>
+      <p:sp>
+        <p:nvSpPr>
+          <p:cNvPr id="10" name="Text 8"/>
+          <p:cNvSpPr/>
+          <p:nvPr/>
+        </p:nvSpPr>
+        <p:spPr>
+          <a:xfrm>
+            <a:off x="1143000" y="1865376"/>
+            <a:ext cx="2377440" cy="320040"/>
+          </a:xfrm>
+          <a:prstGeom prst="rect">
+            <a:avLst/>
+          </a:prstGeom>
+          <a:noFill/>
+          <a:ln/>
+        </p:spPr>
+        <p:txBody>
+          <a:bodyPr wrap="square" lIns="0" tIns="0" rIns="0" bIns="0" rtlCol="0" anchor="ctr"/>
+          <a:lstStyle/>
+          <a:p>
+            <a:pPr indent="0" marL="0">
+              <a:buNone/>
+            </a:pPr>
+            <a:r>
+              <a:rPr lang="en-US" sz="1700" b="1" dirty="0">
+                <a:solidFill>
+                  <a:srgbClr val="12171F"/>
+                </a:solidFill>
+                <a:latin typeface="Arial" pitchFamily="34" charset="0"/>
+                <a:ea typeface="Arial" pitchFamily="34" charset="-122"/>
+                <a:cs typeface="Arial" pitchFamily="34" charset="-120"/>
+              </a:rPr>
+              <a:t>Enough evidence</a:t>
+            </a:r>
+            <a:endParaRPr lang="en-US" sz="1700" dirty="0"/>
+          </a:p>
+        </p:txBody>
+      </p:sp>
+      <p:sp>
+        <p:nvSpPr>
+          <p:cNvPr id="11" name="Text 9"/>
+          <p:cNvSpPr/>
+          <p:nvPr/>
+        </p:nvSpPr>
+        <p:spPr>
+          <a:xfrm>
+            <a:off x="3611880" y="1847088"/>
+            <a:ext cx="3017520" cy="548640"/>
+          </a:xfrm>
+          <a:prstGeom prst="rect">
+            <a:avLst/>
+          </a:prstGeom>
+          <a:noFill/>
+          <a:ln/>
+        </p:spPr>
+        <p:txBody>
+          <a:bodyPr wrap="square" lIns="0" tIns="0" rIns="0" bIns="0" rtlCol="0" anchor="ctr"/>
+          <a:lstStyle/>
+          <a:p>
+            <a:pPr indent="0" marL="0">
+              <a:buNone/>
+            </a:pPr>
+            <a:r>
+              <a:rPr lang="en-US" sz="1200" dirty="0">
+                <a:solidFill>
+                  <a:srgbClr val="5C6573"/>
+                </a:solidFill>
+                <a:latin typeface="Arial" pitchFamily="34" charset="0"/>
+                <a:ea typeface="Arial" pitchFamily="34" charset="-122"/>
+                <a:cs typeface="Arial" pitchFamily="34" charset="-120"/>
+              </a:rPr>
+              <a:t>At least 8 held-out faults, or there is no verdict.</a:t>
+            </a:r>
+            <a:endParaRPr lang="en-US" sz="1200" dirty="0"/>
+          </a:p>
+        </p:txBody>
+      </p:sp>
+      <p:sp>
+        <p:nvSpPr>
+          <p:cNvPr id="12" name="Text 10"/>
+          <p:cNvSpPr/>
+          <p:nvPr/>
+        </p:nvSpPr>
+        <p:spPr>
+          <a:xfrm>
+            <a:off x="6629400" y="1865376"/>
+            <a:ext cx="1234440" cy="320040"/>
+          </a:xfrm>
+          <a:prstGeom prst="rect">
+            <a:avLst/>
+          </a:prstGeom>
+          <a:noFill/>
+          <a:ln/>
+        </p:spPr>
+        <p:txBody>
+          <a:bodyPr wrap="square" lIns="0" tIns="0" rIns="0" bIns="0" rtlCol="0" anchor="ctr"/>
+          <a:lstStyle/>
+          <a:p>
+            <a:pPr algn="r" indent="0" marL="0">
+              <a:buNone/>
+            </a:pPr>
+            <a:r>
+              <a:rPr lang="en-US" sz="1300" b="1" dirty="0">
+                <a:solidFill>
+                  <a:srgbClr val="1F7A4D"/>
+                </a:solidFill>
+                <a:latin typeface="Arial" pitchFamily="34" charset="0"/>
+                <a:ea typeface="Arial" pitchFamily="34" charset="-122"/>
+                <a:cs typeface="Arial" pitchFamily="34" charset="-120"/>
+              </a:rPr>
+              <a:t>55 held out</a:t>
+            </a:r>
+            <a:endParaRPr lang="en-US" sz="1300" dirty="0"/>
+          </a:p>
+        </p:txBody>
+      </p:sp>
+      <p:sp>
+        <p:nvSpPr>
+          <p:cNvPr id="13" name="Shape 11"/>
+          <p:cNvSpPr/>
+          <p:nvPr/>
+        </p:nvSpPr>
+        <p:spPr>
+          <a:xfrm>
+            <a:off x="457200" y="2450592"/>
+            <a:ext cx="7406640" cy="13716"/>
           </a:xfrm>
           <a:prstGeom prst="rect">
             <a:avLst/>
           </a:prstGeom>
           <a:solidFill>
-            <a:srgbClr val="C4501A"/>
+            <a:srgbClr val="D5CBBC"/>
           </a:solidFill>
           <a:ln w="12700">
             <a:solidFill>
-              <a:srgbClr val="C4501A"/>
+              <a:srgbClr val="D5CBBC"/>
             </a:solidFill>
             <a:prstDash val="solid"/>
           </a:ln>
@@ -4624,30 +6229,30 @@
       </p:sp>
       <p:sp>
         <p:nvSpPr>
-          <p:cNvPr id="13" name="Text 11"/>
-          <p:cNvSpPr/>
-          <p:nvPr/>
-        </p:nvSpPr>
-        <p:spPr>
-          <a:xfrm>
-            <a:off x="411480" y="2926080"/>
-            <a:ext cx="2103120" cy="868680"/>
-          </a:xfrm>
-          <a:prstGeom prst="rect">
-            <a:avLst/>
-          </a:prstGeom>
-          <a:noFill/>
-          <a:ln/>
-        </p:spPr>
-        <p:txBody>
-          <a:bodyPr wrap="square" lIns="0" tIns="0" rIns="0" bIns="0" rtlCol="0" anchor="ctr"/>
-          <a:lstStyle/>
-          <a:p>
-            <a:pPr indent="0" marL="0">
-              <a:buNone/>
-            </a:pPr>
-            <a:r>
-              <a:rPr lang="en-US" sz="6000" b="1" dirty="0">
+          <p:cNvPr id="14" name="Text 12"/>
+          <p:cNvSpPr/>
+          <p:nvPr/>
+        </p:nvSpPr>
+        <p:spPr>
+          <a:xfrm>
+            <a:off x="457200" y="2596896"/>
+            <a:ext cx="640080" cy="320040"/>
+          </a:xfrm>
+          <a:prstGeom prst="rect">
+            <a:avLst/>
+          </a:prstGeom>
+          <a:noFill/>
+          <a:ln/>
+        </p:spPr>
+        <p:txBody>
+          <a:bodyPr wrap="square" lIns="0" tIns="0" rIns="0" bIns="0" rtlCol="0" anchor="ctr"/>
+          <a:lstStyle/>
+          <a:p>
+            <a:pPr indent="0" marL="0">
+              <a:buNone/>
+            </a:pPr>
+            <a:r>
+              <a:rPr lang="en-US" sz="1600" b="1" dirty="0">
                 <a:solidFill>
                   <a:srgbClr val="C4501A"/>
                 </a:solidFill>
@@ -4655,38 +6260,77 @@
                 <a:ea typeface="Arial" pitchFamily="34" charset="-122"/>
                 <a:cs typeface="Arial" pitchFamily="34" charset="-120"/>
               </a:rPr>
-              <a:t>4</a:t>
-            </a:r>
-            <a:endParaRPr lang="en-US" sz="6000" dirty="0"/>
-          </a:p>
-        </p:txBody>
-      </p:sp>
-      <p:sp>
-        <p:nvSpPr>
-          <p:cNvPr id="14" name="Text 12"/>
-          <p:cNvSpPr/>
-          <p:nvPr/>
-        </p:nvSpPr>
-        <p:spPr>
-          <a:xfrm>
-            <a:off x="2468880" y="3063240"/>
-            <a:ext cx="2926080" cy="274320"/>
-          </a:xfrm>
-          <a:prstGeom prst="rect">
-            <a:avLst/>
-          </a:prstGeom>
-          <a:noFill/>
-          <a:ln/>
-        </p:spPr>
-        <p:txBody>
-          <a:bodyPr wrap="square" lIns="0" tIns="0" rIns="0" bIns="0" rtlCol="0" anchor="ctr"/>
-          <a:lstStyle/>
-          <a:p>
-            <a:pPr indent="0" marL="0">
-              <a:buNone/>
-            </a:pPr>
-            <a:r>
-              <a:rPr lang="en-US" sz="1400" b="1" dirty="0">
+              <a:t>02</a:t>
+            </a:r>
+            <a:endParaRPr lang="en-US" sz="1600" dirty="0"/>
+          </a:p>
+        </p:txBody>
+      </p:sp>
+      <p:sp>
+        <p:nvSpPr>
+          <p:cNvPr id="15" name="Text 13"/>
+          <p:cNvSpPr/>
+          <p:nvPr/>
+        </p:nvSpPr>
+        <p:spPr>
+          <a:xfrm>
+            <a:off x="1143000" y="2578608"/>
+            <a:ext cx="2377440" cy="320040"/>
+          </a:xfrm>
+          <a:prstGeom prst="rect">
+            <a:avLst/>
+          </a:prstGeom>
+          <a:noFill/>
+          <a:ln/>
+        </p:spPr>
+        <p:txBody>
+          <a:bodyPr wrap="square" lIns="0" tIns="0" rIns="0" bIns="0" rtlCol="0" anchor="ctr"/>
+          <a:lstStyle/>
+          <a:p>
+            <a:pPr indent="0" marL="0">
+              <a:buNone/>
+            </a:pPr>
+            <a:r>
+              <a:rPr lang="en-US" sz="1700" b="1" dirty="0">
+                <a:solidFill>
+                  <a:srgbClr val="12171F"/>
+                </a:solidFill>
+                <a:latin typeface="Arial" pitchFamily="34" charset="0"/>
+                <a:ea typeface="Arial" pitchFamily="34" charset="-122"/>
+                <a:cs typeface="Arial" pitchFamily="34" charset="-120"/>
+              </a:rPr>
+              <a:t>Misses no more</a:t>
+            </a:r>
+            <a:endParaRPr lang="en-US" sz="1700" dirty="0"/>
+          </a:p>
+        </p:txBody>
+      </p:sp>
+      <p:sp>
+        <p:nvSpPr>
+          <p:cNvPr id="16" name="Text 14"/>
+          <p:cNvSpPr/>
+          <p:nvPr/>
+        </p:nvSpPr>
+        <p:spPr>
+          <a:xfrm>
+            <a:off x="3611880" y="2560320"/>
+            <a:ext cx="3017520" cy="548640"/>
+          </a:xfrm>
+          <a:prstGeom prst="rect">
+            <a:avLst/>
+          </a:prstGeom>
+          <a:noFill/>
+          <a:ln/>
+        </p:spPr>
+        <p:txBody>
+          <a:bodyPr wrap="square" lIns="0" tIns="0" rIns="0" bIns="0" rtlCol="0" anchor="ctr"/>
+          <a:lstStyle/>
+          <a:p>
+            <a:pPr indent="0" marL="0">
+              <a:buNone/>
+            </a:pPr>
+            <a:r>
+              <a:rPr lang="en-US" sz="1200" dirty="0">
                 <a:solidFill>
                   <a:srgbClr val="5C6573"/>
                 </a:solidFill>
@@ -4694,71 +6338,71 @@
                 <a:ea typeface="Arial" pitchFamily="34" charset="-122"/>
                 <a:cs typeface="Arial" pitchFamily="34" charset="-120"/>
               </a:rPr>
-              <a:t>of 55 missed</a:t>
-            </a:r>
-            <a:endParaRPr lang="en-US" sz="1400" dirty="0"/>
-          </a:p>
-        </p:txBody>
-      </p:sp>
-      <p:sp>
-        <p:nvSpPr>
-          <p:cNvPr id="15" name="Text 13"/>
-          <p:cNvSpPr/>
-          <p:nvPr/>
-        </p:nvSpPr>
-        <p:spPr>
-          <a:xfrm>
-            <a:off x="2468880" y="3364992"/>
-            <a:ext cx="4023360" cy="292608"/>
-          </a:xfrm>
-          <a:prstGeom prst="rect">
-            <a:avLst/>
-          </a:prstGeom>
-          <a:noFill/>
-          <a:ln/>
-        </p:spPr>
-        <p:txBody>
-          <a:bodyPr wrap="square" lIns="0" tIns="0" rIns="0" bIns="0" rtlCol="0" anchor="ctr"/>
-          <a:lstStyle/>
-          <a:p>
-            <a:pPr indent="0" marL="0">
-              <a:buNone/>
-            </a:pPr>
-            <a:r>
-              <a:rPr lang="en-US" sz="1500" dirty="0">
-                <a:solidFill>
-                  <a:srgbClr val="12171F"/>
-                </a:solidFill>
-                <a:latin typeface="Arial" pitchFamily="34" charset="0"/>
-                <a:ea typeface="Arial" pitchFamily="34" charset="-122"/>
-                <a:cs typeface="Arial" pitchFamily="34" charset="-120"/>
-              </a:rPr>
-              <a:t>LightGBM. The lead may promote this one.</a:t>
-            </a:r>
-            <a:endParaRPr lang="en-US" sz="1500" dirty="0"/>
-          </a:p>
-        </p:txBody>
-      </p:sp>
-      <p:sp>
-        <p:nvSpPr>
-          <p:cNvPr id="16" name="Shape 14"/>
-          <p:cNvSpPr/>
-          <p:nvPr/>
-        </p:nvSpPr>
-        <p:spPr>
-          <a:xfrm>
-            <a:off x="6675120" y="3218688"/>
-            <a:ext cx="5029200" cy="256032"/>
+              <a:t>Missed faults must not rise above the model in production.</a:t>
+            </a:r>
+            <a:endParaRPr lang="en-US" sz="1200" dirty="0"/>
+          </a:p>
+        </p:txBody>
+      </p:sp>
+      <p:sp>
+        <p:nvSpPr>
+          <p:cNvPr id="17" name="Text 15"/>
+          <p:cNvSpPr/>
+          <p:nvPr/>
+        </p:nvSpPr>
+        <p:spPr>
+          <a:xfrm>
+            <a:off x="6629400" y="2578608"/>
+            <a:ext cx="1234440" cy="320040"/>
+          </a:xfrm>
+          <a:prstGeom prst="rect">
+            <a:avLst/>
+          </a:prstGeom>
+          <a:noFill/>
+          <a:ln/>
+        </p:spPr>
+        <p:txBody>
+          <a:bodyPr wrap="square" lIns="0" tIns="0" rIns="0" bIns="0" rtlCol="0" anchor="ctr"/>
+          <a:lstStyle/>
+          <a:p>
+            <a:pPr algn="r" indent="0" marL="0">
+              <a:buNone/>
+            </a:pPr>
+            <a:r>
+              <a:rPr lang="en-US" sz="1300" b="1" dirty="0">
+                <a:solidFill>
+                  <a:srgbClr val="1F7A4D"/>
+                </a:solidFill>
+                <a:latin typeface="Arial" pitchFamily="34" charset="0"/>
+                <a:ea typeface="Arial" pitchFamily="34" charset="-122"/>
+                <a:cs typeface="Arial" pitchFamily="34" charset="-120"/>
+              </a:rPr>
+              <a:t>4 vs 43</a:t>
+            </a:r>
+            <a:endParaRPr lang="en-US" sz="1300" dirty="0"/>
+          </a:p>
+        </p:txBody>
+      </p:sp>
+      <p:sp>
+        <p:nvSpPr>
+          <p:cNvPr id="18" name="Shape 16"/>
+          <p:cNvSpPr/>
+          <p:nvPr/>
+        </p:nvSpPr>
+        <p:spPr>
+          <a:xfrm>
+            <a:off x="457200" y="3163824"/>
+            <a:ext cx="7406640" cy="13716"/>
           </a:xfrm>
           <a:prstGeom prst="rect">
             <a:avLst/>
           </a:prstGeom>
           <a:solidFill>
-            <a:srgbClr val="E6DDD0"/>
+            <a:srgbClr val="D5CBBC"/>
           </a:solidFill>
           <a:ln w="12700">
             <a:solidFill>
-              <a:srgbClr val="E6DDD0"/>
+              <a:srgbClr val="D5CBBC"/>
             </a:solidFill>
             <a:prstDash val="solid"/>
           </a:ln>
@@ -4766,14 +6410,557 @@
       </p:sp>
       <p:sp>
         <p:nvSpPr>
-          <p:cNvPr id="17" name="Shape 15"/>
-          <p:cNvSpPr/>
-          <p:nvPr/>
-        </p:nvSpPr>
-        <p:spPr>
-          <a:xfrm>
-            <a:off x="6675120" y="3218688"/>
-            <a:ext cx="365760" cy="256032"/>
+          <p:cNvPr id="19" name="Text 17"/>
+          <p:cNvSpPr/>
+          <p:nvPr/>
+        </p:nvSpPr>
+        <p:spPr>
+          <a:xfrm>
+            <a:off x="457200" y="3310128"/>
+            <a:ext cx="640080" cy="320040"/>
+          </a:xfrm>
+          <a:prstGeom prst="rect">
+            <a:avLst/>
+          </a:prstGeom>
+          <a:noFill/>
+          <a:ln/>
+        </p:spPr>
+        <p:txBody>
+          <a:bodyPr wrap="square" lIns="0" tIns="0" rIns="0" bIns="0" rtlCol="0" anchor="ctr"/>
+          <a:lstStyle/>
+          <a:p>
+            <a:pPr indent="0" marL="0">
+              <a:buNone/>
+            </a:pPr>
+            <a:r>
+              <a:rPr lang="en-US" sz="1600" b="1" dirty="0">
+                <a:solidFill>
+                  <a:srgbClr val="C4501A"/>
+                </a:solidFill>
+                <a:latin typeface="Arial" pitchFamily="34" charset="0"/>
+                <a:ea typeface="Arial" pitchFamily="34" charset="-122"/>
+                <a:cs typeface="Arial" pitchFamily="34" charset="-120"/>
+              </a:rPr>
+              <a:t>03</a:t>
+            </a:r>
+            <a:endParaRPr lang="en-US" sz="1600" dirty="0"/>
+          </a:p>
+        </p:txBody>
+      </p:sp>
+      <p:sp>
+        <p:nvSpPr>
+          <p:cNvPr id="20" name="Text 18"/>
+          <p:cNvSpPr/>
+          <p:nvPr/>
+        </p:nvSpPr>
+        <p:spPr>
+          <a:xfrm>
+            <a:off x="1143000" y="3291840"/>
+            <a:ext cx="2377440" cy="320040"/>
+          </a:xfrm>
+          <a:prstGeom prst="rect">
+            <a:avLst/>
+          </a:prstGeom>
+          <a:noFill/>
+          <a:ln/>
+        </p:spPr>
+        <p:txBody>
+          <a:bodyPr wrap="square" lIns="0" tIns="0" rIns="0" bIns="0" rtlCol="0" anchor="ctr"/>
+          <a:lstStyle/>
+          <a:p>
+            <a:pPr indent="0" marL="0">
+              <a:buNone/>
+            </a:pPr>
+            <a:r>
+              <a:rPr lang="en-US" sz="1700" b="1" dirty="0">
+                <a:solidFill>
+                  <a:srgbClr val="12171F"/>
+                </a:solidFill>
+                <a:latin typeface="Arial" pitchFamily="34" charset="0"/>
+                <a:ea typeface="Arial" pitchFamily="34" charset="-122"/>
+                <a:cs typeface="Arial" pitchFamily="34" charset="-120"/>
+              </a:rPr>
+              <a:t>Cries wolf less</a:t>
+            </a:r>
+            <a:endParaRPr lang="en-US" sz="1700" dirty="0"/>
+          </a:p>
+        </p:txBody>
+      </p:sp>
+      <p:sp>
+        <p:nvSpPr>
+          <p:cNvPr id="21" name="Text 19"/>
+          <p:cNvSpPr/>
+          <p:nvPr/>
+        </p:nvSpPr>
+        <p:spPr>
+          <a:xfrm>
+            <a:off x="3611880" y="3273552"/>
+            <a:ext cx="3017520" cy="548640"/>
+          </a:xfrm>
+          <a:prstGeom prst="rect">
+            <a:avLst/>
+          </a:prstGeom>
+          <a:noFill/>
+          <a:ln/>
+        </p:spPr>
+        <p:txBody>
+          <a:bodyPr wrap="square" lIns="0" tIns="0" rIns="0" bIns="0" rtlCol="0" anchor="ctr"/>
+          <a:lstStyle/>
+          <a:p>
+            <a:pPr indent="0" marL="0">
+              <a:buNone/>
+            </a:pPr>
+            <a:r>
+              <a:rPr lang="en-US" sz="1200" dirty="0">
+                <a:solidFill>
+                  <a:srgbClr val="5C6573"/>
+                </a:solidFill>
+                <a:latin typeface="Arial" pitchFamily="34" charset="0"/>
+                <a:ea typeface="Arial" pitchFamily="34" charset="-122"/>
+                <a:cs typeface="Arial" pitchFamily="34" charset="-120"/>
+              </a:rPr>
+              <a:t>False alarms under 5%, and at most 1 point above production.</a:t>
+            </a:r>
+            <a:endParaRPr lang="en-US" sz="1200" dirty="0"/>
+          </a:p>
+        </p:txBody>
+      </p:sp>
+      <p:sp>
+        <p:nvSpPr>
+          <p:cNvPr id="22" name="Text 20"/>
+          <p:cNvSpPr/>
+          <p:nvPr/>
+        </p:nvSpPr>
+        <p:spPr>
+          <a:xfrm>
+            <a:off x="6629400" y="3291840"/>
+            <a:ext cx="1234440" cy="320040"/>
+          </a:xfrm>
+          <a:prstGeom prst="rect">
+            <a:avLst/>
+          </a:prstGeom>
+          <a:noFill/>
+          <a:ln/>
+        </p:spPr>
+        <p:txBody>
+          <a:bodyPr wrap="square" lIns="0" tIns="0" rIns="0" bIns="0" rtlCol="0" anchor="ctr"/>
+          <a:lstStyle/>
+          <a:p>
+            <a:pPr algn="r" indent="0" marL="0">
+              <a:buNone/>
+            </a:pPr>
+            <a:r>
+              <a:rPr lang="en-US" sz="1300" b="1" dirty="0">
+                <a:solidFill>
+                  <a:srgbClr val="1F7A4D"/>
+                </a:solidFill>
+                <a:latin typeface="Arial" pitchFamily="34" charset="0"/>
+                <a:ea typeface="Arial" pitchFamily="34" charset="-122"/>
+                <a:cs typeface="Arial" pitchFamily="34" charset="-120"/>
+              </a:rPr>
+              <a:t>0% vs 15.4%</a:t>
+            </a:r>
+            <a:endParaRPr lang="en-US" sz="1300" dirty="0"/>
+          </a:p>
+        </p:txBody>
+      </p:sp>
+      <p:sp>
+        <p:nvSpPr>
+          <p:cNvPr id="23" name="Shape 21"/>
+          <p:cNvSpPr/>
+          <p:nvPr/>
+        </p:nvSpPr>
+        <p:spPr>
+          <a:xfrm>
+            <a:off x="457200" y="3877056"/>
+            <a:ext cx="7406640" cy="13716"/>
+          </a:xfrm>
+          <a:prstGeom prst="rect">
+            <a:avLst/>
+          </a:prstGeom>
+          <a:solidFill>
+            <a:srgbClr val="D5CBBC"/>
+          </a:solidFill>
+          <a:ln w="12700">
+            <a:solidFill>
+              <a:srgbClr val="D5CBBC"/>
+            </a:solidFill>
+            <a:prstDash val="solid"/>
+          </a:ln>
+        </p:spPr>
+      </p:sp>
+      <p:sp>
+        <p:nvSpPr>
+          <p:cNvPr id="24" name="Text 22"/>
+          <p:cNvSpPr/>
+          <p:nvPr/>
+        </p:nvSpPr>
+        <p:spPr>
+          <a:xfrm>
+            <a:off x="457200" y="4023360"/>
+            <a:ext cx="640080" cy="320040"/>
+          </a:xfrm>
+          <a:prstGeom prst="rect">
+            <a:avLst/>
+          </a:prstGeom>
+          <a:noFill/>
+          <a:ln/>
+        </p:spPr>
+        <p:txBody>
+          <a:bodyPr wrap="square" lIns="0" tIns="0" rIns="0" bIns="0" rtlCol="0" anchor="ctr"/>
+          <a:lstStyle/>
+          <a:p>
+            <a:pPr indent="0" marL="0">
+              <a:buNone/>
+            </a:pPr>
+            <a:r>
+              <a:rPr lang="en-US" sz="1600" b="1" dirty="0">
+                <a:solidFill>
+                  <a:srgbClr val="C4501A"/>
+                </a:solidFill>
+                <a:latin typeface="Arial" pitchFamily="34" charset="0"/>
+                <a:ea typeface="Arial" pitchFamily="34" charset="-122"/>
+                <a:cs typeface="Arial" pitchFamily="34" charset="-120"/>
+              </a:rPr>
+              <a:t>04</a:t>
+            </a:r>
+            <a:endParaRPr lang="en-US" sz="1600" dirty="0"/>
+          </a:p>
+        </p:txBody>
+      </p:sp>
+      <p:sp>
+        <p:nvSpPr>
+          <p:cNvPr id="25" name="Text 23"/>
+          <p:cNvSpPr/>
+          <p:nvPr/>
+        </p:nvSpPr>
+        <p:spPr>
+          <a:xfrm>
+            <a:off x="1143000" y="4005072"/>
+            <a:ext cx="2377440" cy="320040"/>
+          </a:xfrm>
+          <a:prstGeom prst="rect">
+            <a:avLst/>
+          </a:prstGeom>
+          <a:noFill/>
+          <a:ln/>
+        </p:spPr>
+        <p:txBody>
+          <a:bodyPr wrap="square" lIns="0" tIns="0" rIns="0" bIns="0" rtlCol="0" anchor="ctr"/>
+          <a:lstStyle/>
+          <a:p>
+            <a:pPr indent="0" marL="0">
+              <a:buNone/>
+            </a:pPr>
+            <a:r>
+              <a:rPr lang="en-US" sz="1700" b="1" dirty="0">
+                <a:solidFill>
+                  <a:srgbClr val="12171F"/>
+                </a:solidFill>
+                <a:latin typeface="Arial" pitchFamily="34" charset="0"/>
+                <a:ea typeface="Arial" pitchFamily="34" charset="-122"/>
+                <a:cs typeface="Arial" pitchFamily="34" charset="-120"/>
+              </a:rPr>
+              <a:t>Warns no later</a:t>
+            </a:r>
+            <a:endParaRPr lang="en-US" sz="1700" dirty="0"/>
+          </a:p>
+        </p:txBody>
+      </p:sp>
+      <p:sp>
+        <p:nvSpPr>
+          <p:cNvPr id="26" name="Text 24"/>
+          <p:cNvSpPr/>
+          <p:nvPr/>
+        </p:nvSpPr>
+        <p:spPr>
+          <a:xfrm>
+            <a:off x="3611880" y="3986784"/>
+            <a:ext cx="3017520" cy="548640"/>
+          </a:xfrm>
+          <a:prstGeom prst="rect">
+            <a:avLst/>
+          </a:prstGeom>
+          <a:noFill/>
+          <a:ln/>
+        </p:spPr>
+        <p:txBody>
+          <a:bodyPr wrap="square" lIns="0" tIns="0" rIns="0" bIns="0" rtlCol="0" anchor="ctr"/>
+          <a:lstStyle/>
+          <a:p>
+            <a:pPr indent="0" marL="0">
+              <a:buNone/>
+            </a:pPr>
+            <a:r>
+              <a:rPr lang="en-US" sz="1200" dirty="0">
+                <a:solidFill>
+                  <a:srgbClr val="5C6573"/>
+                </a:solidFill>
+                <a:latin typeface="Arial" pitchFamily="34" charset="0"/>
+                <a:ea typeface="Arial" pitchFamily="34" charset="-122"/>
+                <a:cs typeface="Arial" pitchFamily="34" charset="-120"/>
+              </a:rPr>
+              <a:t>Scored only when the recordings carry a failure clock. This set does not, so it is not scored.</a:t>
+            </a:r>
+            <a:endParaRPr lang="en-US" sz="1200" dirty="0"/>
+          </a:p>
+        </p:txBody>
+      </p:sp>
+      <p:sp>
+        <p:nvSpPr>
+          <p:cNvPr id="27" name="Text 25"/>
+          <p:cNvSpPr/>
+          <p:nvPr/>
+        </p:nvSpPr>
+        <p:spPr>
+          <a:xfrm>
+            <a:off x="6629400" y="4005072"/>
+            <a:ext cx="1234440" cy="320040"/>
+          </a:xfrm>
+          <a:prstGeom prst="rect">
+            <a:avLst/>
+          </a:prstGeom>
+          <a:noFill/>
+          <a:ln/>
+        </p:spPr>
+        <p:txBody>
+          <a:bodyPr wrap="square" lIns="0" tIns="0" rIns="0" bIns="0" rtlCol="0" anchor="ctr"/>
+          <a:lstStyle/>
+          <a:p>
+            <a:pPr algn="r" indent="0" marL="0">
+              <a:buNone/>
+            </a:pPr>
+            <a:r>
+              <a:rPr lang="en-US" sz="1300" b="1" dirty="0">
+                <a:solidFill>
+                  <a:srgbClr val="1F7A4D"/>
+                </a:solidFill>
+                <a:latin typeface="Arial" pitchFamily="34" charset="0"/>
+                <a:ea typeface="Arial" pitchFamily="34" charset="-122"/>
+                <a:cs typeface="Arial" pitchFamily="34" charset="-120"/>
+              </a:rPr>
+              <a:t>Not in this data</a:t>
+            </a:r>
+            <a:endParaRPr lang="en-US" sz="1300" dirty="0"/>
+          </a:p>
+        </p:txBody>
+      </p:sp>
+      <p:sp>
+        <p:nvSpPr>
+          <p:cNvPr id="28" name="Shape 26"/>
+          <p:cNvSpPr/>
+          <p:nvPr/>
+        </p:nvSpPr>
+        <p:spPr>
+          <a:xfrm>
+            <a:off x="457200" y="4590288"/>
+            <a:ext cx="7406640" cy="13716"/>
+          </a:xfrm>
+          <a:prstGeom prst="rect">
+            <a:avLst/>
+          </a:prstGeom>
+          <a:solidFill>
+            <a:srgbClr val="D5CBBC"/>
+          </a:solidFill>
+          <a:ln w="12700">
+            <a:solidFill>
+              <a:srgbClr val="D5CBBC"/>
+            </a:solidFill>
+            <a:prstDash val="solid"/>
+          </a:ln>
+        </p:spPr>
+      </p:sp>
+      <p:sp>
+        <p:nvSpPr>
+          <p:cNvPr id="29" name="Text 27"/>
+          <p:cNvSpPr/>
+          <p:nvPr/>
+        </p:nvSpPr>
+        <p:spPr>
+          <a:xfrm>
+            <a:off x="457200" y="4736592"/>
+            <a:ext cx="640080" cy="320040"/>
+          </a:xfrm>
+          <a:prstGeom prst="rect">
+            <a:avLst/>
+          </a:prstGeom>
+          <a:noFill/>
+          <a:ln/>
+        </p:spPr>
+        <p:txBody>
+          <a:bodyPr wrap="square" lIns="0" tIns="0" rIns="0" bIns="0" rtlCol="0" anchor="ctr"/>
+          <a:lstStyle/>
+          <a:p>
+            <a:pPr indent="0" marL="0">
+              <a:buNone/>
+            </a:pPr>
+            <a:r>
+              <a:rPr lang="en-US" sz="1600" b="1" dirty="0">
+                <a:solidFill>
+                  <a:srgbClr val="C4501A"/>
+                </a:solidFill>
+                <a:latin typeface="Arial" pitchFamily="34" charset="0"/>
+                <a:ea typeface="Arial" pitchFamily="34" charset="-122"/>
+                <a:cs typeface="Arial" pitchFamily="34" charset="-120"/>
+              </a:rPr>
+              <a:t>05</a:t>
+            </a:r>
+            <a:endParaRPr lang="en-US" sz="1600" dirty="0"/>
+          </a:p>
+        </p:txBody>
+      </p:sp>
+      <p:sp>
+        <p:nvSpPr>
+          <p:cNvPr id="30" name="Text 28"/>
+          <p:cNvSpPr/>
+          <p:nvPr/>
+        </p:nvSpPr>
+        <p:spPr>
+          <a:xfrm>
+            <a:off x="1143000" y="4718304"/>
+            <a:ext cx="2377440" cy="320040"/>
+          </a:xfrm>
+          <a:prstGeom prst="rect">
+            <a:avLst/>
+          </a:prstGeom>
+          <a:noFill/>
+          <a:ln/>
+        </p:spPr>
+        <p:txBody>
+          <a:bodyPr wrap="square" lIns="0" tIns="0" rIns="0" bIns="0" rtlCol="0" anchor="ctr"/>
+          <a:lstStyle/>
+          <a:p>
+            <a:pPr indent="0" marL="0">
+              <a:buNone/>
+            </a:pPr>
+            <a:r>
+              <a:rPr lang="en-US" sz="1700" b="1" dirty="0">
+                <a:solidFill>
+                  <a:srgbClr val="12171F"/>
+                </a:solidFill>
+                <a:latin typeface="Arial" pitchFamily="34" charset="0"/>
+                <a:ea typeface="Arial" pitchFamily="34" charset="-122"/>
+                <a:cs typeface="Arial" pitchFamily="34" charset="-120"/>
+              </a:rPr>
+              <a:t>Genuinely better</a:t>
+            </a:r>
+            <a:endParaRPr lang="en-US" sz="1700" dirty="0"/>
+          </a:p>
+        </p:txBody>
+      </p:sp>
+      <p:sp>
+        <p:nvSpPr>
+          <p:cNvPr id="31" name="Text 29"/>
+          <p:cNvSpPr/>
+          <p:nvPr/>
+        </p:nvSpPr>
+        <p:spPr>
+          <a:xfrm>
+            <a:off x="3611880" y="4700016"/>
+            <a:ext cx="3017520" cy="548640"/>
+          </a:xfrm>
+          <a:prstGeom prst="rect">
+            <a:avLst/>
+          </a:prstGeom>
+          <a:noFill/>
+          <a:ln/>
+        </p:spPr>
+        <p:txBody>
+          <a:bodyPr wrap="square" lIns="0" tIns="0" rIns="0" bIns="0" rtlCol="0" anchor="ctr"/>
+          <a:lstStyle/>
+          <a:p>
+            <a:pPr indent="0" marL="0">
+              <a:buNone/>
+            </a:pPr>
+            <a:r>
+              <a:rPr lang="en-US" sz="1200" dirty="0">
+                <a:solidFill>
+                  <a:srgbClr val="5C6573"/>
+                </a:solidFill>
+                <a:latin typeface="Arial" pitchFamily="34" charset="0"/>
+                <a:ea typeface="Arial" pitchFamily="34" charset="-122"/>
+                <a:cs typeface="Arial" pitchFamily="34" charset="-120"/>
+              </a:rPr>
+              <a:t>Ahead of production on at least one metric. A tie does not ship.</a:t>
+            </a:r>
+            <a:endParaRPr lang="en-US" sz="1200" dirty="0"/>
+          </a:p>
+        </p:txBody>
+      </p:sp>
+      <p:sp>
+        <p:nvSpPr>
+          <p:cNvPr id="32" name="Text 30"/>
+          <p:cNvSpPr/>
+          <p:nvPr/>
+        </p:nvSpPr>
+        <p:spPr>
+          <a:xfrm>
+            <a:off x="6629400" y="4718304"/>
+            <a:ext cx="1234440" cy="320040"/>
+          </a:xfrm>
+          <a:prstGeom prst="rect">
+            <a:avLst/>
+          </a:prstGeom>
+          <a:noFill/>
+          <a:ln/>
+        </p:spPr>
+        <p:txBody>
+          <a:bodyPr wrap="square" lIns="0" tIns="0" rIns="0" bIns="0" rtlCol="0" anchor="ctr"/>
+          <a:lstStyle/>
+          <a:p>
+            <a:pPr algn="r" indent="0" marL="0">
+              <a:buNone/>
+            </a:pPr>
+            <a:r>
+              <a:rPr lang="en-US" sz="1300" b="1" dirty="0">
+                <a:solidFill>
+                  <a:srgbClr val="1F7A4D"/>
+                </a:solidFill>
+                <a:latin typeface="Arial" pitchFamily="34" charset="0"/>
+                <a:ea typeface="Arial" pitchFamily="34" charset="-122"/>
+                <a:cs typeface="Arial" pitchFamily="34" charset="-120"/>
+              </a:rPr>
+              <a:t>Two of two</a:t>
+            </a:r>
+            <a:endParaRPr lang="en-US" sz="1300" dirty="0"/>
+          </a:p>
+        </p:txBody>
+      </p:sp>
+      <p:sp>
+        <p:nvSpPr>
+          <p:cNvPr id="33" name="Shape 31"/>
+          <p:cNvSpPr/>
+          <p:nvPr/>
+        </p:nvSpPr>
+        <p:spPr>
+          <a:xfrm>
+            <a:off x="457200" y="5303520"/>
+            <a:ext cx="7406640" cy="13716"/>
+          </a:xfrm>
+          <a:prstGeom prst="rect">
+            <a:avLst/>
+          </a:prstGeom>
+          <a:solidFill>
+            <a:srgbClr val="D5CBBC"/>
+          </a:solidFill>
+          <a:ln w="12700">
+            <a:solidFill>
+              <a:srgbClr val="D5CBBC"/>
+            </a:solidFill>
+            <a:prstDash val="solid"/>
+          </a:ln>
+        </p:spPr>
+      </p:sp>
+      <p:sp>
+        <p:nvSpPr>
+          <p:cNvPr id="34" name="Shape 32"/>
+          <p:cNvSpPr/>
+          <p:nvPr/>
+        </p:nvSpPr>
+        <p:spPr>
+          <a:xfrm>
+            <a:off x="8275320" y="1737360"/>
+            <a:ext cx="3456432" cy="3584448"/>
           </a:xfrm>
           <a:prstGeom prst="rect">
             <a:avLst/>
@@ -4791,80 +6978,69 @@
       </p:sp>
       <p:sp>
         <p:nvSpPr>
-          <p:cNvPr id="18" name="Shape 16"/>
-          <p:cNvSpPr/>
-          <p:nvPr/>
-        </p:nvSpPr>
-        <p:spPr>
-          <a:xfrm>
-            <a:off x="457200" y="4160520"/>
-            <a:ext cx="11274552" cy="13716"/>
-          </a:xfrm>
-          <a:prstGeom prst="rect">
-            <a:avLst/>
-          </a:prstGeom>
-          <a:solidFill>
-            <a:srgbClr val="D5CBBC"/>
-          </a:solidFill>
-          <a:ln w="12700">
-            <a:solidFill>
-              <a:srgbClr val="D5CBBC"/>
-            </a:solidFill>
-            <a:prstDash val="solid"/>
-          </a:ln>
-        </p:spPr>
-      </p:sp>
-      <p:sp>
-        <p:nvSpPr>
-          <p:cNvPr id="19" name="Shape 17"/>
-          <p:cNvSpPr/>
-          <p:nvPr/>
-        </p:nvSpPr>
-        <p:spPr>
-          <a:xfrm>
-            <a:off x="457200" y="4389120"/>
-            <a:ext cx="3246120" cy="1874520"/>
-          </a:xfrm>
-          <a:prstGeom prst="rect">
-            <a:avLst/>
-          </a:prstGeom>
-          <a:solidFill>
-            <a:srgbClr val="0E1726"/>
-          </a:solidFill>
-          <a:ln w="12700">
-            <a:solidFill>
-              <a:srgbClr val="0E1726"/>
-            </a:solidFill>
-            <a:prstDash val="solid"/>
-          </a:ln>
-        </p:spPr>
-      </p:sp>
-      <p:sp>
-        <p:nvSpPr>
-          <p:cNvPr id="20" name="Text 18"/>
-          <p:cNvSpPr/>
-          <p:nvPr/>
-        </p:nvSpPr>
-        <p:spPr>
-          <a:xfrm>
-            <a:off x="640080" y="4526280"/>
-            <a:ext cx="2880360" cy="685800"/>
-          </a:xfrm>
-          <a:prstGeom prst="rect">
-            <a:avLst/>
-          </a:prstGeom>
-          <a:noFill/>
-          <a:ln/>
-        </p:spPr>
-        <p:txBody>
-          <a:bodyPr wrap="square" lIns="0" tIns="0" rIns="0" bIns="0" rtlCol="0" anchor="ctr"/>
-          <a:lstStyle/>
-          <a:p>
-            <a:pPr indent="0" marL="0">
-              <a:buNone/>
-            </a:pPr>
-            <a:r>
-              <a:rPr lang="en-US" sz="4000" b="1" dirty="0">
+          <p:cNvPr id="35" name="Text 33"/>
+          <p:cNvSpPr/>
+          <p:nvPr/>
+        </p:nvSpPr>
+        <p:spPr>
+          <a:xfrm>
+            <a:off x="8503920" y="1920240"/>
+            <a:ext cx="3017520" cy="256032"/>
+          </a:xfrm>
+          <a:prstGeom prst="rect">
+            <a:avLst/>
+          </a:prstGeom>
+          <a:noFill/>
+          <a:ln/>
+        </p:spPr>
+        <p:txBody>
+          <a:bodyPr wrap="square" lIns="0" tIns="0" rIns="0" bIns="0" rtlCol="0" anchor="ctr"/>
+          <a:lstStyle/>
+          <a:p>
+            <a:pPr indent="0" marL="0">
+              <a:buNone/>
+            </a:pPr>
+            <a:r>
+              <a:rPr lang="en-US" sz="1200" b="1" spc="120" kern="0" dirty="0">
+                <a:solidFill>
+                  <a:srgbClr val="C4501A"/>
+                </a:solidFill>
+                <a:latin typeface="Arial" pitchFamily="34" charset="0"/>
+                <a:ea typeface="Arial" pitchFamily="34" charset="-122"/>
+                <a:cs typeface="Arial" pitchFamily="34" charset="-120"/>
+              </a:rPr>
+              <a:t>NO BACK DOOR</a:t>
+            </a:r>
+            <a:endParaRPr lang="en-US" sz="1200" dirty="0"/>
+          </a:p>
+        </p:txBody>
+      </p:sp>
+      <p:sp>
+        <p:nvSpPr>
+          <p:cNvPr id="36" name="Text 34"/>
+          <p:cNvSpPr/>
+          <p:nvPr/>
+        </p:nvSpPr>
+        <p:spPr>
+          <a:xfrm>
+            <a:off x="8503920" y="2240280"/>
+            <a:ext cx="3017520" cy="822960"/>
+          </a:xfrm>
+          <a:prstGeom prst="rect">
+            <a:avLst/>
+          </a:prstGeom>
+          <a:noFill/>
+          <a:ln/>
+        </p:spPr>
+        <p:txBody>
+          <a:bodyPr wrap="square" lIns="0" tIns="0" rIns="0" bIns="0" rtlCol="0" anchor="ctr"/>
+          <a:lstStyle/>
+          <a:p>
+            <a:pPr indent="0" marL="0">
+              <a:buNone/>
+            </a:pPr>
+            <a:r>
+              <a:rPr lang="en-US" sz="5200" b="1" dirty="0">
                 <a:solidFill>
                   <a:srgbClr val="F7F4EE"/>
                 </a:solidFill>
@@ -4872,22 +7048,22 @@
                 <a:ea typeface="Arial" pitchFamily="34" charset="-122"/>
                 <a:cs typeface="Arial" pitchFamily="34" charset="-120"/>
               </a:rPr>
-              <a:t>0%</a:t>
-            </a:r>
-            <a:endParaRPr lang="en-US" sz="4000" dirty="0"/>
-          </a:p>
-        </p:txBody>
-      </p:sp>
-      <p:sp>
-        <p:nvSpPr>
-          <p:cNvPr id="21" name="Text 19"/>
-          <p:cNvSpPr/>
-          <p:nvPr/>
-        </p:nvSpPr>
-        <p:spPr>
-          <a:xfrm>
-            <a:off x="640080" y="5257800"/>
-            <a:ext cx="2880360" cy="777240"/>
+              <a:t>409</a:t>
+            </a:r>
+            <a:endParaRPr lang="en-US" sz="5200" dirty="0"/>
+          </a:p>
+        </p:txBody>
+      </p:sp>
+      <p:sp>
+        <p:nvSpPr>
+          <p:cNvPr id="37" name="Text 35"/>
+          <p:cNvSpPr/>
+          <p:nvPr/>
+        </p:nvSpPr>
+        <p:spPr>
+          <a:xfrm>
+            <a:off x="8503920" y="3108960"/>
+            <a:ext cx="3017520" cy="731520"/>
           </a:xfrm>
           <a:prstGeom prst="rect">
             <a:avLst/>
@@ -4911,55 +7087,77 @@
                 <a:ea typeface="Arial" pitchFamily="34" charset="-122"/>
                 <a:cs typeface="Arial" pitchFamily="34" charset="-120"/>
               </a:rPr>
-              <a:t>False alarms on healthy</a:t>
+              <a:t>Call the API directly on a model the gate refused, and it still says no.</a:t>
             </a:r>
             <a:endParaRPr lang="en-US" sz="1400" dirty="0"/>
           </a:p>
-          <a:p>
-            <a:pPr indent="0" marL="0">
-              <a:buNone/>
-            </a:pPr>
-            <a:r>
-              <a:rPr lang="en-US" sz="1400" dirty="0">
-                <a:solidFill>
-                  <a:srgbClr val="A8B0BC"/>
-                </a:solidFill>
-                <a:latin typeface="Arial" pitchFamily="34" charset="0"/>
-                <a:ea typeface="Arial" pitchFamily="34" charset="-122"/>
-                <a:cs typeface="Arial" pitchFamily="34" charset="-120"/>
-              </a:rPr>
-              <a:t>passes LightGBM had not seen.</a:t>
-            </a:r>
-            <a:endParaRPr lang="en-US" sz="1400" dirty="0"/>
-          </a:p>
-        </p:txBody>
-      </p:sp>
-      <p:sp>
-        <p:nvSpPr>
-          <p:cNvPr id="22" name="Text 20"/>
-          <p:cNvSpPr/>
-          <p:nvPr/>
-        </p:nvSpPr>
-        <p:spPr>
-          <a:xfrm>
-            <a:off x="3931920" y="4480560"/>
-            <a:ext cx="2468880" cy="256032"/>
-          </a:xfrm>
-          <a:prstGeom prst="rect">
-            <a:avLst/>
-          </a:prstGeom>
-          <a:noFill/>
-          <a:ln/>
-        </p:spPr>
-        <p:txBody>
-          <a:bodyPr wrap="square" lIns="0" tIns="0" rIns="0" bIns="0" rtlCol="0" anchor="ctr"/>
-          <a:lstStyle/>
-          <a:p>
-            <a:pPr indent="0" marL="0">
-              <a:buNone/>
-            </a:pPr>
-            <a:r>
-              <a:rPr lang="en-US" sz="1200" b="1" spc="80" kern="0" dirty="0">
+        </p:txBody>
+      </p:sp>
+      <p:sp>
+        <p:nvSpPr>
+          <p:cNvPr id="38" name="Text 36"/>
+          <p:cNvSpPr/>
+          <p:nvPr/>
+        </p:nvSpPr>
+        <p:spPr>
+          <a:xfrm>
+            <a:off x="8503920" y="3931920"/>
+            <a:ext cx="3017520" cy="1280160"/>
+          </a:xfrm>
+          <a:prstGeom prst="rect">
+            <a:avLst/>
+          </a:prstGeom>
+          <a:noFill/>
+          <a:ln/>
+        </p:spPr>
+        <p:txBody>
+          <a:bodyPr wrap="square" lIns="0" tIns="0" rIns="0" bIns="0" rtlCol="0" anchor="ctr"/>
+          <a:lstStyle/>
+          <a:p>
+            <a:pPr indent="0" marL="0">
+              <a:buNone/>
+            </a:pPr>
+            <a:r>
+              <a:rPr lang="en-US" sz="1200" dirty="0">
+                <a:solidFill>
+                  <a:srgbClr val="E7C4AE"/>
+                </a:solidFill>
+                <a:latin typeface="Arial" pitchFamily="34" charset="0"/>
+                <a:ea typeface="Arial" pitchFamily="34" charset="-122"/>
+                <a:cs typeface="Arial" pitchFamily="34" charset="-120"/>
+              </a:rPr>
+              <a:t>Two broken controls run every time: one that always alarms, one that never does. Each wins one metric by abandoning the other. A gate that lets either through is broken, and would say so.</a:t>
+            </a:r>
+            <a:endParaRPr lang="en-US" sz="1200" dirty="0"/>
+          </a:p>
+        </p:txBody>
+      </p:sp>
+      <p:sp>
+        <p:nvSpPr>
+          <p:cNvPr id="39" name="Text 37"/>
+          <p:cNvSpPr/>
+          <p:nvPr/>
+        </p:nvSpPr>
+        <p:spPr>
+          <a:xfrm>
+            <a:off x="457200" y="5715000"/>
+            <a:ext cx="11247120" cy="365760"/>
+          </a:xfrm>
+          <a:prstGeom prst="rect">
+            <a:avLst/>
+          </a:prstGeom>
+          <a:noFill/>
+          <a:ln/>
+        </p:spPr>
+        <p:txBody>
+          <a:bodyPr wrap="square" lIns="0" tIns="0" rIns="0" bIns="0" rtlCol="0" anchor="ctr"/>
+          <a:lstStyle/>
+          <a:p>
+            <a:pPr indent="0" marL="0">
+              <a:buNone/>
+            </a:pPr>
+            <a:r>
+              <a:rPr lang="en-US" sz="1500" i="1" dirty="0">
                 <a:solidFill>
                   <a:srgbClr val="C4501A"/>
                 </a:solidFill>
@@ -4967,327 +7165,15 @@
                 <a:ea typeface="Arial" pitchFamily="34" charset="-122"/>
                 <a:cs typeface="Arial" pitchFamily="34" charset="-120"/>
               </a:rPr>
-              <a:t>XGBOOST</a:t>
-            </a:r>
-            <a:endParaRPr lang="en-US" sz="1200" dirty="0"/>
-          </a:p>
-        </p:txBody>
-      </p:sp>
-      <p:sp>
-        <p:nvSpPr>
-          <p:cNvPr id="23" name="Text 21"/>
-          <p:cNvSpPr/>
-          <p:nvPr/>
-        </p:nvSpPr>
-        <p:spPr>
-          <a:xfrm>
-            <a:off x="3931920" y="4846320"/>
-            <a:ext cx="2468880" cy="502920"/>
-          </a:xfrm>
-          <a:prstGeom prst="rect">
-            <a:avLst/>
-          </a:prstGeom>
-          <a:noFill/>
-          <a:ln/>
-        </p:spPr>
-        <p:txBody>
-          <a:bodyPr wrap="square" lIns="0" tIns="0" rIns="0" bIns="0" rtlCol="0" anchor="ctr"/>
-          <a:lstStyle/>
-          <a:p>
-            <a:pPr indent="0" marL="0">
-              <a:buNone/>
-            </a:pPr>
-            <a:r>
-              <a:rPr lang="en-US" sz="1600" b="1" dirty="0">
-                <a:solidFill>
-                  <a:srgbClr val="12171F"/>
-                </a:solidFill>
-                <a:latin typeface="Arial" pitchFamily="34" charset="0"/>
-                <a:ea typeface="Arial" pitchFamily="34" charset="-122"/>
-                <a:cs typeface="Arial" pitchFamily="34" charset="-120"/>
-              </a:rPr>
-              <a:t>41 of 55 missed</a:t>
-            </a:r>
-            <a:endParaRPr lang="en-US" sz="1600" dirty="0"/>
-          </a:p>
-        </p:txBody>
-      </p:sp>
-      <p:sp>
-        <p:nvSpPr>
-          <p:cNvPr id="24" name="Text 22"/>
-          <p:cNvSpPr/>
-          <p:nvPr/>
-        </p:nvSpPr>
-        <p:spPr>
-          <a:xfrm>
-            <a:off x="3931920" y="5486400"/>
-            <a:ext cx="2468880" cy="274320"/>
-          </a:xfrm>
-          <a:prstGeom prst="rect">
-            <a:avLst/>
-          </a:prstGeom>
-          <a:noFill/>
-          <a:ln/>
-        </p:spPr>
-        <p:txBody>
-          <a:bodyPr wrap="square" lIns="0" tIns="0" rIns="0" bIns="0" rtlCol="0" anchor="ctr"/>
-          <a:lstStyle/>
-          <a:p>
-            <a:pPr indent="0" marL="0">
-              <a:buNone/>
-            </a:pPr>
-            <a:r>
-              <a:rPr lang="en-US" sz="1400" dirty="0">
-                <a:solidFill>
-                  <a:srgbClr val="5C6573"/>
-                </a:solidFill>
-                <a:latin typeface="Arial" pitchFamily="34" charset="0"/>
-                <a:ea typeface="Arial" pitchFamily="34" charset="-122"/>
-                <a:cs typeface="Arial" pitchFamily="34" charset="-120"/>
-              </a:rPr>
-              <a:t>Refused</a:t>
-            </a:r>
-            <a:endParaRPr lang="en-US" sz="1400" dirty="0"/>
-          </a:p>
-        </p:txBody>
-      </p:sp>
-      <p:sp>
-        <p:nvSpPr>
-          <p:cNvPr id="25" name="Text 23"/>
-          <p:cNvSpPr/>
-          <p:nvPr/>
-        </p:nvSpPr>
-        <p:spPr>
-          <a:xfrm>
-            <a:off x="6583680" y="4480560"/>
-            <a:ext cx="2468880" cy="256032"/>
-          </a:xfrm>
-          <a:prstGeom prst="rect">
-            <a:avLst/>
-          </a:prstGeom>
-          <a:noFill/>
-          <a:ln/>
-        </p:spPr>
-        <p:txBody>
-          <a:bodyPr wrap="square" lIns="0" tIns="0" rIns="0" bIns="0" rtlCol="0" anchor="ctr"/>
-          <a:lstStyle/>
-          <a:p>
-            <a:pPr indent="0" marL="0">
-              <a:buNone/>
-            </a:pPr>
-            <a:r>
-              <a:rPr lang="en-US" sz="1200" b="1" spc="80" kern="0" dirty="0">
-                <a:solidFill>
-                  <a:srgbClr val="C4501A"/>
-                </a:solidFill>
-                <a:latin typeface="Arial" pitchFamily="34" charset="0"/>
-                <a:ea typeface="Arial" pitchFamily="34" charset="-122"/>
-                <a:cs typeface="Arial" pitchFamily="34" charset="-120"/>
-              </a:rPr>
-              <a:t>ALWAYS ALARM</a:t>
-            </a:r>
-            <a:endParaRPr lang="en-US" sz="1200" dirty="0"/>
-          </a:p>
-        </p:txBody>
-      </p:sp>
-      <p:sp>
-        <p:nvSpPr>
-          <p:cNvPr id="26" name="Text 24"/>
-          <p:cNvSpPr/>
-          <p:nvPr/>
-        </p:nvSpPr>
-        <p:spPr>
-          <a:xfrm>
-            <a:off x="6583680" y="4846320"/>
-            <a:ext cx="2468880" cy="502920"/>
-          </a:xfrm>
-          <a:prstGeom prst="rect">
-            <a:avLst/>
-          </a:prstGeom>
-          <a:noFill/>
-          <a:ln/>
-        </p:spPr>
-        <p:txBody>
-          <a:bodyPr wrap="square" lIns="0" tIns="0" rIns="0" bIns="0" rtlCol="0" anchor="ctr"/>
-          <a:lstStyle/>
-          <a:p>
-            <a:pPr indent="0" marL="0">
-              <a:buNone/>
-            </a:pPr>
-            <a:r>
-              <a:rPr lang="en-US" sz="1600" b="1" dirty="0">
-                <a:solidFill>
-                  <a:srgbClr val="12171F"/>
-                </a:solidFill>
-                <a:latin typeface="Arial" pitchFamily="34" charset="0"/>
-                <a:ea typeface="Arial" pitchFamily="34" charset="-122"/>
-                <a:cs typeface="Arial" pitchFamily="34" charset="-120"/>
-              </a:rPr>
-              <a:t>Flags every pass</a:t>
-            </a:r>
-            <a:endParaRPr lang="en-US" sz="1600" dirty="0"/>
-          </a:p>
-        </p:txBody>
-      </p:sp>
-      <p:sp>
-        <p:nvSpPr>
-          <p:cNvPr id="27" name="Text 25"/>
-          <p:cNvSpPr/>
-          <p:nvPr/>
-        </p:nvSpPr>
-        <p:spPr>
-          <a:xfrm>
-            <a:off x="6583680" y="5486400"/>
-            <a:ext cx="2468880" cy="274320"/>
-          </a:xfrm>
-          <a:prstGeom prst="rect">
-            <a:avLst/>
-          </a:prstGeom>
-          <a:noFill/>
-          <a:ln/>
-        </p:spPr>
-        <p:txBody>
-          <a:bodyPr wrap="square" lIns="0" tIns="0" rIns="0" bIns="0" rtlCol="0" anchor="ctr"/>
-          <a:lstStyle/>
-          <a:p>
-            <a:pPr indent="0" marL="0">
-              <a:buNone/>
-            </a:pPr>
-            <a:r>
-              <a:rPr lang="en-US" sz="1400" dirty="0">
-                <a:solidFill>
-                  <a:srgbClr val="5C6573"/>
-                </a:solidFill>
-                <a:latin typeface="Arial" pitchFamily="34" charset="0"/>
-                <a:ea typeface="Arial" pitchFamily="34" charset="-122"/>
-                <a:cs typeface="Arial" pitchFamily="34" charset="-120"/>
-              </a:rPr>
-              <a:t>Refused</a:t>
-            </a:r>
-            <a:endParaRPr lang="en-US" sz="1400" dirty="0"/>
-          </a:p>
-        </p:txBody>
-      </p:sp>
-      <p:sp>
-        <p:nvSpPr>
-          <p:cNvPr id="28" name="Text 26"/>
-          <p:cNvSpPr/>
-          <p:nvPr/>
-        </p:nvSpPr>
-        <p:spPr>
-          <a:xfrm>
-            <a:off x="9235440" y="4480560"/>
-            <a:ext cx="2468880" cy="256032"/>
-          </a:xfrm>
-          <a:prstGeom prst="rect">
-            <a:avLst/>
-          </a:prstGeom>
-          <a:noFill/>
-          <a:ln/>
-        </p:spPr>
-        <p:txBody>
-          <a:bodyPr wrap="square" lIns="0" tIns="0" rIns="0" bIns="0" rtlCol="0" anchor="ctr"/>
-          <a:lstStyle/>
-          <a:p>
-            <a:pPr indent="0" marL="0">
-              <a:buNone/>
-            </a:pPr>
-            <a:r>
-              <a:rPr lang="en-US" sz="1200" b="1" spc="80" kern="0" dirty="0">
-                <a:solidFill>
-                  <a:srgbClr val="C4501A"/>
-                </a:solidFill>
-                <a:latin typeface="Arial" pitchFamily="34" charset="0"/>
-                <a:ea typeface="Arial" pitchFamily="34" charset="-122"/>
-                <a:cs typeface="Arial" pitchFamily="34" charset="-120"/>
-              </a:rPr>
-              <a:t>NEVER ALARM</a:t>
-            </a:r>
-            <a:endParaRPr lang="en-US" sz="1200" dirty="0"/>
-          </a:p>
-        </p:txBody>
-      </p:sp>
-      <p:sp>
-        <p:nvSpPr>
-          <p:cNvPr id="29" name="Text 27"/>
-          <p:cNvSpPr/>
-          <p:nvPr/>
-        </p:nvSpPr>
-        <p:spPr>
-          <a:xfrm>
-            <a:off x="9235440" y="4846320"/>
-            <a:ext cx="2468880" cy="502920"/>
-          </a:xfrm>
-          <a:prstGeom prst="rect">
-            <a:avLst/>
-          </a:prstGeom>
-          <a:noFill/>
-          <a:ln/>
-        </p:spPr>
-        <p:txBody>
-          <a:bodyPr wrap="square" lIns="0" tIns="0" rIns="0" bIns="0" rtlCol="0" anchor="ctr"/>
-          <a:lstStyle/>
-          <a:p>
-            <a:pPr indent="0" marL="0">
-              <a:buNone/>
-            </a:pPr>
-            <a:r>
-              <a:rPr lang="en-US" sz="1600" b="1" dirty="0">
-                <a:solidFill>
-                  <a:srgbClr val="12171F"/>
-                </a:solidFill>
-                <a:latin typeface="Arial" pitchFamily="34" charset="0"/>
-                <a:ea typeface="Arial" pitchFamily="34" charset="-122"/>
-                <a:cs typeface="Arial" pitchFamily="34" charset="-120"/>
-              </a:rPr>
-              <a:t>Misses every fault</a:t>
-            </a:r>
-            <a:endParaRPr lang="en-US" sz="1600" dirty="0"/>
-          </a:p>
-        </p:txBody>
-      </p:sp>
-      <p:sp>
-        <p:nvSpPr>
-          <p:cNvPr id="30" name="Text 28"/>
-          <p:cNvSpPr/>
-          <p:nvPr/>
-        </p:nvSpPr>
-        <p:spPr>
-          <a:xfrm>
-            <a:off x="9235440" y="5486400"/>
-            <a:ext cx="2468880" cy="274320"/>
-          </a:xfrm>
-          <a:prstGeom prst="rect">
-            <a:avLst/>
-          </a:prstGeom>
-          <a:noFill/>
-          <a:ln/>
-        </p:spPr>
-        <p:txBody>
-          <a:bodyPr wrap="square" lIns="0" tIns="0" rIns="0" bIns="0" rtlCol="0" anchor="ctr"/>
-          <a:lstStyle/>
-          <a:p>
-            <a:pPr indent="0" marL="0">
-              <a:buNone/>
-            </a:pPr>
-            <a:r>
-              <a:rPr lang="en-US" sz="1400" dirty="0">
-                <a:solidFill>
-                  <a:srgbClr val="5C6573"/>
-                </a:solidFill>
-                <a:latin typeface="Arial" pitchFamily="34" charset="0"/>
-                <a:ea typeface="Arial" pitchFamily="34" charset="-122"/>
-                <a:cs typeface="Arial" pitchFamily="34" charset="-120"/>
-              </a:rPr>
-              <a:t>Refused</a:t>
-            </a:r>
-            <a:endParaRPr lang="en-US" sz="1400" dirty="0"/>
-          </a:p>
-        </p:txBody>
-      </p:sp>
-      <p:sp>
-        <p:nvSpPr>
-          <p:cNvPr id="31" name="Text 29"/>
+              <a:t>This is the part AutoML skips. A training score is not the decision.</a:t>
+            </a:r>
+            <a:endParaRPr lang="en-US" sz="1500" dirty="0"/>
+          </a:p>
+        </p:txBody>
+      </p:sp>
+      <p:sp>
+        <p:nvSpPr>
+          <p:cNvPr id="40" name="Text 38"/>
           <p:cNvSpPr/>
           <p:nvPr/>
         </p:nvSpPr>
@@ -5326,7 +7212,7 @@
       </p:sp>
       <p:sp>
         <p:nvSpPr>
-          <p:cNvPr id="32" name="Text 30"/>
+          <p:cNvPr id="41" name="Text 39"/>
           <p:cNvSpPr/>
           <p:nvPr/>
         </p:nvSpPr>
@@ -5397,14 +7283,543 @@
       </p:grpSpPr>
       <p:sp>
         <p:nvSpPr>
-          <p:cNvPr id="2" name="Shape 0"/>
-          <p:cNvSpPr/>
-          <p:nvPr/>
-        </p:nvSpPr>
-        <p:spPr>
-          <a:xfrm>
-            <a:off x="0" y="0"/>
-            <a:ext cx="4709160" cy="6858000"/>
+          <p:cNvPr id="2" name="Text 0"/>
+          <p:cNvSpPr/>
+          <p:nvPr/>
+        </p:nvSpPr>
+        <p:spPr>
+          <a:xfrm>
+            <a:off x="457200" y="256032"/>
+            <a:ext cx="640080" cy="256032"/>
+          </a:xfrm>
+          <a:prstGeom prst="rect">
+            <a:avLst/>
+          </a:prstGeom>
+          <a:noFill/>
+          <a:ln/>
+        </p:spPr>
+        <p:txBody>
+          <a:bodyPr wrap="square" lIns="0" tIns="0" rIns="0" bIns="0" rtlCol="0" anchor="ctr"/>
+          <a:lstStyle/>
+          <a:p>
+            <a:pPr indent="0" marL="0">
+              <a:buNone/>
+            </a:pPr>
+            <a:r>
+              <a:rPr lang="en-US" sz="1200" b="1" dirty="0">
+                <a:solidFill>
+                  <a:srgbClr val="5C6573"/>
+                </a:solidFill>
+                <a:latin typeface="Arial" pitchFamily="34" charset="0"/>
+                <a:ea typeface="Arial" pitchFamily="34" charset="-122"/>
+                <a:cs typeface="Arial" pitchFamily="34" charset="-120"/>
+              </a:rPr>
+              <a:t>06</a:t>
+            </a:r>
+            <a:endParaRPr lang="en-US" sz="1200" dirty="0"/>
+          </a:p>
+        </p:txBody>
+      </p:sp>
+      <p:sp>
+        <p:nvSpPr>
+          <p:cNvPr id="3" name="Text 1"/>
+          <p:cNvSpPr/>
+          <p:nvPr/>
+        </p:nvSpPr>
+        <p:spPr>
+          <a:xfrm>
+            <a:off x="1051560" y="256032"/>
+            <a:ext cx="5943600" cy="256032"/>
+          </a:xfrm>
+          <a:prstGeom prst="rect">
+            <a:avLst/>
+          </a:prstGeom>
+          <a:noFill/>
+          <a:ln/>
+        </p:spPr>
+        <p:txBody>
+          <a:bodyPr wrap="square" lIns="0" tIns="0" rIns="0" bIns="0" rtlCol="0" anchor="ctr"/>
+          <a:lstStyle/>
+          <a:p>
+            <a:pPr indent="0" marL="0">
+              <a:buNone/>
+            </a:pPr>
+            <a:r>
+              <a:rPr lang="en-US" sz="1200" b="1" spc="140" kern="0" dirty="0">
+                <a:solidFill>
+                  <a:srgbClr val="C4501A"/>
+                </a:solidFill>
+                <a:latin typeface="Arial" pitchFamily="34" charset="0"/>
+                <a:ea typeface="Arial" pitchFamily="34" charset="-122"/>
+                <a:cs typeface="Arial" pitchFamily="34" charset="-120"/>
+              </a:rPr>
+              <a:t>THE PROOF</a:t>
+            </a:r>
+            <a:endParaRPr lang="en-US" sz="1200" dirty="0"/>
+          </a:p>
+        </p:txBody>
+      </p:sp>
+      <p:sp>
+        <p:nvSpPr>
+          <p:cNvPr id="4" name="Text 2"/>
+          <p:cNvSpPr/>
+          <p:nvPr/>
+        </p:nvSpPr>
+        <p:spPr>
+          <a:xfrm>
+            <a:off x="7589520" y="256032"/>
+            <a:ext cx="4114800" cy="256032"/>
+          </a:xfrm>
+          <a:prstGeom prst="rect">
+            <a:avLst/>
+          </a:prstGeom>
+          <a:noFill/>
+          <a:ln/>
+        </p:spPr>
+        <p:txBody>
+          <a:bodyPr wrap="square" lIns="0" tIns="0" rIns="0" bIns="0" rtlCol="0" anchor="ctr"/>
+          <a:lstStyle/>
+          <a:p>
+            <a:pPr algn="r" indent="0" marL="0">
+              <a:buNone/>
+            </a:pPr>
+            <a:r>
+              <a:rPr lang="en-US" sz="1200" spc="120" kern="0" dirty="0">
+                <a:solidFill>
+                  <a:srgbClr val="5C6573"/>
+                </a:solidFill>
+                <a:latin typeface="Arial" pitchFamily="34" charset="0"/>
+                <a:ea typeface="Arial" pitchFamily="34" charset="-122"/>
+                <a:cs typeface="Arial" pitchFamily="34" charset="-120"/>
+              </a:rPr>
+              <a:t>PROMOTEGATE</a:t>
+            </a:r>
+            <a:endParaRPr lang="en-US" sz="1200" dirty="0"/>
+          </a:p>
+        </p:txBody>
+      </p:sp>
+      <p:sp>
+        <p:nvSpPr>
+          <p:cNvPr id="5" name="Shape 3"/>
+          <p:cNvSpPr/>
+          <p:nvPr/>
+        </p:nvSpPr>
+        <p:spPr>
+          <a:xfrm>
+            <a:off x="457200" y="621792"/>
+            <a:ext cx="11274552" cy="13716"/>
+          </a:xfrm>
+          <a:prstGeom prst="rect">
+            <a:avLst/>
+          </a:prstGeom>
+          <a:solidFill>
+            <a:srgbClr val="D5CBBC"/>
+          </a:solidFill>
+          <a:ln w="12700">
+            <a:solidFill>
+              <a:srgbClr val="D5CBBC"/>
+            </a:solidFill>
+            <a:prstDash val="solid"/>
+          </a:ln>
+        </p:spPr>
+      </p:sp>
+      <p:sp>
+        <p:nvSpPr>
+          <p:cNvPr id="6" name="Text 4"/>
+          <p:cNvSpPr/>
+          <p:nvPr/>
+        </p:nvSpPr>
+        <p:spPr>
+          <a:xfrm>
+            <a:off x="457200" y="786384"/>
+            <a:ext cx="11247120" cy="384048"/>
+          </a:xfrm>
+          <a:prstGeom prst="rect">
+            <a:avLst/>
+          </a:prstGeom>
+          <a:noFill/>
+          <a:ln/>
+        </p:spPr>
+        <p:txBody>
+          <a:bodyPr wrap="square" lIns="0" tIns="0" rIns="0" bIns="0" rtlCol="0" anchor="ctr"/>
+          <a:lstStyle/>
+          <a:p>
+            <a:pPr indent="0" marL="0">
+              <a:buNone/>
+            </a:pPr>
+            <a:r>
+              <a:rPr lang="en-US" sz="2600" b="1" dirty="0">
+                <a:solidFill>
+                  <a:srgbClr val="12171F"/>
+                </a:solidFill>
+                <a:latin typeface="Arial" pitchFamily="34" charset="0"/>
+                <a:ea typeface="Arial" pitchFamily="34" charset="-122"/>
+                <a:cs typeface="Arial" pitchFamily="34" charset="-120"/>
+              </a:rPr>
+              <a:t>A real ABB IRB 6660. 55 faults held back.</a:t>
+            </a:r>
+            <a:endParaRPr lang="en-US" sz="2600" dirty="0"/>
+          </a:p>
+        </p:txBody>
+      </p:sp>
+      <p:sp>
+        <p:nvSpPr>
+          <p:cNvPr id="7" name="Text 5"/>
+          <p:cNvSpPr/>
+          <p:nvPr/>
+        </p:nvSpPr>
+        <p:spPr>
+          <a:xfrm>
+            <a:off x="457200" y="1207008"/>
+            <a:ext cx="11155680" cy="329184"/>
+          </a:xfrm>
+          <a:prstGeom prst="rect">
+            <a:avLst/>
+          </a:prstGeom>
+          <a:noFill/>
+          <a:ln/>
+        </p:spPr>
+        <p:txBody>
+          <a:bodyPr wrap="square" lIns="0" tIns="0" rIns="0" bIns="0" rtlCol="0" anchor="ctr"/>
+          <a:lstStyle/>
+          <a:p>
+            <a:pPr indent="0" marL="0">
+              <a:buNone/>
+            </a:pPr>
+            <a:r>
+              <a:rPr lang="en-US" sz="1400" dirty="0">
+                <a:solidFill>
+                  <a:srgbClr val="5C6573"/>
+                </a:solidFill>
+                <a:latin typeface="Arial" pitchFamily="34" charset="0"/>
+                <a:ea typeface="Arial" pitchFamily="34" charset="-122"/>
+                <a:cs typeface="Arial" pitchFamily="34" charset="-120"/>
+              </a:rPr>
+              <a:t>272 cutting passes. Healthy tool, damaged tool, or a drifted axis. These 55 faults were never used for training.</a:t>
+            </a:r>
+            <a:endParaRPr lang="en-US" sz="1400" dirty="0"/>
+          </a:p>
+        </p:txBody>
+      </p:sp>
+      <p:sp>
+        <p:nvSpPr>
+          <p:cNvPr id="8" name="Text 6"/>
+          <p:cNvSpPr/>
+          <p:nvPr/>
+        </p:nvSpPr>
+        <p:spPr>
+          <a:xfrm>
+            <a:off x="411480" y="1737360"/>
+            <a:ext cx="2103120" cy="868680"/>
+          </a:xfrm>
+          <a:prstGeom prst="rect">
+            <a:avLst/>
+          </a:prstGeom>
+          <a:noFill/>
+          <a:ln/>
+        </p:spPr>
+        <p:txBody>
+          <a:bodyPr wrap="square" lIns="0" tIns="0" rIns="0" bIns="0" rtlCol="0" anchor="ctr"/>
+          <a:lstStyle/>
+          <a:p>
+            <a:pPr indent="0" marL="0">
+              <a:buNone/>
+            </a:pPr>
+            <a:r>
+              <a:rPr lang="en-US" sz="6000" b="1" dirty="0">
+                <a:solidFill>
+                  <a:srgbClr val="12171F"/>
+                </a:solidFill>
+                <a:latin typeface="Arial" pitchFamily="34" charset="0"/>
+                <a:ea typeface="Arial" pitchFamily="34" charset="-122"/>
+                <a:cs typeface="Arial" pitchFamily="34" charset="-120"/>
+              </a:rPr>
+              <a:t>43</a:t>
+            </a:r>
+            <a:endParaRPr lang="en-US" sz="6000" dirty="0"/>
+          </a:p>
+        </p:txBody>
+      </p:sp>
+      <p:sp>
+        <p:nvSpPr>
+          <p:cNvPr id="9" name="Text 7"/>
+          <p:cNvSpPr/>
+          <p:nvPr/>
+        </p:nvSpPr>
+        <p:spPr>
+          <a:xfrm>
+            <a:off x="2468880" y="1874520"/>
+            <a:ext cx="2926080" cy="274320"/>
+          </a:xfrm>
+          <a:prstGeom prst="rect">
+            <a:avLst/>
+          </a:prstGeom>
+          <a:noFill/>
+          <a:ln/>
+        </p:spPr>
+        <p:txBody>
+          <a:bodyPr wrap="square" lIns="0" tIns="0" rIns="0" bIns="0" rtlCol="0" anchor="ctr"/>
+          <a:lstStyle/>
+          <a:p>
+            <a:pPr indent="0" marL="0">
+              <a:buNone/>
+            </a:pPr>
+            <a:r>
+              <a:rPr lang="en-US" sz="1400" b="1" dirty="0">
+                <a:solidFill>
+                  <a:srgbClr val="5C6573"/>
+                </a:solidFill>
+                <a:latin typeface="Arial" pitchFamily="34" charset="0"/>
+                <a:ea typeface="Arial" pitchFamily="34" charset="-122"/>
+                <a:cs typeface="Arial" pitchFamily="34" charset="-120"/>
+              </a:rPr>
+              <a:t>of 55 missed</a:t>
+            </a:r>
+            <a:endParaRPr lang="en-US" sz="1400" dirty="0"/>
+          </a:p>
+        </p:txBody>
+      </p:sp>
+      <p:sp>
+        <p:nvSpPr>
+          <p:cNvPr id="10" name="Text 8"/>
+          <p:cNvSpPr/>
+          <p:nvPr/>
+        </p:nvSpPr>
+        <p:spPr>
+          <a:xfrm>
+            <a:off x="2468880" y="2176272"/>
+            <a:ext cx="3840480" cy="292608"/>
+          </a:xfrm>
+          <a:prstGeom prst="rect">
+            <a:avLst/>
+          </a:prstGeom>
+          <a:noFill/>
+          <a:ln/>
+        </p:spPr>
+        <p:txBody>
+          <a:bodyPr wrap="square" lIns="0" tIns="0" rIns="0" bIns="0" rtlCol="0" anchor="ctr"/>
+          <a:lstStyle/>
+          <a:p>
+            <a:pPr indent="0" marL="0">
+              <a:buNone/>
+            </a:pPr>
+            <a:r>
+              <a:rPr lang="en-US" sz="1500" dirty="0">
+                <a:solidFill>
+                  <a:srgbClr val="12171F"/>
+                </a:solidFill>
+                <a:latin typeface="Arial" pitchFamily="34" charset="0"/>
+                <a:ea typeface="Arial" pitchFamily="34" charset="-122"/>
+                <a:cs typeface="Arial" pitchFamily="34" charset="-120"/>
+              </a:rPr>
+              <a:t>Vibration limit already in production</a:t>
+            </a:r>
+            <a:endParaRPr lang="en-US" sz="1500" dirty="0"/>
+          </a:p>
+        </p:txBody>
+      </p:sp>
+      <p:sp>
+        <p:nvSpPr>
+          <p:cNvPr id="11" name="Shape 9"/>
+          <p:cNvSpPr/>
+          <p:nvPr/>
+        </p:nvSpPr>
+        <p:spPr>
+          <a:xfrm>
+            <a:off x="6675120" y="2029968"/>
+            <a:ext cx="5029200" cy="256032"/>
+          </a:xfrm>
+          <a:prstGeom prst="rect">
+            <a:avLst/>
+          </a:prstGeom>
+          <a:solidFill>
+            <a:srgbClr val="E6DDD0"/>
+          </a:solidFill>
+          <a:ln w="12700">
+            <a:solidFill>
+              <a:srgbClr val="E6DDD0"/>
+            </a:solidFill>
+            <a:prstDash val="solid"/>
+          </a:ln>
+        </p:spPr>
+      </p:sp>
+      <p:sp>
+        <p:nvSpPr>
+          <p:cNvPr id="12" name="Shape 10"/>
+          <p:cNvSpPr/>
+          <p:nvPr/>
+        </p:nvSpPr>
+        <p:spPr>
+          <a:xfrm>
+            <a:off x="6675120" y="2029968"/>
+            <a:ext cx="3931920" cy="256032"/>
+          </a:xfrm>
+          <a:prstGeom prst="rect">
+            <a:avLst/>
+          </a:prstGeom>
+          <a:solidFill>
+            <a:srgbClr val="C4501A"/>
+          </a:solidFill>
+          <a:ln w="12700">
+            <a:solidFill>
+              <a:srgbClr val="C4501A"/>
+            </a:solidFill>
+            <a:prstDash val="solid"/>
+          </a:ln>
+        </p:spPr>
+      </p:sp>
+      <p:sp>
+        <p:nvSpPr>
+          <p:cNvPr id="13" name="Text 11"/>
+          <p:cNvSpPr/>
+          <p:nvPr/>
+        </p:nvSpPr>
+        <p:spPr>
+          <a:xfrm>
+            <a:off x="411480" y="2926080"/>
+            <a:ext cx="2103120" cy="868680"/>
+          </a:xfrm>
+          <a:prstGeom prst="rect">
+            <a:avLst/>
+          </a:prstGeom>
+          <a:noFill/>
+          <a:ln/>
+        </p:spPr>
+        <p:txBody>
+          <a:bodyPr wrap="square" lIns="0" tIns="0" rIns="0" bIns="0" rtlCol="0" anchor="ctr"/>
+          <a:lstStyle/>
+          <a:p>
+            <a:pPr indent="0" marL="0">
+              <a:buNone/>
+            </a:pPr>
+            <a:r>
+              <a:rPr lang="en-US" sz="6000" b="1" dirty="0">
+                <a:solidFill>
+                  <a:srgbClr val="C4501A"/>
+                </a:solidFill>
+                <a:latin typeface="Arial" pitchFamily="34" charset="0"/>
+                <a:ea typeface="Arial" pitchFamily="34" charset="-122"/>
+                <a:cs typeface="Arial" pitchFamily="34" charset="-120"/>
+              </a:rPr>
+              <a:t>4</a:t>
+            </a:r>
+            <a:endParaRPr lang="en-US" sz="6000" dirty="0"/>
+          </a:p>
+        </p:txBody>
+      </p:sp>
+      <p:sp>
+        <p:nvSpPr>
+          <p:cNvPr id="14" name="Text 12"/>
+          <p:cNvSpPr/>
+          <p:nvPr/>
+        </p:nvSpPr>
+        <p:spPr>
+          <a:xfrm>
+            <a:off x="2468880" y="3063240"/>
+            <a:ext cx="2926080" cy="274320"/>
+          </a:xfrm>
+          <a:prstGeom prst="rect">
+            <a:avLst/>
+          </a:prstGeom>
+          <a:noFill/>
+          <a:ln/>
+        </p:spPr>
+        <p:txBody>
+          <a:bodyPr wrap="square" lIns="0" tIns="0" rIns="0" bIns="0" rtlCol="0" anchor="ctr"/>
+          <a:lstStyle/>
+          <a:p>
+            <a:pPr indent="0" marL="0">
+              <a:buNone/>
+            </a:pPr>
+            <a:r>
+              <a:rPr lang="en-US" sz="1400" b="1" dirty="0">
+                <a:solidFill>
+                  <a:srgbClr val="5C6573"/>
+                </a:solidFill>
+                <a:latin typeface="Arial" pitchFamily="34" charset="0"/>
+                <a:ea typeface="Arial" pitchFamily="34" charset="-122"/>
+                <a:cs typeface="Arial" pitchFamily="34" charset="-120"/>
+              </a:rPr>
+              <a:t>of 55 missed</a:t>
+            </a:r>
+            <a:endParaRPr lang="en-US" sz="1400" dirty="0"/>
+          </a:p>
+        </p:txBody>
+      </p:sp>
+      <p:sp>
+        <p:nvSpPr>
+          <p:cNvPr id="15" name="Text 13"/>
+          <p:cNvSpPr/>
+          <p:nvPr/>
+        </p:nvSpPr>
+        <p:spPr>
+          <a:xfrm>
+            <a:off x="2468880" y="3364992"/>
+            <a:ext cx="4023360" cy="292608"/>
+          </a:xfrm>
+          <a:prstGeom prst="rect">
+            <a:avLst/>
+          </a:prstGeom>
+          <a:noFill/>
+          <a:ln/>
+        </p:spPr>
+        <p:txBody>
+          <a:bodyPr wrap="square" lIns="0" tIns="0" rIns="0" bIns="0" rtlCol="0" anchor="ctr"/>
+          <a:lstStyle/>
+          <a:p>
+            <a:pPr indent="0" marL="0">
+              <a:buNone/>
+            </a:pPr>
+            <a:r>
+              <a:rPr lang="en-US" sz="1500" dirty="0">
+                <a:solidFill>
+                  <a:srgbClr val="12171F"/>
+                </a:solidFill>
+                <a:latin typeface="Arial" pitchFamily="34" charset="0"/>
+                <a:ea typeface="Arial" pitchFamily="34" charset="-122"/>
+                <a:cs typeface="Arial" pitchFamily="34" charset="-120"/>
+              </a:rPr>
+              <a:t>LightGBM. The lead may promote this one.</a:t>
+            </a:r>
+            <a:endParaRPr lang="en-US" sz="1500" dirty="0"/>
+          </a:p>
+        </p:txBody>
+      </p:sp>
+      <p:sp>
+        <p:nvSpPr>
+          <p:cNvPr id="16" name="Shape 14"/>
+          <p:cNvSpPr/>
+          <p:nvPr/>
+        </p:nvSpPr>
+        <p:spPr>
+          <a:xfrm>
+            <a:off x="6675120" y="3218688"/>
+            <a:ext cx="5029200" cy="256032"/>
+          </a:xfrm>
+          <a:prstGeom prst="rect">
+            <a:avLst/>
+          </a:prstGeom>
+          <a:solidFill>
+            <a:srgbClr val="E6DDD0"/>
+          </a:solidFill>
+          <a:ln w="12700">
+            <a:solidFill>
+              <a:srgbClr val="E6DDD0"/>
+            </a:solidFill>
+            <a:prstDash val="solid"/>
+          </a:ln>
+        </p:spPr>
+      </p:sp>
+      <p:sp>
+        <p:nvSpPr>
+          <p:cNvPr id="17" name="Shape 15"/>
+          <p:cNvSpPr/>
+          <p:nvPr/>
+        </p:nvSpPr>
+        <p:spPr>
+          <a:xfrm>
+            <a:off x="6675120" y="3218688"/>
+            <a:ext cx="365760" cy="256032"/>
           </a:xfrm>
           <a:prstGeom prst="rect">
             <a:avLst/>
@@ -5422,30 +7837,175 @@
       </p:sp>
       <p:sp>
         <p:nvSpPr>
-          <p:cNvPr id="3" name="Text 1"/>
-          <p:cNvSpPr/>
-          <p:nvPr/>
-        </p:nvSpPr>
-        <p:spPr>
-          <a:xfrm>
-            <a:off x="384048" y="384048"/>
-            <a:ext cx="4023360" cy="274320"/>
-          </a:xfrm>
-          <a:prstGeom prst="rect">
-            <a:avLst/>
-          </a:prstGeom>
-          <a:noFill/>
-          <a:ln/>
-        </p:spPr>
-        <p:txBody>
-          <a:bodyPr wrap="square" lIns="0" tIns="0" rIns="0" bIns="0" rtlCol="0" anchor="ctr"/>
-          <a:lstStyle/>
-          <a:p>
-            <a:pPr indent="0" marL="0">
-              <a:buNone/>
-            </a:pPr>
-            <a:r>
-              <a:rPr lang="en-US" sz="1300" b="1" spc="110" kern="0" dirty="0">
+          <p:cNvPr id="18" name="Shape 16"/>
+          <p:cNvSpPr/>
+          <p:nvPr/>
+        </p:nvSpPr>
+        <p:spPr>
+          <a:xfrm>
+            <a:off x="457200" y="4160520"/>
+            <a:ext cx="11274552" cy="13716"/>
+          </a:xfrm>
+          <a:prstGeom prst="rect">
+            <a:avLst/>
+          </a:prstGeom>
+          <a:solidFill>
+            <a:srgbClr val="D5CBBC"/>
+          </a:solidFill>
+          <a:ln w="12700">
+            <a:solidFill>
+              <a:srgbClr val="D5CBBC"/>
+            </a:solidFill>
+            <a:prstDash val="solid"/>
+          </a:ln>
+        </p:spPr>
+      </p:sp>
+      <p:sp>
+        <p:nvSpPr>
+          <p:cNvPr id="19" name="Shape 17"/>
+          <p:cNvSpPr/>
+          <p:nvPr/>
+        </p:nvSpPr>
+        <p:spPr>
+          <a:xfrm>
+            <a:off x="457200" y="4389120"/>
+            <a:ext cx="3246120" cy="1874520"/>
+          </a:xfrm>
+          <a:prstGeom prst="rect">
+            <a:avLst/>
+          </a:prstGeom>
+          <a:solidFill>
+            <a:srgbClr val="0E1726"/>
+          </a:solidFill>
+          <a:ln w="12700">
+            <a:solidFill>
+              <a:srgbClr val="0E1726"/>
+            </a:solidFill>
+            <a:prstDash val="solid"/>
+          </a:ln>
+        </p:spPr>
+      </p:sp>
+      <p:sp>
+        <p:nvSpPr>
+          <p:cNvPr id="20" name="Text 18"/>
+          <p:cNvSpPr/>
+          <p:nvPr/>
+        </p:nvSpPr>
+        <p:spPr>
+          <a:xfrm>
+            <a:off x="640080" y="4526280"/>
+            <a:ext cx="2880360" cy="685800"/>
+          </a:xfrm>
+          <a:prstGeom prst="rect">
+            <a:avLst/>
+          </a:prstGeom>
+          <a:noFill/>
+          <a:ln/>
+        </p:spPr>
+        <p:txBody>
+          <a:bodyPr wrap="square" lIns="0" tIns="0" rIns="0" bIns="0" rtlCol="0" anchor="ctr"/>
+          <a:lstStyle/>
+          <a:p>
+            <a:pPr indent="0" marL="0">
+              <a:buNone/>
+            </a:pPr>
+            <a:r>
+              <a:rPr lang="en-US" sz="4000" b="1" dirty="0">
+                <a:solidFill>
+                  <a:srgbClr val="F7F4EE"/>
+                </a:solidFill>
+                <a:latin typeface="Arial" pitchFamily="34" charset="0"/>
+                <a:ea typeface="Arial" pitchFamily="34" charset="-122"/>
+                <a:cs typeface="Arial" pitchFamily="34" charset="-120"/>
+              </a:rPr>
+              <a:t>0%</a:t>
+            </a:r>
+            <a:endParaRPr lang="en-US" sz="4000" dirty="0"/>
+          </a:p>
+        </p:txBody>
+      </p:sp>
+      <p:sp>
+        <p:nvSpPr>
+          <p:cNvPr id="21" name="Text 19"/>
+          <p:cNvSpPr/>
+          <p:nvPr/>
+        </p:nvSpPr>
+        <p:spPr>
+          <a:xfrm>
+            <a:off x="640080" y="5257800"/>
+            <a:ext cx="2880360" cy="777240"/>
+          </a:xfrm>
+          <a:prstGeom prst="rect">
+            <a:avLst/>
+          </a:prstGeom>
+          <a:noFill/>
+          <a:ln/>
+        </p:spPr>
+        <p:txBody>
+          <a:bodyPr wrap="square" lIns="0" tIns="0" rIns="0" bIns="0" rtlCol="0" anchor="ctr"/>
+          <a:lstStyle/>
+          <a:p>
+            <a:pPr indent="0" marL="0">
+              <a:buNone/>
+            </a:pPr>
+            <a:r>
+              <a:rPr lang="en-US" sz="1400" dirty="0">
+                <a:solidFill>
+                  <a:srgbClr val="A8B0BC"/>
+                </a:solidFill>
+                <a:latin typeface="Arial" pitchFamily="34" charset="0"/>
+                <a:ea typeface="Arial" pitchFamily="34" charset="-122"/>
+                <a:cs typeface="Arial" pitchFamily="34" charset="-120"/>
+              </a:rPr>
+              <a:t>False alarms on healthy</a:t>
+            </a:r>
+            <a:endParaRPr lang="en-US" sz="1400" dirty="0"/>
+          </a:p>
+          <a:p>
+            <a:pPr indent="0" marL="0">
+              <a:buNone/>
+            </a:pPr>
+            <a:r>
+              <a:rPr lang="en-US" sz="1400" dirty="0">
+                <a:solidFill>
+                  <a:srgbClr val="A8B0BC"/>
+                </a:solidFill>
+                <a:latin typeface="Arial" pitchFamily="34" charset="0"/>
+                <a:ea typeface="Arial" pitchFamily="34" charset="-122"/>
+                <a:cs typeface="Arial" pitchFamily="34" charset="-120"/>
+              </a:rPr>
+              <a:t>passes LightGBM had not seen.</a:t>
+            </a:r>
+            <a:endParaRPr lang="en-US" sz="1400" dirty="0"/>
+          </a:p>
+        </p:txBody>
+      </p:sp>
+      <p:sp>
+        <p:nvSpPr>
+          <p:cNvPr id="22" name="Text 20"/>
+          <p:cNvSpPr/>
+          <p:nvPr/>
+        </p:nvSpPr>
+        <p:spPr>
+          <a:xfrm>
+            <a:off x="3931920" y="4480560"/>
+            <a:ext cx="2468880" cy="256032"/>
+          </a:xfrm>
+          <a:prstGeom prst="rect">
+            <a:avLst/>
+          </a:prstGeom>
+          <a:noFill/>
+          <a:ln/>
+        </p:spPr>
+        <p:txBody>
+          <a:bodyPr wrap="square" lIns="0" tIns="0" rIns="0" bIns="0" rtlCol="0" anchor="ctr"/>
+          <a:lstStyle/>
+          <a:p>
+            <a:pPr indent="0" marL="0">
+              <a:buNone/>
+            </a:pPr>
+            <a:r>
+              <a:rPr lang="en-US" sz="1200" b="1" spc="80" kern="0" dirty="0">
                 <a:solidFill>
                   <a:srgbClr val="C4501A"/>
                 </a:solidFill>
@@ -5453,158 +8013,46 @@
                 <a:ea typeface="Arial" pitchFamily="34" charset="-122"/>
                 <a:cs typeface="Arial" pitchFamily="34" charset="-120"/>
               </a:rPr>
-              <a:t>06    ON THE FLOOR</a:t>
-            </a:r>
-            <a:endParaRPr lang="en-US" sz="1300" dirty="0"/>
-          </a:p>
-        </p:txBody>
-      </p:sp>
-      <p:sp>
-        <p:nvSpPr>
-          <p:cNvPr id="4" name="Text 2"/>
-          <p:cNvSpPr/>
-          <p:nvPr/>
-        </p:nvSpPr>
-        <p:spPr>
-          <a:xfrm>
-            <a:off x="384048" y="1097280"/>
-            <a:ext cx="4023360" cy="1417320"/>
-          </a:xfrm>
-          <a:prstGeom prst="rect">
-            <a:avLst/>
-          </a:prstGeom>
-          <a:noFill/>
-          <a:ln/>
-        </p:spPr>
-        <p:txBody>
-          <a:bodyPr wrap="square" lIns="0" tIns="0" rIns="0" bIns="0" rtlCol="0" anchor="ctr"/>
-          <a:lstStyle/>
-          <a:p>
-            <a:pPr indent="0" marL="0">
-              <a:buNone/>
-            </a:pPr>
-            <a:r>
-              <a:rPr lang="en-US" sz="4000" b="1" dirty="0">
-                <a:solidFill>
-                  <a:srgbClr val="F7F4EE"/>
-                </a:solidFill>
-                <a:latin typeface="Arial" pitchFamily="34" charset="0"/>
-                <a:ea typeface="Arial" pitchFamily="34" charset="-122"/>
-                <a:cs typeface="Arial" pitchFamily="34" charset="-120"/>
-              </a:rPr>
-              <a:t>It reads</a:t>
-            </a:r>
-            <a:endParaRPr lang="en-US" sz="4000" dirty="0"/>
-          </a:p>
-          <a:p>
-            <a:pPr indent="0" marL="0">
-              <a:buNone/>
-            </a:pPr>
-            <a:r>
-              <a:rPr lang="en-US" sz="4000" b="1" dirty="0">
-                <a:solidFill>
-                  <a:srgbClr val="F7F4EE"/>
-                </a:solidFill>
-                <a:latin typeface="Arial" pitchFamily="34" charset="0"/>
-                <a:ea typeface="Arial" pitchFamily="34" charset="-122"/>
-                <a:cs typeface="Arial" pitchFamily="34" charset="-120"/>
-              </a:rPr>
-              <a:t>the log.</a:t>
-            </a:r>
-            <a:endParaRPr lang="en-US" sz="4000" dirty="0"/>
-          </a:p>
-        </p:txBody>
-      </p:sp>
-      <p:sp>
-        <p:nvSpPr>
-          <p:cNvPr id="5" name="Text 3"/>
-          <p:cNvSpPr/>
-          <p:nvPr/>
-        </p:nvSpPr>
-        <p:spPr>
-          <a:xfrm>
-            <a:off x="384048" y="2606040"/>
-            <a:ext cx="4023360" cy="1143000"/>
-          </a:xfrm>
-          <a:prstGeom prst="rect">
-            <a:avLst/>
-          </a:prstGeom>
-          <a:noFill/>
-          <a:ln/>
-        </p:spPr>
-        <p:txBody>
-          <a:bodyPr wrap="square" lIns="0" tIns="0" rIns="0" bIns="0" rtlCol="0" anchor="ctr"/>
-          <a:lstStyle/>
-          <a:p>
-            <a:pPr indent="0" marL="0">
-              <a:buNone/>
-            </a:pPr>
-            <a:r>
-              <a:rPr lang="en-US" sz="2600" i="1" dirty="0">
-                <a:solidFill>
-                  <a:srgbClr val="E7C4AE"/>
-                </a:solidFill>
-                <a:latin typeface="Arial" pitchFamily="34" charset="0"/>
-                <a:ea typeface="Arial" pitchFamily="34" charset="-122"/>
-                <a:cs typeface="Arial" pitchFamily="34" charset="-120"/>
-              </a:rPr>
-              <a:t>The controller</a:t>
-            </a:r>
-            <a:endParaRPr lang="en-US" sz="2600" dirty="0"/>
-          </a:p>
-          <a:p>
-            <a:pPr indent="0" marL="0">
-              <a:buNone/>
-            </a:pPr>
-            <a:r>
-              <a:rPr lang="en-US" sz="2600" i="1" dirty="0">
-                <a:solidFill>
-                  <a:srgbClr val="E7C4AE"/>
-                </a:solidFill>
-                <a:latin typeface="Arial" pitchFamily="34" charset="0"/>
-                <a:ea typeface="Arial" pitchFamily="34" charset="-122"/>
-                <a:cs typeface="Arial" pitchFamily="34" charset="-120"/>
-              </a:rPr>
-              <a:t>keeps the arm.</a:t>
-            </a:r>
-            <a:endParaRPr lang="en-US" sz="2600" dirty="0"/>
-          </a:p>
-        </p:txBody>
-      </p:sp>
-      <p:sp>
-        <p:nvSpPr>
-          <p:cNvPr id="6" name="Text 4"/>
-          <p:cNvSpPr/>
-          <p:nvPr/>
-        </p:nvSpPr>
-        <p:spPr>
-          <a:xfrm>
-            <a:off x="384048" y="3977640"/>
-            <a:ext cx="3931920" cy="1371600"/>
-          </a:xfrm>
-          <a:prstGeom prst="rect">
-            <a:avLst/>
-          </a:prstGeom>
-          <a:noFill/>
-          <a:ln/>
-        </p:spPr>
-        <p:txBody>
-          <a:bodyPr wrap="square" lIns="0" tIns="0" rIns="0" bIns="0" rtlCol="0" anchor="ctr"/>
-          <a:lstStyle/>
-          <a:p>
-            <a:pPr indent="0" marL="0">
-              <a:buNone/>
-            </a:pPr>
-            <a:r>
-              <a:rPr lang="en-US" sz="1600" dirty="0">
-                <a:solidFill>
-                  <a:srgbClr val="A8B0BC"/>
-                </a:solidFill>
-                <a:latin typeface="Arial" pitchFamily="34" charset="0"/>
-                <a:ea typeface="Arial" pitchFamily="34" charset="-122"/>
-                <a:cs typeface="Arial" pitchFamily="34" charset="-120"/>
-              </a:rPr>
-              <a:t>The file the robot already writes is the input. A new model has to beat the one in production before it can watch the next shift.</a:t>
+              <a:t>XGBOOST</a:t>
+            </a:r>
+            <a:endParaRPr lang="en-US" sz="1200" dirty="0"/>
+          </a:p>
+        </p:txBody>
+      </p:sp>
+      <p:sp>
+        <p:nvSpPr>
+          <p:cNvPr id="23" name="Text 21"/>
+          <p:cNvSpPr/>
+          <p:nvPr/>
+        </p:nvSpPr>
+        <p:spPr>
+          <a:xfrm>
+            <a:off x="3931920" y="4846320"/>
+            <a:ext cx="2468880" cy="502920"/>
+          </a:xfrm>
+          <a:prstGeom prst="rect">
+            <a:avLst/>
+          </a:prstGeom>
+          <a:noFill/>
+          <a:ln/>
+        </p:spPr>
+        <p:txBody>
+          <a:bodyPr wrap="square" lIns="0" tIns="0" rIns="0" bIns="0" rtlCol="0" anchor="ctr"/>
+          <a:lstStyle/>
+          <a:p>
+            <a:pPr indent="0" marL="0">
+              <a:buNone/>
+            </a:pPr>
+            <a:r>
+              <a:rPr lang="en-US" sz="1600" b="1" dirty="0">
+                <a:solidFill>
+                  <a:srgbClr val="12171F"/>
+                </a:solidFill>
+                <a:latin typeface="Arial" pitchFamily="34" charset="0"/>
+                <a:ea typeface="Arial" pitchFamily="34" charset="-122"/>
+                <a:cs typeface="Arial" pitchFamily="34" charset="-120"/>
+              </a:rPr>
+              <a:t>41 of 55 missed</a:t>
             </a:r>
             <a:endParaRPr lang="en-US" sz="1600" dirty="0"/>
           </a:p>
@@ -5612,14 +8060,14 @@
       </p:sp>
       <p:sp>
         <p:nvSpPr>
-          <p:cNvPr id="7" name="Text 5"/>
-          <p:cNvSpPr/>
-          <p:nvPr/>
-        </p:nvSpPr>
-        <p:spPr>
-          <a:xfrm>
-            <a:off x="384048" y="5989320"/>
-            <a:ext cx="4023360" cy="365760"/>
+          <p:cNvPr id="24" name="Text 22"/>
+          <p:cNvSpPr/>
+          <p:nvPr/>
+        </p:nvSpPr>
+        <p:spPr>
+          <a:xfrm>
+            <a:off x="3931920" y="5486400"/>
+            <a:ext cx="2468880" cy="274320"/>
           </a:xfrm>
           <a:prstGeom prst="rect">
             <a:avLst/>
@@ -5637,7 +8085,280 @@
             <a:r>
               <a:rPr lang="en-US" sz="1400" dirty="0">
                 <a:solidFill>
-                  <a:srgbClr val="A8B0BC"/>
+                  <a:srgbClr val="5C6573"/>
+                </a:solidFill>
+                <a:latin typeface="Arial" pitchFamily="34" charset="0"/>
+                <a:ea typeface="Arial" pitchFamily="34" charset="-122"/>
+                <a:cs typeface="Arial" pitchFamily="34" charset="-120"/>
+              </a:rPr>
+              <a:t>Refused</a:t>
+            </a:r>
+            <a:endParaRPr lang="en-US" sz="1400" dirty="0"/>
+          </a:p>
+        </p:txBody>
+      </p:sp>
+      <p:sp>
+        <p:nvSpPr>
+          <p:cNvPr id="25" name="Text 23"/>
+          <p:cNvSpPr/>
+          <p:nvPr/>
+        </p:nvSpPr>
+        <p:spPr>
+          <a:xfrm>
+            <a:off x="6583680" y="4480560"/>
+            <a:ext cx="2468880" cy="256032"/>
+          </a:xfrm>
+          <a:prstGeom prst="rect">
+            <a:avLst/>
+          </a:prstGeom>
+          <a:noFill/>
+          <a:ln/>
+        </p:spPr>
+        <p:txBody>
+          <a:bodyPr wrap="square" lIns="0" tIns="0" rIns="0" bIns="0" rtlCol="0" anchor="ctr"/>
+          <a:lstStyle/>
+          <a:p>
+            <a:pPr indent="0" marL="0">
+              <a:buNone/>
+            </a:pPr>
+            <a:r>
+              <a:rPr lang="en-US" sz="1200" b="1" spc="80" kern="0" dirty="0">
+                <a:solidFill>
+                  <a:srgbClr val="C4501A"/>
+                </a:solidFill>
+                <a:latin typeface="Arial" pitchFamily="34" charset="0"/>
+                <a:ea typeface="Arial" pitchFamily="34" charset="-122"/>
+                <a:cs typeface="Arial" pitchFamily="34" charset="-120"/>
+              </a:rPr>
+              <a:t>ALWAYS ALARM</a:t>
+            </a:r>
+            <a:endParaRPr lang="en-US" sz="1200" dirty="0"/>
+          </a:p>
+        </p:txBody>
+      </p:sp>
+      <p:sp>
+        <p:nvSpPr>
+          <p:cNvPr id="26" name="Text 24"/>
+          <p:cNvSpPr/>
+          <p:nvPr/>
+        </p:nvSpPr>
+        <p:spPr>
+          <a:xfrm>
+            <a:off x="6583680" y="4846320"/>
+            <a:ext cx="2468880" cy="502920"/>
+          </a:xfrm>
+          <a:prstGeom prst="rect">
+            <a:avLst/>
+          </a:prstGeom>
+          <a:noFill/>
+          <a:ln/>
+        </p:spPr>
+        <p:txBody>
+          <a:bodyPr wrap="square" lIns="0" tIns="0" rIns="0" bIns="0" rtlCol="0" anchor="ctr"/>
+          <a:lstStyle/>
+          <a:p>
+            <a:pPr indent="0" marL="0">
+              <a:buNone/>
+            </a:pPr>
+            <a:r>
+              <a:rPr lang="en-US" sz="1600" b="1" dirty="0">
+                <a:solidFill>
+                  <a:srgbClr val="12171F"/>
+                </a:solidFill>
+                <a:latin typeface="Arial" pitchFamily="34" charset="0"/>
+                <a:ea typeface="Arial" pitchFamily="34" charset="-122"/>
+                <a:cs typeface="Arial" pitchFamily="34" charset="-120"/>
+              </a:rPr>
+              <a:t>Flags every pass</a:t>
+            </a:r>
+            <a:endParaRPr lang="en-US" sz="1600" dirty="0"/>
+          </a:p>
+        </p:txBody>
+      </p:sp>
+      <p:sp>
+        <p:nvSpPr>
+          <p:cNvPr id="27" name="Text 25"/>
+          <p:cNvSpPr/>
+          <p:nvPr/>
+        </p:nvSpPr>
+        <p:spPr>
+          <a:xfrm>
+            <a:off x="6583680" y="5486400"/>
+            <a:ext cx="2468880" cy="274320"/>
+          </a:xfrm>
+          <a:prstGeom prst="rect">
+            <a:avLst/>
+          </a:prstGeom>
+          <a:noFill/>
+          <a:ln/>
+        </p:spPr>
+        <p:txBody>
+          <a:bodyPr wrap="square" lIns="0" tIns="0" rIns="0" bIns="0" rtlCol="0" anchor="ctr"/>
+          <a:lstStyle/>
+          <a:p>
+            <a:pPr indent="0" marL="0">
+              <a:buNone/>
+            </a:pPr>
+            <a:r>
+              <a:rPr lang="en-US" sz="1400" dirty="0">
+                <a:solidFill>
+                  <a:srgbClr val="5C6573"/>
+                </a:solidFill>
+                <a:latin typeface="Arial" pitchFamily="34" charset="0"/>
+                <a:ea typeface="Arial" pitchFamily="34" charset="-122"/>
+                <a:cs typeface="Arial" pitchFamily="34" charset="-120"/>
+              </a:rPr>
+              <a:t>Refused</a:t>
+            </a:r>
+            <a:endParaRPr lang="en-US" sz="1400" dirty="0"/>
+          </a:p>
+        </p:txBody>
+      </p:sp>
+      <p:sp>
+        <p:nvSpPr>
+          <p:cNvPr id="28" name="Text 26"/>
+          <p:cNvSpPr/>
+          <p:nvPr/>
+        </p:nvSpPr>
+        <p:spPr>
+          <a:xfrm>
+            <a:off x="9235440" y="4480560"/>
+            <a:ext cx="2468880" cy="256032"/>
+          </a:xfrm>
+          <a:prstGeom prst="rect">
+            <a:avLst/>
+          </a:prstGeom>
+          <a:noFill/>
+          <a:ln/>
+        </p:spPr>
+        <p:txBody>
+          <a:bodyPr wrap="square" lIns="0" tIns="0" rIns="0" bIns="0" rtlCol="0" anchor="ctr"/>
+          <a:lstStyle/>
+          <a:p>
+            <a:pPr indent="0" marL="0">
+              <a:buNone/>
+            </a:pPr>
+            <a:r>
+              <a:rPr lang="en-US" sz="1200" b="1" spc="80" kern="0" dirty="0">
+                <a:solidFill>
+                  <a:srgbClr val="C4501A"/>
+                </a:solidFill>
+                <a:latin typeface="Arial" pitchFamily="34" charset="0"/>
+                <a:ea typeface="Arial" pitchFamily="34" charset="-122"/>
+                <a:cs typeface="Arial" pitchFamily="34" charset="-120"/>
+              </a:rPr>
+              <a:t>NEVER ALARM</a:t>
+            </a:r>
+            <a:endParaRPr lang="en-US" sz="1200" dirty="0"/>
+          </a:p>
+        </p:txBody>
+      </p:sp>
+      <p:sp>
+        <p:nvSpPr>
+          <p:cNvPr id="29" name="Text 27"/>
+          <p:cNvSpPr/>
+          <p:nvPr/>
+        </p:nvSpPr>
+        <p:spPr>
+          <a:xfrm>
+            <a:off x="9235440" y="4846320"/>
+            <a:ext cx="2468880" cy="502920"/>
+          </a:xfrm>
+          <a:prstGeom prst="rect">
+            <a:avLst/>
+          </a:prstGeom>
+          <a:noFill/>
+          <a:ln/>
+        </p:spPr>
+        <p:txBody>
+          <a:bodyPr wrap="square" lIns="0" tIns="0" rIns="0" bIns="0" rtlCol="0" anchor="ctr"/>
+          <a:lstStyle/>
+          <a:p>
+            <a:pPr indent="0" marL="0">
+              <a:buNone/>
+            </a:pPr>
+            <a:r>
+              <a:rPr lang="en-US" sz="1600" b="1" dirty="0">
+                <a:solidFill>
+                  <a:srgbClr val="12171F"/>
+                </a:solidFill>
+                <a:latin typeface="Arial" pitchFamily="34" charset="0"/>
+                <a:ea typeface="Arial" pitchFamily="34" charset="-122"/>
+                <a:cs typeface="Arial" pitchFamily="34" charset="-120"/>
+              </a:rPr>
+              <a:t>Misses every fault</a:t>
+            </a:r>
+            <a:endParaRPr lang="en-US" sz="1600" dirty="0"/>
+          </a:p>
+        </p:txBody>
+      </p:sp>
+      <p:sp>
+        <p:nvSpPr>
+          <p:cNvPr id="30" name="Text 28"/>
+          <p:cNvSpPr/>
+          <p:nvPr/>
+        </p:nvSpPr>
+        <p:spPr>
+          <a:xfrm>
+            <a:off x="9235440" y="5486400"/>
+            <a:ext cx="2468880" cy="274320"/>
+          </a:xfrm>
+          <a:prstGeom prst="rect">
+            <a:avLst/>
+          </a:prstGeom>
+          <a:noFill/>
+          <a:ln/>
+        </p:spPr>
+        <p:txBody>
+          <a:bodyPr wrap="square" lIns="0" tIns="0" rIns="0" bIns="0" rtlCol="0" anchor="ctr"/>
+          <a:lstStyle/>
+          <a:p>
+            <a:pPr indent="0" marL="0">
+              <a:buNone/>
+            </a:pPr>
+            <a:r>
+              <a:rPr lang="en-US" sz="1400" dirty="0">
+                <a:solidFill>
+                  <a:srgbClr val="5C6573"/>
+                </a:solidFill>
+                <a:latin typeface="Arial" pitchFamily="34" charset="0"/>
+                <a:ea typeface="Arial" pitchFamily="34" charset="-122"/>
+                <a:cs typeface="Arial" pitchFamily="34" charset="-120"/>
+              </a:rPr>
+              <a:t>Refused</a:t>
+            </a:r>
+            <a:endParaRPr lang="en-US" sz="1400" dirty="0"/>
+          </a:p>
+        </p:txBody>
+      </p:sp>
+      <p:sp>
+        <p:nvSpPr>
+          <p:cNvPr id="31" name="Text 29"/>
+          <p:cNvSpPr/>
+          <p:nvPr/>
+        </p:nvSpPr>
+        <p:spPr>
+          <a:xfrm>
+            <a:off x="457200" y="6510528"/>
+            <a:ext cx="5486400" cy="201168"/>
+          </a:xfrm>
+          <a:prstGeom prst="rect">
+            <a:avLst/>
+          </a:prstGeom>
+          <a:noFill/>
+          <a:ln/>
+        </p:spPr>
+        <p:txBody>
+          <a:bodyPr wrap="square" lIns="0" tIns="0" rIns="0" bIns="0" rtlCol="0" anchor="ctr"/>
+          <a:lstStyle/>
+          <a:p>
+            <a:pPr indent="0" marL="0">
+              <a:buNone/>
+            </a:pPr>
+            <a:r>
+              <a:rPr lang="en-US" sz="1100" dirty="0">
+                <a:solidFill>
+                  <a:srgbClr val="5C6573"/>
                 </a:solidFill>
                 <a:latin typeface="Arial" pitchFamily="34" charset="0"/>
                 <a:ea typeface="Arial" pitchFamily="34" charset="-122"/>
@@ -5645,75 +8366,36 @@
               </a:rPr>
               <a:t>ABB Accelerator 2026</a:t>
             </a:r>
-            <a:endParaRPr lang="en-US" sz="1400" dirty="0"/>
-          </a:p>
-        </p:txBody>
-      </p:sp>
-      <p:sp>
-        <p:nvSpPr>
-          <p:cNvPr id="8" name="Text 6"/>
-          <p:cNvSpPr/>
-          <p:nvPr/>
-        </p:nvSpPr>
-        <p:spPr>
-          <a:xfrm>
-            <a:off x="5074920" y="365760"/>
-            <a:ext cx="6583680" cy="365760"/>
-          </a:xfrm>
-          <a:prstGeom prst="rect">
-            <a:avLst/>
-          </a:prstGeom>
-          <a:noFill/>
-          <a:ln/>
-        </p:spPr>
-        <p:txBody>
-          <a:bodyPr wrap="square" lIns="0" tIns="0" rIns="0" bIns="0" rtlCol="0" anchor="ctr"/>
-          <a:lstStyle/>
-          <a:p>
-            <a:pPr indent="0" marL="0">
-              <a:buNone/>
-            </a:pPr>
-            <a:r>
-              <a:rPr lang="en-US" sz="2200" b="1" dirty="0">
-                <a:solidFill>
-                  <a:srgbClr val="12171F"/>
-                </a:solidFill>
-                <a:latin typeface="Arial" pitchFamily="34" charset="0"/>
-                <a:ea typeface="Arial" pitchFamily="34" charset="-122"/>
-                <a:cs typeface="Arial" pitchFamily="34" charset="-120"/>
-              </a:rPr>
-              <a:t>Same cell</a:t>
-            </a:r>
-            <a:endParaRPr lang="en-US" sz="2200" dirty="0"/>
-          </a:p>
-        </p:txBody>
-      </p:sp>
-      <p:sp>
-        <p:nvSpPr>
-          <p:cNvPr id="9" name="Text 7"/>
-          <p:cNvSpPr/>
-          <p:nvPr/>
-        </p:nvSpPr>
-        <p:spPr>
-          <a:xfrm>
-            <a:off x="5074920" y="804672"/>
-            <a:ext cx="6583680" cy="685800"/>
-          </a:xfrm>
-          <a:prstGeom prst="rect">
-            <a:avLst/>
-          </a:prstGeom>
-          <a:noFill/>
-          <a:ln/>
-        </p:spPr>
-        <p:txBody>
-          <a:bodyPr wrap="square" lIns="0" tIns="0" rIns="0" bIns="0" rtlCol="0" anchor="ctr"/>
-          <a:lstStyle/>
-          <a:p>
-            <a:pPr indent="0" marL="0">
-              <a:buNone/>
-            </a:pPr>
-            <a:r>
-              <a:rPr lang="en-US" sz="1500" dirty="0">
+            <a:endParaRPr lang="en-US" sz="1100" dirty="0"/>
+          </a:p>
+        </p:txBody>
+      </p:sp>
+      <p:sp>
+        <p:nvSpPr>
+          <p:cNvPr id="32" name="Text 30"/>
+          <p:cNvSpPr/>
+          <p:nvPr/>
+        </p:nvSpPr>
+        <p:spPr>
+          <a:xfrm>
+            <a:off x="6217920" y="6510528"/>
+            <a:ext cx="5513832" cy="201168"/>
+          </a:xfrm>
+          <a:prstGeom prst="rect">
+            <a:avLst/>
+          </a:prstGeom>
+          <a:noFill/>
+          <a:ln/>
+        </p:spPr>
+        <p:txBody>
+          <a:bodyPr wrap="square" lIns="0" tIns="0" rIns="0" bIns="0" rtlCol="0" anchor="ctr"/>
+          <a:lstStyle/>
+          <a:p>
+            <a:pPr algn="r" indent="0" marL="0">
+              <a:buNone/>
+            </a:pPr>
+            <a:r>
+              <a:rPr lang="en-US" sz="1100" dirty="0">
                 <a:solidFill>
                   <a:srgbClr val="5C6573"/>
                 </a:solidFill>
@@ -5721,243 +8403,9 @@
                 <a:ea typeface="Arial" pitchFamily="34" charset="-122"/>
                 <a:cs typeface="Arial" pitchFamily="34" charset="-120"/>
               </a:rPr>
-              <a:t>Torque, current, force, and vibration are already on the robot. PromoteGate starts from that file.</a:t>
-            </a:r>
-            <a:endParaRPr lang="en-US" sz="1500" dirty="0"/>
-          </a:p>
-        </p:txBody>
-      </p:sp>
-      <p:sp>
-        <p:nvSpPr>
-          <p:cNvPr id="10" name="Text 8"/>
-          <p:cNvSpPr/>
-          <p:nvPr/>
-        </p:nvSpPr>
-        <p:spPr>
-          <a:xfrm>
-            <a:off x="5074920" y="1920240"/>
-            <a:ext cx="6583680" cy="365760"/>
-          </a:xfrm>
-          <a:prstGeom prst="rect">
-            <a:avLst/>
-          </a:prstGeom>
-          <a:noFill/>
-          <a:ln/>
-        </p:spPr>
-        <p:txBody>
-          <a:bodyPr wrap="square" lIns="0" tIns="0" rIns="0" bIns="0" rtlCol="0" anchor="ctr"/>
-          <a:lstStyle/>
-          <a:p>
-            <a:pPr indent="0" marL="0">
-              <a:buNone/>
-            </a:pPr>
-            <a:r>
-              <a:rPr lang="en-US" sz="2200" b="1" dirty="0">
-                <a:solidFill>
-                  <a:srgbClr val="12171F"/>
-                </a:solidFill>
-                <a:latin typeface="Arial" pitchFamily="34" charset="0"/>
-                <a:ea typeface="Arial" pitchFamily="34" charset="-122"/>
-                <a:cs typeface="Arial" pitchFamily="34" charset="-120"/>
-              </a:rPr>
-              <a:t>Same job</a:t>
-            </a:r>
-            <a:endParaRPr lang="en-US" sz="2200" dirty="0"/>
-          </a:p>
-        </p:txBody>
-      </p:sp>
-      <p:sp>
-        <p:nvSpPr>
-          <p:cNvPr id="11" name="Text 9"/>
-          <p:cNvSpPr/>
-          <p:nvPr/>
-        </p:nvSpPr>
-        <p:spPr>
-          <a:xfrm>
-            <a:off x="5074920" y="2359152"/>
-            <a:ext cx="6583680" cy="685800"/>
-          </a:xfrm>
-          <a:prstGeom prst="rect">
-            <a:avLst/>
-          </a:prstGeom>
-          <a:noFill/>
-          <a:ln/>
-        </p:spPr>
-        <p:txBody>
-          <a:bodyPr wrap="square" lIns="0" tIns="0" rIns="0" bIns="0" rtlCol="0" anchor="ctr"/>
-          <a:lstStyle/>
-          <a:p>
-            <a:pPr indent="0" marL="0">
-              <a:buNone/>
-            </a:pPr>
-            <a:r>
-              <a:rPr lang="en-US" sz="1500" dirty="0">
-                <a:solidFill>
-                  <a:srgbClr val="5C6573"/>
-                </a:solidFill>
-                <a:latin typeface="Arial" pitchFamily="34" charset="0"/>
-                <a:ea typeface="Arial" pitchFamily="34" charset="-122"/>
-                <a:cs typeface="Arial" pitchFamily="34" charset="-120"/>
-              </a:rPr>
-              <a:t>The demo is cutting passes on an IRB 6660. A weld cell uses the same check on its own logs.</a:t>
-            </a:r>
-            <a:endParaRPr lang="en-US" sz="1500" dirty="0"/>
-          </a:p>
-        </p:txBody>
-      </p:sp>
-      <p:sp>
-        <p:nvSpPr>
-          <p:cNvPr id="12" name="Text 10"/>
-          <p:cNvSpPr/>
-          <p:nvPr/>
-        </p:nvSpPr>
-        <p:spPr>
-          <a:xfrm>
-            <a:off x="5074920" y="3474720"/>
-            <a:ext cx="6583680" cy="365760"/>
-          </a:xfrm>
-          <a:prstGeom prst="rect">
-            <a:avLst/>
-          </a:prstGeom>
-          <a:noFill/>
-          <a:ln/>
-        </p:spPr>
-        <p:txBody>
-          <a:bodyPr wrap="square" lIns="0" tIns="0" rIns="0" bIns="0" rtlCol="0" anchor="ctr"/>
-          <a:lstStyle/>
-          <a:p>
-            <a:pPr indent="0" marL="0">
-              <a:buNone/>
-            </a:pPr>
-            <a:r>
-              <a:rPr lang="en-US" sz="2200" b="1" dirty="0">
-                <a:solidFill>
-                  <a:srgbClr val="12171F"/>
-                </a:solidFill>
-                <a:latin typeface="Arial" pitchFamily="34" charset="0"/>
-                <a:ea typeface="Arial" pitchFamily="34" charset="-122"/>
-                <a:cs typeface="Arial" pitchFamily="34" charset="-120"/>
-              </a:rPr>
-              <a:t>Same controller</a:t>
-            </a:r>
-            <a:endParaRPr lang="en-US" sz="2200" dirty="0"/>
-          </a:p>
-        </p:txBody>
-      </p:sp>
-      <p:sp>
-        <p:nvSpPr>
-          <p:cNvPr id="13" name="Text 11"/>
-          <p:cNvSpPr/>
-          <p:nvPr/>
-        </p:nvSpPr>
-        <p:spPr>
-          <a:xfrm>
-            <a:off x="5074920" y="3913632"/>
-            <a:ext cx="6583680" cy="685800"/>
-          </a:xfrm>
-          <a:prstGeom prst="rect">
-            <a:avLst/>
-          </a:prstGeom>
-          <a:noFill/>
-          <a:ln/>
-        </p:spPr>
-        <p:txBody>
-          <a:bodyPr wrap="square" lIns="0" tIns="0" rIns="0" bIns="0" rtlCol="0" anchor="ctr"/>
-          <a:lstStyle/>
-          <a:p>
-            <a:pPr indent="0" marL="0">
-              <a:buNone/>
-            </a:pPr>
-            <a:r>
-              <a:rPr lang="en-US" sz="1500" dirty="0">
-                <a:solidFill>
-                  <a:srgbClr val="5C6573"/>
-                </a:solidFill>
-                <a:latin typeface="Arial" pitchFamily="34" charset="0"/>
-                <a:ea typeface="Arial" pitchFamily="34" charset="-122"/>
-                <a:cs typeface="Arial" pitchFamily="34" charset="-120"/>
-              </a:rPr>
-              <a:t>Joint commands stay with the controller. The arm keeps the program it was given.</a:t>
-            </a:r>
-            <a:endParaRPr lang="en-US" sz="1500" dirty="0"/>
-          </a:p>
-        </p:txBody>
-      </p:sp>
-      <p:sp>
-        <p:nvSpPr>
-          <p:cNvPr id="14" name="Text 12"/>
-          <p:cNvSpPr/>
-          <p:nvPr/>
-        </p:nvSpPr>
-        <p:spPr>
-          <a:xfrm>
-            <a:off x="5074920" y="5029200"/>
-            <a:ext cx="6583680" cy="365760"/>
-          </a:xfrm>
-          <a:prstGeom prst="rect">
-            <a:avLst/>
-          </a:prstGeom>
-          <a:noFill/>
-          <a:ln/>
-        </p:spPr>
-        <p:txBody>
-          <a:bodyPr wrap="square" lIns="0" tIns="0" rIns="0" bIns="0" rtlCol="0" anchor="ctr"/>
-          <a:lstStyle/>
-          <a:p>
-            <a:pPr indent="0" marL="0">
-              <a:buNone/>
-            </a:pPr>
-            <a:r>
-              <a:rPr lang="en-US" sz="2200" b="1" dirty="0">
-                <a:solidFill>
-                  <a:srgbClr val="12171F"/>
-                </a:solidFill>
-                <a:latin typeface="Arial" pitchFamily="34" charset="0"/>
-                <a:ea typeface="Arial" pitchFamily="34" charset="-122"/>
-                <a:cs typeface="Arial" pitchFamily="34" charset="-120"/>
-              </a:rPr>
-              <a:t>A separate click</a:t>
-            </a:r>
-            <a:endParaRPr lang="en-US" sz="2200" dirty="0"/>
-          </a:p>
-        </p:txBody>
-      </p:sp>
-      <p:sp>
-        <p:nvSpPr>
-          <p:cNvPr id="15" name="Text 13"/>
-          <p:cNvSpPr/>
-          <p:nvPr/>
-        </p:nvSpPr>
-        <p:spPr>
-          <a:xfrm>
-            <a:off x="5074920" y="5468112"/>
-            <a:ext cx="6583680" cy="685800"/>
-          </a:xfrm>
-          <a:prstGeom prst="rect">
-            <a:avLst/>
-          </a:prstGeom>
-          <a:noFill/>
-          <a:ln/>
-        </p:spPr>
-        <p:txBody>
-          <a:bodyPr wrap="square" lIns="0" tIns="0" rIns="0" bIns="0" rtlCol="0" anchor="ctr"/>
-          <a:lstStyle/>
-          <a:p>
-            <a:pPr indent="0" marL="0">
-              <a:buNone/>
-            </a:pPr>
-            <a:r>
-              <a:rPr lang="en-US" sz="1500" dirty="0">
-                <a:solidFill>
-                  <a:srgbClr val="5C6573"/>
-                </a:solidFill>
-                <a:latin typeface="Arial" pitchFamily="34" charset="0"/>
-                <a:ea typeface="Arial" pitchFamily="34" charset="-122"/>
-                <a:cs typeface="Arial" pitchFamily="34" charset="-120"/>
-              </a:rPr>
-              <a:t>The check can allow a model. Putting it into production is a person’s click, and the click is audited.</a:t>
-            </a:r>
-            <a:endParaRPr lang="en-US" sz="1500" dirty="0"/>
+              <a:t>Theme 1  ·  Predictive maintenance</a:t>
+            </a:r>
+            <a:endParaRPr lang="en-US" sz="1100" dirty="0"/>
           </a:p>
         </p:txBody>
       </p:sp>
@@ -5995,14 +8443,234 @@
       </p:grpSpPr>
       <p:sp>
         <p:nvSpPr>
-          <p:cNvPr id="2" name="Shape 0"/>
-          <p:cNvSpPr/>
-          <p:nvPr/>
-        </p:nvSpPr>
-        <p:spPr>
-          <a:xfrm>
-            <a:off x="6095390" y="0"/>
-            <a:ext cx="6096305" cy="6858000"/>
+          <p:cNvPr id="2" name="Text 0"/>
+          <p:cNvSpPr/>
+          <p:nvPr/>
+        </p:nvSpPr>
+        <p:spPr>
+          <a:xfrm>
+            <a:off x="457200" y="256032"/>
+            <a:ext cx="640080" cy="256032"/>
+          </a:xfrm>
+          <a:prstGeom prst="rect">
+            <a:avLst/>
+          </a:prstGeom>
+          <a:noFill/>
+          <a:ln/>
+        </p:spPr>
+        <p:txBody>
+          <a:bodyPr wrap="square" lIns="0" tIns="0" rIns="0" bIns="0" rtlCol="0" anchor="ctr"/>
+          <a:lstStyle/>
+          <a:p>
+            <a:pPr indent="0" marL="0">
+              <a:buNone/>
+            </a:pPr>
+            <a:r>
+              <a:rPr lang="en-US" sz="1200" b="1" dirty="0">
+                <a:solidFill>
+                  <a:srgbClr val="5C6573"/>
+                </a:solidFill>
+                <a:latin typeface="Arial" pitchFamily="34" charset="0"/>
+                <a:ea typeface="Arial" pitchFamily="34" charset="-122"/>
+                <a:cs typeface="Arial" pitchFamily="34" charset="-120"/>
+              </a:rPr>
+              <a:t>07</a:t>
+            </a:r>
+            <a:endParaRPr lang="en-US" sz="1200" dirty="0"/>
+          </a:p>
+        </p:txBody>
+      </p:sp>
+      <p:sp>
+        <p:nvSpPr>
+          <p:cNvPr id="3" name="Text 1"/>
+          <p:cNvSpPr/>
+          <p:nvPr/>
+        </p:nvSpPr>
+        <p:spPr>
+          <a:xfrm>
+            <a:off x="1051560" y="256032"/>
+            <a:ext cx="5943600" cy="256032"/>
+          </a:xfrm>
+          <a:prstGeom prst="rect">
+            <a:avLst/>
+          </a:prstGeom>
+          <a:noFill/>
+          <a:ln/>
+        </p:spPr>
+        <p:txBody>
+          <a:bodyPr wrap="square" lIns="0" tIns="0" rIns="0" bIns="0" rtlCol="0" anchor="ctr"/>
+          <a:lstStyle/>
+          <a:p>
+            <a:pPr indent="0" marL="0">
+              <a:buNone/>
+            </a:pPr>
+            <a:r>
+              <a:rPr lang="en-US" sz="1200" b="1" spc="140" kern="0" dirty="0">
+                <a:solidFill>
+                  <a:srgbClr val="C4501A"/>
+                </a:solidFill>
+                <a:latin typeface="Arial" pitchFamily="34" charset="0"/>
+                <a:ea typeface="Arial" pitchFamily="34" charset="-122"/>
+                <a:cs typeface="Arial" pitchFamily="34" charset="-120"/>
+              </a:rPr>
+              <a:t>THE FIRST RUN</a:t>
+            </a:r>
+            <a:endParaRPr lang="en-US" sz="1200" dirty="0"/>
+          </a:p>
+        </p:txBody>
+      </p:sp>
+      <p:sp>
+        <p:nvSpPr>
+          <p:cNvPr id="4" name="Text 2"/>
+          <p:cNvSpPr/>
+          <p:nvPr/>
+        </p:nvSpPr>
+        <p:spPr>
+          <a:xfrm>
+            <a:off x="7589520" y="256032"/>
+            <a:ext cx="4114800" cy="256032"/>
+          </a:xfrm>
+          <a:prstGeom prst="rect">
+            <a:avLst/>
+          </a:prstGeom>
+          <a:noFill/>
+          <a:ln/>
+        </p:spPr>
+        <p:txBody>
+          <a:bodyPr wrap="square" lIns="0" tIns="0" rIns="0" bIns="0" rtlCol="0" anchor="ctr"/>
+          <a:lstStyle/>
+          <a:p>
+            <a:pPr algn="r" indent="0" marL="0">
+              <a:buNone/>
+            </a:pPr>
+            <a:r>
+              <a:rPr lang="en-US" sz="1200" spc="120" kern="0" dirty="0">
+                <a:solidFill>
+                  <a:srgbClr val="5C6573"/>
+                </a:solidFill>
+                <a:latin typeface="Arial" pitchFamily="34" charset="0"/>
+                <a:ea typeface="Arial" pitchFamily="34" charset="-122"/>
+                <a:cs typeface="Arial" pitchFamily="34" charset="-120"/>
+              </a:rPr>
+              <a:t>PROMOTEGATE</a:t>
+            </a:r>
+            <a:endParaRPr lang="en-US" sz="1200" dirty="0"/>
+          </a:p>
+        </p:txBody>
+      </p:sp>
+      <p:sp>
+        <p:nvSpPr>
+          <p:cNvPr id="5" name="Shape 3"/>
+          <p:cNvSpPr/>
+          <p:nvPr/>
+        </p:nvSpPr>
+        <p:spPr>
+          <a:xfrm>
+            <a:off x="457200" y="621792"/>
+            <a:ext cx="11274552" cy="13716"/>
+          </a:xfrm>
+          <a:prstGeom prst="rect">
+            <a:avLst/>
+          </a:prstGeom>
+          <a:solidFill>
+            <a:srgbClr val="D5CBBC"/>
+          </a:solidFill>
+          <a:ln w="12700">
+            <a:solidFill>
+              <a:srgbClr val="D5CBBC"/>
+            </a:solidFill>
+            <a:prstDash val="solid"/>
+          </a:ln>
+        </p:spPr>
+      </p:sp>
+      <p:sp>
+        <p:nvSpPr>
+          <p:cNvPr id="6" name="Text 4"/>
+          <p:cNvSpPr/>
+          <p:nvPr/>
+        </p:nvSpPr>
+        <p:spPr>
+          <a:xfrm>
+            <a:off x="457200" y="786384"/>
+            <a:ext cx="11247120" cy="384048"/>
+          </a:xfrm>
+          <a:prstGeom prst="rect">
+            <a:avLst/>
+          </a:prstGeom>
+          <a:noFill/>
+          <a:ln/>
+        </p:spPr>
+        <p:txBody>
+          <a:bodyPr wrap="square" lIns="0" tIns="0" rIns="0" bIns="0" rtlCol="0" anchor="ctr"/>
+          <a:lstStyle/>
+          <a:p>
+            <a:pPr indent="0" marL="0">
+              <a:buNone/>
+            </a:pPr>
+            <a:r>
+              <a:rPr lang="en-US" sz="2600" b="1" dirty="0">
+                <a:solidFill>
+                  <a:srgbClr val="12171F"/>
+                </a:solidFill>
+                <a:latin typeface="Arial" pitchFamily="34" charset="0"/>
+                <a:ea typeface="Arial" pitchFamily="34" charset="-122"/>
+                <a:cs typeface="Arial" pitchFamily="34" charset="-120"/>
+              </a:rPr>
+              <a:t>The gate refused our own model first.</a:t>
+            </a:r>
+            <a:endParaRPr lang="en-US" sz="2600" dirty="0"/>
+          </a:p>
+        </p:txBody>
+      </p:sp>
+      <p:sp>
+        <p:nvSpPr>
+          <p:cNvPr id="7" name="Text 5"/>
+          <p:cNvSpPr/>
+          <p:nvPr/>
+        </p:nvSpPr>
+        <p:spPr>
+          <a:xfrm>
+            <a:off x="457200" y="1207008"/>
+            <a:ext cx="11155680" cy="329184"/>
+          </a:xfrm>
+          <a:prstGeom prst="rect">
+            <a:avLst/>
+          </a:prstGeom>
+          <a:noFill/>
+          <a:ln/>
+        </p:spPr>
+        <p:txBody>
+          <a:bodyPr wrap="square" lIns="0" tIns="0" rIns="0" bIns="0" rtlCol="0" anchor="ctr"/>
+          <a:lstStyle/>
+          <a:p>
+            <a:pPr indent="0" marL="0">
+              <a:buNone/>
+            </a:pPr>
+            <a:r>
+              <a:rPr lang="en-US" sz="1400" dirty="0">
+                <a:solidFill>
+                  <a:srgbClr val="5C6573"/>
+                </a:solidFill>
+                <a:latin typeface="Arial" pitchFamily="34" charset="0"/>
+                <a:ea typeface="Arial" pitchFamily="34" charset="-122"/>
+                <a:cs typeface="Arial" pitchFamily="34" charset="-120"/>
+              </a:rPr>
+              <a:t>Same robot, same recordings, a few hours before the result on the last slide. A training score would have shipped it.</a:t>
+            </a:r>
+            <a:endParaRPr lang="en-US" sz="1400" dirty="0"/>
+          </a:p>
+        </p:txBody>
+      </p:sp>
+      <p:sp>
+        <p:nvSpPr>
+          <p:cNvPr id="8" name="Shape 6"/>
+          <p:cNvSpPr/>
+          <p:nvPr/>
+        </p:nvSpPr>
+        <p:spPr>
+          <a:xfrm>
+            <a:off x="457200" y="1737360"/>
+            <a:ext cx="5440680" cy="3840480"/>
           </a:xfrm>
           <a:prstGeom prst="rect">
             <a:avLst/>
@@ -6020,30 +8688,30 @@
       </p:sp>
       <p:sp>
         <p:nvSpPr>
-          <p:cNvPr id="3" name="Text 1"/>
-          <p:cNvSpPr/>
-          <p:nvPr/>
-        </p:nvSpPr>
-        <p:spPr>
-          <a:xfrm>
-            <a:off x="438912" y="411480"/>
-            <a:ext cx="5120640" cy="274320"/>
-          </a:xfrm>
-          <a:prstGeom prst="rect">
-            <a:avLst/>
-          </a:prstGeom>
-          <a:noFill/>
-          <a:ln/>
-        </p:spPr>
-        <p:txBody>
-          <a:bodyPr wrap="square" lIns="0" tIns="0" rIns="0" bIns="0" rtlCol="0" anchor="ctr"/>
-          <a:lstStyle/>
-          <a:p>
-            <a:pPr indent="0" marL="0">
-              <a:buNone/>
-            </a:pPr>
-            <a:r>
-              <a:rPr lang="en-US" sz="1300" b="1" spc="120" kern="0" dirty="0">
+          <p:cNvPr id="9" name="Text 7"/>
+          <p:cNvSpPr/>
+          <p:nvPr/>
+        </p:nvSpPr>
+        <p:spPr>
+          <a:xfrm>
+            <a:off x="685800" y="1920240"/>
+            <a:ext cx="5029200" cy="256032"/>
+          </a:xfrm>
+          <a:prstGeom prst="rect">
+            <a:avLst/>
+          </a:prstGeom>
+          <a:noFill/>
+          <a:ln/>
+        </p:spPr>
+        <p:txBody>
+          <a:bodyPr wrap="square" lIns="0" tIns="0" rIns="0" bIns="0" rtlCol="0" anchor="ctr"/>
+          <a:lstStyle/>
+          <a:p>
+            <a:pPr indent="0" marL="0">
+              <a:buNone/>
+            </a:pPr>
+            <a:r>
+              <a:rPr lang="en-US" sz="1200" b="1" spc="120" kern="0" dirty="0">
                 <a:solidFill>
                   <a:srgbClr val="C4501A"/>
                 </a:solidFill>
@@ -6051,38 +8719,267 @@
                 <a:ea typeface="Arial" pitchFamily="34" charset="-122"/>
                 <a:cs typeface="Arial" pitchFamily="34" charset="-120"/>
               </a:rPr>
-              <a:t>07    THIS DEMO</a:t>
-            </a:r>
-            <a:endParaRPr lang="en-US" sz="1300" dirty="0"/>
-          </a:p>
-        </p:txBody>
-      </p:sp>
-      <p:sp>
-        <p:nvSpPr>
-          <p:cNvPr id="4" name="Text 2"/>
-          <p:cNvSpPr/>
-          <p:nvPr/>
-        </p:nvSpPr>
-        <p:spPr>
-          <a:xfrm>
-            <a:off x="438912" y="1554480"/>
-            <a:ext cx="5120640" cy="1051560"/>
-          </a:xfrm>
-          <a:prstGeom prst="rect">
-            <a:avLst/>
-          </a:prstGeom>
-          <a:noFill/>
-          <a:ln/>
-        </p:spPr>
-        <p:txBody>
-          <a:bodyPr wrap="square" lIns="0" tIns="0" rIns="0" bIns="0" rtlCol="0" anchor="ctr"/>
-          <a:lstStyle/>
-          <a:p>
-            <a:pPr indent="0" marL="0">
-              <a:buNone/>
-            </a:pPr>
-            <a:r>
-              <a:rPr lang="en-US" sz="7200" b="1" dirty="0">
+              <a:t>RUN ONE    REFUSED</a:t>
+            </a:r>
+            <a:endParaRPr lang="en-US" sz="1200" dirty="0"/>
+          </a:p>
+        </p:txBody>
+      </p:sp>
+      <p:sp>
+        <p:nvSpPr>
+          <p:cNvPr id="10" name="Text 8"/>
+          <p:cNvSpPr/>
+          <p:nvPr/>
+        </p:nvSpPr>
+        <p:spPr>
+          <a:xfrm>
+            <a:off x="685800" y="2240280"/>
+            <a:ext cx="1280160" cy="822960"/>
+          </a:xfrm>
+          <a:prstGeom prst="rect">
+            <a:avLst/>
+          </a:prstGeom>
+          <a:noFill/>
+          <a:ln/>
+        </p:spPr>
+        <p:txBody>
+          <a:bodyPr wrap="square" lIns="0" tIns="0" rIns="0" bIns="0" rtlCol="0" anchor="ctr"/>
+          <a:lstStyle/>
+          <a:p>
+            <a:pPr indent="0" marL="0">
+              <a:buNone/>
+            </a:pPr>
+            <a:r>
+              <a:rPr lang="en-US" sz="5200" b="1" dirty="0">
+                <a:solidFill>
+                  <a:srgbClr val="F7F4EE"/>
+                </a:solidFill>
+                <a:latin typeface="Arial" pitchFamily="34" charset="0"/>
+                <a:ea typeface="Arial" pitchFamily="34" charset="-122"/>
+                <a:cs typeface="Arial" pitchFamily="34" charset="-120"/>
+              </a:rPr>
+              <a:t>0</a:t>
+            </a:r>
+            <a:endParaRPr lang="en-US" sz="5200" dirty="0"/>
+          </a:p>
+        </p:txBody>
+      </p:sp>
+      <p:sp>
+        <p:nvSpPr>
+          <p:cNvPr id="11" name="Text 9"/>
+          <p:cNvSpPr/>
+          <p:nvPr/>
+        </p:nvSpPr>
+        <p:spPr>
+          <a:xfrm>
+            <a:off x="2011680" y="2377440"/>
+            <a:ext cx="3566160" cy="594360"/>
+          </a:xfrm>
+          <a:prstGeom prst="rect">
+            <a:avLst/>
+          </a:prstGeom>
+          <a:noFill/>
+          <a:ln/>
+        </p:spPr>
+        <p:txBody>
+          <a:bodyPr wrap="square" lIns="0" tIns="0" rIns="0" bIns="0" rtlCol="0" anchor="ctr"/>
+          <a:lstStyle/>
+          <a:p>
+            <a:pPr indent="0" marL="0">
+              <a:buNone/>
+            </a:pPr>
+            <a:r>
+              <a:rPr lang="en-US" sz="1500" dirty="0">
+                <a:solidFill>
+                  <a:srgbClr val="A8B0BC"/>
+                </a:solidFill>
+                <a:latin typeface="Arial" pitchFamily="34" charset="0"/>
+                <a:ea typeface="Arial" pitchFamily="34" charset="-122"/>
+                <a:cs typeface="Arial" pitchFamily="34" charset="-120"/>
+              </a:rPr>
+              <a:t>of 53 faults missed.</a:t>
+            </a:r>
+            <a:endParaRPr lang="en-US" sz="1500" dirty="0"/>
+          </a:p>
+          <a:p>
+            <a:pPr indent="0" marL="0">
+              <a:buNone/>
+            </a:pPr>
+            <a:r>
+              <a:rPr lang="en-US" sz="1500" dirty="0">
+                <a:solidFill>
+                  <a:srgbClr val="A8B0BC"/>
+                </a:solidFill>
+                <a:latin typeface="Arial" pitchFamily="34" charset="0"/>
+                <a:ea typeface="Arial" pitchFamily="34" charset="-122"/>
+                <a:cs typeface="Arial" pitchFamily="34" charset="-120"/>
+              </a:rPr>
+              <a:t>Looks perfect.</a:t>
+            </a:r>
+            <a:endParaRPr lang="en-US" sz="1500" dirty="0"/>
+          </a:p>
+        </p:txBody>
+      </p:sp>
+      <p:sp>
+        <p:nvSpPr>
+          <p:cNvPr id="12" name="Text 10"/>
+          <p:cNvSpPr/>
+          <p:nvPr/>
+        </p:nvSpPr>
+        <p:spPr>
+          <a:xfrm>
+            <a:off x="685800" y="3154680"/>
+            <a:ext cx="2011680" cy="822960"/>
+          </a:xfrm>
+          <a:prstGeom prst="rect">
+            <a:avLst/>
+          </a:prstGeom>
+          <a:noFill/>
+          <a:ln/>
+        </p:spPr>
+        <p:txBody>
+          <a:bodyPr wrap="square" lIns="0" tIns="0" rIns="0" bIns="0" rtlCol="0" anchor="ctr"/>
+          <a:lstStyle/>
+          <a:p>
+            <a:pPr indent="0" marL="0">
+              <a:buNone/>
+            </a:pPr>
+            <a:r>
+              <a:rPr lang="en-US" sz="5200" b="1" dirty="0">
+                <a:solidFill>
+                  <a:srgbClr val="C4501A"/>
+                </a:solidFill>
+                <a:latin typeface="Arial" pitchFamily="34" charset="0"/>
+                <a:ea typeface="Arial" pitchFamily="34" charset="-122"/>
+                <a:cs typeface="Arial" pitchFamily="34" charset="-120"/>
+              </a:rPr>
+              <a:t>93%</a:t>
+            </a:r>
+            <a:endParaRPr lang="en-US" sz="5200" dirty="0"/>
+          </a:p>
+        </p:txBody>
+      </p:sp>
+      <p:sp>
+        <p:nvSpPr>
+          <p:cNvPr id="13" name="Text 11"/>
+          <p:cNvSpPr/>
+          <p:nvPr/>
+        </p:nvSpPr>
+        <p:spPr>
+          <a:xfrm>
+            <a:off x="2743200" y="3291840"/>
+            <a:ext cx="2926080" cy="594360"/>
+          </a:xfrm>
+          <a:prstGeom prst="rect">
+            <a:avLst/>
+          </a:prstGeom>
+          <a:noFill/>
+          <a:ln/>
+        </p:spPr>
+        <p:txBody>
+          <a:bodyPr wrap="square" lIns="0" tIns="0" rIns="0" bIns="0" rtlCol="0" anchor="ctr"/>
+          <a:lstStyle/>
+          <a:p>
+            <a:pPr indent="0" marL="0">
+              <a:buNone/>
+            </a:pPr>
+            <a:r>
+              <a:rPr lang="en-US" sz="1500" dirty="0">
+                <a:solidFill>
+                  <a:srgbClr val="A8B0BC"/>
+                </a:solidFill>
+                <a:latin typeface="Arial" pitchFamily="34" charset="0"/>
+                <a:ea typeface="Arial" pitchFamily="34" charset="-122"/>
+                <a:cs typeface="Arial" pitchFamily="34" charset="-120"/>
+              </a:rPr>
+              <a:t>false alarms on healthy passes.</a:t>
+            </a:r>
+            <a:endParaRPr lang="en-US" sz="1500" dirty="0"/>
+          </a:p>
+          <a:p>
+            <a:pPr indent="0" marL="0">
+              <a:buNone/>
+            </a:pPr>
+            <a:r>
+              <a:rPr lang="en-US" sz="1500" dirty="0">
+                <a:solidFill>
+                  <a:srgbClr val="A8B0BC"/>
+                </a:solidFill>
+                <a:latin typeface="Arial" pitchFamily="34" charset="0"/>
+                <a:ea typeface="Arial" pitchFamily="34" charset="-122"/>
+                <a:cs typeface="Arial" pitchFamily="34" charset="-120"/>
+              </a:rPr>
+              <a:t>It flagged nearly everything.</a:t>
+            </a:r>
+            <a:endParaRPr lang="en-US" sz="1500" dirty="0"/>
+          </a:p>
+        </p:txBody>
+      </p:sp>
+      <p:sp>
+        <p:nvSpPr>
+          <p:cNvPr id="14" name="Text 12"/>
+          <p:cNvSpPr/>
+          <p:nvPr/>
+        </p:nvSpPr>
+        <p:spPr>
+          <a:xfrm>
+            <a:off x="685800" y="4206240"/>
+            <a:ext cx="5029200" cy="1188720"/>
+          </a:xfrm>
+          <a:prstGeom prst="rect">
+            <a:avLst/>
+          </a:prstGeom>
+          <a:noFill/>
+          <a:ln/>
+        </p:spPr>
+        <p:txBody>
+          <a:bodyPr wrap="square" lIns="0" tIns="0" rIns="0" bIns="0" rtlCol="0" anchor="ctr"/>
+          <a:lstStyle/>
+          <a:p>
+            <a:pPr indent="0" marL="0">
+              <a:buNone/>
+            </a:pPr>
+            <a:r>
+              <a:rPr lang="en-US" sz="1400" dirty="0">
+                <a:solidFill>
+                  <a:srgbClr val="E7C4AE"/>
+                </a:solidFill>
+                <a:latin typeface="Arial" pitchFamily="34" charset="0"/>
+                <a:ea typeface="Arial" pitchFamily="34" charset="-122"/>
+                <a:cs typeface="Arial" pitchFamily="34" charset="-120"/>
+              </a:rPr>
+              <a:t>The model had memorised the machine setups. Healthy and faulty recordings scored the same. The gate saw the false alarms and refused it, and refused XGBoost the same way.</a:t>
+            </a:r>
+            <a:endParaRPr lang="en-US" sz="1400" dirty="0"/>
+          </a:p>
+        </p:txBody>
+      </p:sp>
+      <p:sp>
+        <p:nvSpPr>
+          <p:cNvPr id="15" name="Text 13"/>
+          <p:cNvSpPr/>
+          <p:nvPr/>
+        </p:nvSpPr>
+        <p:spPr>
+          <a:xfrm>
+            <a:off x="6355080" y="1737360"/>
+            <a:ext cx="5394960" cy="329184"/>
+          </a:xfrm>
+          <a:prstGeom prst="rect">
+            <a:avLst/>
+          </a:prstGeom>
+          <a:noFill/>
+          <a:ln/>
+        </p:spPr>
+        <p:txBody>
+          <a:bodyPr wrap="square" lIns="0" tIns="0" rIns="0" bIns="0" rtlCol="0" anchor="ctr"/>
+          <a:lstStyle/>
+          <a:p>
+            <a:pPr indent="0" marL="0">
+              <a:buNone/>
+            </a:pPr>
+            <a:r>
+              <a:rPr lang="en-US" sz="1800" b="1" dirty="0">
                 <a:solidFill>
                   <a:srgbClr val="12171F"/>
                 </a:solidFill>
@@ -6090,38 +8987,77 @@
                 <a:ea typeface="Arial" pitchFamily="34" charset="-122"/>
                 <a:cs typeface="Arial" pitchFamily="34" charset="-120"/>
               </a:rPr>
-              <a:t>272</a:t>
-            </a:r>
-            <a:endParaRPr lang="en-US" sz="7200" dirty="0"/>
-          </a:p>
-        </p:txBody>
-      </p:sp>
-      <p:sp>
-        <p:nvSpPr>
-          <p:cNvPr id="5" name="Text 3"/>
-          <p:cNvSpPr/>
-          <p:nvPr/>
-        </p:nvSpPr>
-        <p:spPr>
-          <a:xfrm>
-            <a:off x="438912" y="2697480"/>
-            <a:ext cx="5120640" cy="411480"/>
-          </a:xfrm>
-          <a:prstGeom prst="rect">
-            <a:avLst/>
-          </a:prstGeom>
-          <a:noFill/>
-          <a:ln/>
-        </p:spPr>
-        <p:txBody>
-          <a:bodyPr wrap="square" lIns="0" tIns="0" rIns="0" bIns="0" rtlCol="0" anchor="ctr"/>
-          <a:lstStyle/>
-          <a:p>
-            <a:pPr indent="0" marL="0">
-              <a:buNone/>
-            </a:pPr>
-            <a:r>
-              <a:rPr lang="en-US" sz="2200" b="1" dirty="0">
+              <a:t>What we changed</a:t>
+            </a:r>
+            <a:endParaRPr lang="en-US" sz="1800" dirty="0"/>
+          </a:p>
+        </p:txBody>
+      </p:sp>
+      <p:sp>
+        <p:nvSpPr>
+          <p:cNvPr id="16" name="Text 14"/>
+          <p:cNvSpPr/>
+          <p:nvPr/>
+        </p:nvSpPr>
+        <p:spPr>
+          <a:xfrm>
+            <a:off x="6355080" y="2121408"/>
+            <a:ext cx="5394960" cy="777240"/>
+          </a:xfrm>
+          <a:prstGeom prst="rect">
+            <a:avLst/>
+          </a:prstGeom>
+          <a:noFill/>
+          <a:ln/>
+        </p:spPr>
+        <p:txBody>
+          <a:bodyPr wrap="square" lIns="0" tIns="0" rIns="0" bIns="0" rtlCol="0" anchor="ctr"/>
+          <a:lstStyle/>
+          <a:p>
+            <a:pPr indent="0" marL="0">
+              <a:buNone/>
+            </a:pPr>
+            <a:r>
+              <a:rPr lang="en-US" sz="1400" dirty="0">
+                <a:solidFill>
+                  <a:srgbClr val="5C6573"/>
+                </a:solidFill>
+                <a:latin typeface="Arial" pitchFamily="34" charset="0"/>
+                <a:ea typeface="Arial" pitchFamily="34" charset="-122"/>
+                <a:cs typeface="Arial" pitchFamily="34" charset="-120"/>
+              </a:rPr>
+              <a:t>The cut recipe (depth, feed, spindle speed) became an input, so the model had to learn the fault, not the setup.</a:t>
+            </a:r>
+            <a:endParaRPr lang="en-US" sz="1400" dirty="0"/>
+          </a:p>
+        </p:txBody>
+      </p:sp>
+      <p:sp>
+        <p:nvSpPr>
+          <p:cNvPr id="17" name="Text 15"/>
+          <p:cNvSpPr/>
+          <p:nvPr/>
+        </p:nvSpPr>
+        <p:spPr>
+          <a:xfrm>
+            <a:off x="6355080" y="3035808"/>
+            <a:ext cx="5394960" cy="329184"/>
+          </a:xfrm>
+          <a:prstGeom prst="rect">
+            <a:avLst/>
+          </a:prstGeom>
+          <a:noFill/>
+          <a:ln/>
+        </p:spPr>
+        <p:txBody>
+          <a:bodyPr wrap="square" lIns="0" tIns="0" rIns="0" bIns="0" rtlCol="0" anchor="ctr"/>
+          <a:lstStyle/>
+          <a:p>
+            <a:pPr indent="0" marL="0">
+              <a:buNone/>
+            </a:pPr>
+            <a:r>
+              <a:rPr lang="en-US" sz="1800" b="1" dirty="0">
                 <a:solidFill>
                   <a:srgbClr val="12171F"/>
                 </a:solidFill>
@@ -6129,38 +9065,38 @@
                 <a:ea typeface="Arial" pitchFamily="34" charset="-122"/>
                 <a:cs typeface="Arial" pitchFamily="34" charset="-120"/>
               </a:rPr>
-              <a:t>passes on one IRB 6660.</a:t>
-            </a:r>
-            <a:endParaRPr lang="en-US" sz="2200" dirty="0"/>
-          </a:p>
-        </p:txBody>
-      </p:sp>
-      <p:sp>
-        <p:nvSpPr>
-          <p:cNvPr id="6" name="Text 4"/>
-          <p:cNvSpPr/>
-          <p:nvPr/>
-        </p:nvSpPr>
-        <p:spPr>
-          <a:xfrm>
-            <a:off x="438912" y="3291840"/>
-            <a:ext cx="5120640" cy="1005840"/>
-          </a:xfrm>
-          <a:prstGeom prst="rect">
-            <a:avLst/>
-          </a:prstGeom>
-          <a:noFill/>
-          <a:ln/>
-        </p:spPr>
-        <p:txBody>
-          <a:bodyPr wrap="square" lIns="0" tIns="0" rIns="0" bIns="0" rtlCol="0" anchor="ctr"/>
-          <a:lstStyle/>
-          <a:p>
-            <a:pPr indent="0" marL="0">
-              <a:buNone/>
-            </a:pPr>
-            <a:r>
-              <a:rPr lang="en-US" sz="1800" dirty="0">
+              <a:t>What we did not change</a:t>
+            </a:r>
+            <a:endParaRPr lang="en-US" sz="1800" dirty="0"/>
+          </a:p>
+        </p:txBody>
+      </p:sp>
+      <p:sp>
+        <p:nvSpPr>
+          <p:cNvPr id="18" name="Text 16"/>
+          <p:cNvSpPr/>
+          <p:nvPr/>
+        </p:nvSpPr>
+        <p:spPr>
+          <a:xfrm>
+            <a:off x="6355080" y="3419856"/>
+            <a:ext cx="5394960" cy="777240"/>
+          </a:xfrm>
+          <a:prstGeom prst="rect">
+            <a:avLst/>
+          </a:prstGeom>
+          <a:noFill/>
+          <a:ln/>
+        </p:spPr>
+        <p:txBody>
+          <a:bodyPr wrap="square" lIns="0" tIns="0" rIns="0" bIns="0" rtlCol="0" anchor="ctr"/>
+          <a:lstStyle/>
+          <a:p>
+            <a:pPr indent="0" marL="0">
+              <a:buNone/>
+            </a:pPr>
+            <a:r>
+              <a:rPr lang="en-US" sz="1400" dirty="0">
                 <a:solidFill>
                   <a:srgbClr val="5C6573"/>
                 </a:solidFill>
@@ -6168,7 +9104,46 @@
                 <a:ea typeface="Arial" pitchFamily="34" charset="-122"/>
                 <a:cs typeface="Arial" pitchFamily="34" charset="-120"/>
               </a:rPr>
-              <a:t>LightGBM has to beat a vibration limit. It missed 4 faults. Production missed 43.</a:t>
+              <a:t>The rules. The same five checks scored run two, on 55 held-out faults. LightGBM cleared them. XGBoost did not.</a:t>
+            </a:r>
+            <a:endParaRPr lang="en-US" sz="1400" dirty="0"/>
+          </a:p>
+        </p:txBody>
+      </p:sp>
+      <p:sp>
+        <p:nvSpPr>
+          <p:cNvPr id="19" name="Text 17"/>
+          <p:cNvSpPr/>
+          <p:nvPr/>
+        </p:nvSpPr>
+        <p:spPr>
+          <a:xfrm>
+            <a:off x="6355080" y="4334256"/>
+            <a:ext cx="5394960" cy="329184"/>
+          </a:xfrm>
+          <a:prstGeom prst="rect">
+            <a:avLst/>
+          </a:prstGeom>
+          <a:noFill/>
+          <a:ln/>
+        </p:spPr>
+        <p:txBody>
+          <a:bodyPr wrap="square" lIns="0" tIns="0" rIns="0" bIns="0" rtlCol="0" anchor="ctr"/>
+          <a:lstStyle/>
+          <a:p>
+            <a:pPr indent="0" marL="0">
+              <a:buNone/>
+            </a:pPr>
+            <a:r>
+              <a:rPr lang="en-US" sz="1800" b="1" dirty="0">
+                <a:solidFill>
+                  <a:srgbClr val="12171F"/>
+                </a:solidFill>
+                <a:latin typeface="Arial" pitchFamily="34" charset="0"/>
+                <a:ea typeface="Arial" pitchFamily="34" charset="-122"/>
+                <a:cs typeface="Arial" pitchFamily="34" charset="-120"/>
+              </a:rPr>
+              <a:t>What we still refuse to claim</a:t>
             </a:r>
             <a:endParaRPr lang="en-US" sz="1800" dirty="0"/>
           </a:p>
@@ -6176,14 +9151,53 @@
       </p:sp>
       <p:sp>
         <p:nvSpPr>
-          <p:cNvPr id="7" name="Text 5"/>
-          <p:cNvSpPr/>
-          <p:nvPr/>
-        </p:nvSpPr>
-        <p:spPr>
-          <a:xfrm>
-            <a:off x="438912" y="5989320"/>
-            <a:ext cx="5120640" cy="365760"/>
+          <p:cNvPr id="20" name="Text 18"/>
+          <p:cNvSpPr/>
+          <p:nvPr/>
+        </p:nvSpPr>
+        <p:spPr>
+          <a:xfrm>
+            <a:off x="6355080" y="4718304"/>
+            <a:ext cx="5394960" cy="777240"/>
+          </a:xfrm>
+          <a:prstGeom prst="rect">
+            <a:avLst/>
+          </a:prstGeom>
+          <a:noFill/>
+          <a:ln/>
+        </p:spPr>
+        <p:txBody>
+          <a:bodyPr wrap="square" lIns="0" tIns="0" rIns="0" bIns="0" rtlCol="0" anchor="ctr"/>
+          <a:lstStyle/>
+          <a:p>
+            <a:pPr indent="0" marL="0">
+              <a:buNone/>
+            </a:pPr>
+            <a:r>
+              <a:rPr lang="en-US" sz="1400" dirty="0">
+                <a:solidFill>
+                  <a:srgbClr val="5C6573"/>
+                </a:solidFill>
+                <a:latin typeface="Arial" pitchFamily="34" charset="0"/>
+                <a:ea typeface="Arial" pitchFamily="34" charset="-122"/>
+                <a:cs typeface="Arial" pitchFamily="34" charset="-120"/>
+              </a:rPr>
+              <a:t>Warning time. These recordings are labelled snapshots, not a countdown to a failure. The gate marks it not scored rather than guessing.</a:t>
+            </a:r>
+            <a:endParaRPr lang="en-US" sz="1400" dirty="0"/>
+          </a:p>
+        </p:txBody>
+      </p:sp>
+      <p:sp>
+        <p:nvSpPr>
+          <p:cNvPr id="21" name="Text 19"/>
+          <p:cNvSpPr/>
+          <p:nvPr/>
+        </p:nvSpPr>
+        <p:spPr>
+          <a:xfrm>
+            <a:off x="457200" y="5806440"/>
+            <a:ext cx="11247120" cy="329184"/>
           </a:xfrm>
           <a:prstGeom prst="rect">
             <a:avLst/>
@@ -6207,7 +9221,7 @@
                 <a:ea typeface="Arial" pitchFamily="34" charset="-122"/>
                 <a:cs typeface="Arial" pitchFamily="34" charset="-120"/>
               </a:rPr>
-              <a:t>That result is already in the demo.</a:t>
+              <a:t>Every verdict the gate gives is written to the audit log, refusals included.</a:t>
             </a:r>
             <a:endParaRPr lang="en-US" sz="1500" dirty="0"/>
           </a:p>
@@ -6215,196 +9229,79 @@
       </p:sp>
       <p:sp>
         <p:nvSpPr>
-          <p:cNvPr id="8" name="Text 6"/>
-          <p:cNvSpPr/>
-          <p:nvPr/>
-        </p:nvSpPr>
-        <p:spPr>
-          <a:xfrm>
-            <a:off x="6537960" y="411480"/>
-            <a:ext cx="5120640" cy="274320"/>
-          </a:xfrm>
-          <a:prstGeom prst="rect">
-            <a:avLst/>
-          </a:prstGeom>
-          <a:noFill/>
-          <a:ln/>
-        </p:spPr>
-        <p:txBody>
-          <a:bodyPr wrap="square" lIns="0" tIns="0" rIns="0" bIns="0" rtlCol="0" anchor="ctr"/>
-          <a:lstStyle/>
-          <a:p>
-            <a:pPr indent="0" marL="0">
-              <a:buNone/>
-            </a:pPr>
-            <a:r>
-              <a:rPr lang="en-US" sz="1300" b="1" spc="120" kern="0" dirty="0">
-                <a:solidFill>
-                  <a:srgbClr val="C4501A"/>
-                </a:solidFill>
-                <a:latin typeface="Arial" pitchFamily="34" charset="0"/>
-                <a:ea typeface="Arial" pitchFamily="34" charset="-122"/>
-                <a:cs typeface="Arial" pitchFamily="34" charset="-120"/>
-              </a:rPr>
-              <a:t>ON THE LINE</a:t>
-            </a:r>
-            <a:endParaRPr lang="en-US" sz="1300" dirty="0"/>
-          </a:p>
-        </p:txBody>
-      </p:sp>
-      <p:sp>
-        <p:nvSpPr>
-          <p:cNvPr id="9" name="Text 7"/>
-          <p:cNvSpPr/>
-          <p:nvPr/>
-        </p:nvSpPr>
-        <p:spPr>
-          <a:xfrm>
-            <a:off x="6537960" y="1554480"/>
-            <a:ext cx="5120640" cy="1051560"/>
-          </a:xfrm>
-          <a:prstGeom prst="rect">
-            <a:avLst/>
-          </a:prstGeom>
-          <a:noFill/>
-          <a:ln/>
-        </p:spPr>
-        <p:txBody>
-          <a:bodyPr wrap="square" lIns="0" tIns="0" rIns="0" bIns="0" rtlCol="0" anchor="ctr"/>
-          <a:lstStyle/>
-          <a:p>
-            <a:pPr indent="0" marL="0">
-              <a:buNone/>
-            </a:pPr>
-            <a:r>
-              <a:rPr lang="en-US" sz="7200" b="1" dirty="0">
-                <a:solidFill>
-                  <a:srgbClr val="F7F4EE"/>
-                </a:solidFill>
-                <a:latin typeface="Arial" pitchFamily="34" charset="0"/>
-                <a:ea typeface="Arial" pitchFamily="34" charset="-122"/>
-                <a:cs typeface="Arial" pitchFamily="34" charset="-120"/>
-              </a:rPr>
-              <a:t>Next</a:t>
-            </a:r>
-            <a:endParaRPr lang="en-US" sz="7200" dirty="0"/>
-          </a:p>
-        </p:txBody>
-      </p:sp>
-      <p:sp>
-        <p:nvSpPr>
-          <p:cNvPr id="10" name="Text 8"/>
-          <p:cNvSpPr/>
-          <p:nvPr/>
-        </p:nvSpPr>
-        <p:spPr>
-          <a:xfrm>
-            <a:off x="6537960" y="2697480"/>
-            <a:ext cx="5120640" cy="411480"/>
-          </a:xfrm>
-          <a:prstGeom prst="rect">
-            <a:avLst/>
-          </a:prstGeom>
-          <a:noFill/>
-          <a:ln/>
-        </p:spPr>
-        <p:txBody>
-          <a:bodyPr wrap="square" lIns="0" tIns="0" rIns="0" bIns="0" rtlCol="0" anchor="ctr"/>
-          <a:lstStyle/>
-          <a:p>
-            <a:pPr indent="0" marL="0">
-              <a:buNone/>
-            </a:pPr>
-            <a:r>
-              <a:rPr lang="en-US" sz="2200" b="1" dirty="0">
-                <a:solidFill>
-                  <a:srgbClr val="F7F4EE"/>
-                </a:solidFill>
-                <a:latin typeface="Arial" pitchFamily="34" charset="0"/>
-                <a:ea typeface="Arial" pitchFamily="34" charset="-122"/>
-                <a:cs typeface="Arial" pitchFamily="34" charset="-120"/>
-              </a:rPr>
-              <a:t>model has to beat this one.</a:t>
-            </a:r>
-            <a:endParaRPr lang="en-US" sz="2200" dirty="0"/>
-          </a:p>
-        </p:txBody>
-      </p:sp>
-      <p:sp>
-        <p:nvSpPr>
-          <p:cNvPr id="11" name="Text 9"/>
-          <p:cNvSpPr/>
-          <p:nvPr/>
-        </p:nvSpPr>
-        <p:spPr>
-          <a:xfrm>
-            <a:off x="6537960" y="3291840"/>
-            <a:ext cx="5120640" cy="1188720"/>
-          </a:xfrm>
-          <a:prstGeom prst="rect">
-            <a:avLst/>
-          </a:prstGeom>
-          <a:noFill/>
-          <a:ln/>
-        </p:spPr>
-        <p:txBody>
-          <a:bodyPr wrap="square" lIns="0" tIns="0" rIns="0" bIns="0" rtlCol="0" anchor="ctr"/>
-          <a:lstStyle/>
-          <a:p>
-            <a:pPr indent="0" marL="0">
-              <a:buNone/>
-            </a:pPr>
-            <a:r>
-              <a:rPr lang="en-US" sz="1800" dirty="0">
-                <a:solidFill>
-                  <a:srgbClr val="A8B0BC"/>
-                </a:solidFill>
-                <a:latin typeface="Arial" pitchFamily="34" charset="0"/>
-                <a:ea typeface="Arial" pitchFamily="34" charset="-122"/>
-                <a:cs typeface="Arial" pitchFamily="34" charset="-120"/>
-              </a:rPr>
-              <a:t>Every new shift is another test. A busier plant is a harder bar. Production is whatever just earned the click.</a:t>
-            </a:r>
-            <a:endParaRPr lang="en-US" sz="1800" dirty="0"/>
-          </a:p>
-        </p:txBody>
-      </p:sp>
-      <p:sp>
-        <p:nvSpPr>
-          <p:cNvPr id="12" name="Text 10"/>
-          <p:cNvSpPr/>
-          <p:nvPr/>
-        </p:nvSpPr>
-        <p:spPr>
-          <a:xfrm>
-            <a:off x="6537960" y="5989320"/>
-            <a:ext cx="5120640" cy="365760"/>
-          </a:xfrm>
-          <a:prstGeom prst="rect">
-            <a:avLst/>
-          </a:prstGeom>
-          <a:noFill/>
-          <a:ln/>
-        </p:spPr>
-        <p:txBody>
-          <a:bodyPr wrap="square" lIns="0" tIns="0" rIns="0" bIns="0" rtlCol="0" anchor="ctr"/>
-          <a:lstStyle/>
-          <a:p>
-            <a:pPr indent="0" marL="0">
-              <a:buNone/>
-            </a:pPr>
-            <a:r>
-              <a:rPr lang="en-US" sz="1500" i="1" dirty="0">
-                <a:solidFill>
-                  <a:srgbClr val="E7C4AE"/>
-                </a:solidFill>
-                <a:latin typeface="Arial" pitchFamily="34" charset="0"/>
-                <a:ea typeface="Arial" pitchFamily="34" charset="-122"/>
-                <a:cs typeface="Arial" pitchFamily="34" charset="-120"/>
-              </a:rPr>
-              <a:t>More data makes promotion harder.</a:t>
-            </a:r>
-            <a:endParaRPr lang="en-US" sz="1500" dirty="0"/>
+          <p:cNvPr id="22" name="Text 20"/>
+          <p:cNvSpPr/>
+          <p:nvPr/>
+        </p:nvSpPr>
+        <p:spPr>
+          <a:xfrm>
+            <a:off x="457200" y="6510528"/>
+            <a:ext cx="5486400" cy="201168"/>
+          </a:xfrm>
+          <a:prstGeom prst="rect">
+            <a:avLst/>
+          </a:prstGeom>
+          <a:noFill/>
+          <a:ln/>
+        </p:spPr>
+        <p:txBody>
+          <a:bodyPr wrap="square" lIns="0" tIns="0" rIns="0" bIns="0" rtlCol="0" anchor="ctr"/>
+          <a:lstStyle/>
+          <a:p>
+            <a:pPr indent="0" marL="0">
+              <a:buNone/>
+            </a:pPr>
+            <a:r>
+              <a:rPr lang="en-US" sz="1100" dirty="0">
+                <a:solidFill>
+                  <a:srgbClr val="5C6573"/>
+                </a:solidFill>
+                <a:latin typeface="Arial" pitchFamily="34" charset="0"/>
+                <a:ea typeface="Arial" pitchFamily="34" charset="-122"/>
+                <a:cs typeface="Arial" pitchFamily="34" charset="-120"/>
+              </a:rPr>
+              <a:t>ABB Accelerator 2026</a:t>
+            </a:r>
+            <a:endParaRPr lang="en-US" sz="1100" dirty="0"/>
+          </a:p>
+        </p:txBody>
+      </p:sp>
+      <p:sp>
+        <p:nvSpPr>
+          <p:cNvPr id="23" name="Text 21"/>
+          <p:cNvSpPr/>
+          <p:nvPr/>
+        </p:nvSpPr>
+        <p:spPr>
+          <a:xfrm>
+            <a:off x="6217920" y="6510528"/>
+            <a:ext cx="5513832" cy="201168"/>
+          </a:xfrm>
+          <a:prstGeom prst="rect">
+            <a:avLst/>
+          </a:prstGeom>
+          <a:noFill/>
+          <a:ln/>
+        </p:spPr>
+        <p:txBody>
+          <a:bodyPr wrap="square" lIns="0" tIns="0" rIns="0" bIns="0" rtlCol="0" anchor="ctr"/>
+          <a:lstStyle/>
+          <a:p>
+            <a:pPr algn="r" indent="0" marL="0">
+              <a:buNone/>
+            </a:pPr>
+            <a:r>
+              <a:rPr lang="en-US" sz="1100" dirty="0">
+                <a:solidFill>
+                  <a:srgbClr val="5C6573"/>
+                </a:solidFill>
+                <a:latin typeface="Arial" pitchFamily="34" charset="0"/>
+                <a:ea typeface="Arial" pitchFamily="34" charset="-122"/>
+                <a:cs typeface="Arial" pitchFamily="34" charset="-120"/>
+              </a:rPr>
+              <a:t>Theme 1  ·  Predictive maintenance</a:t>
+            </a:r>
+            <a:endParaRPr lang="en-US" sz="1100" dirty="0"/>
           </a:p>
         </p:txBody>
       </p:sp>
@@ -6422,7 +9319,7 @@
     <p:bg>
       <p:bgPr>
         <a:solidFill>
-          <a:srgbClr val="0E1726"/>
+          <a:srgbClr val="F4F0E8"/>
         </a:solidFill>
       </p:bgPr>
     </p:bg>
@@ -6442,141 +9339,24 @@
       </p:grpSpPr>
       <p:sp>
         <p:nvSpPr>
-          <p:cNvPr id="2" name="Text 0"/>
-          <p:cNvSpPr/>
-          <p:nvPr/>
-        </p:nvSpPr>
-        <p:spPr>
-          <a:xfrm>
-            <a:off x="502920" y="384048"/>
-            <a:ext cx="7315200" cy="256032"/>
-          </a:xfrm>
-          <a:prstGeom prst="rect">
-            <a:avLst/>
-          </a:prstGeom>
-          <a:noFill/>
-          <a:ln/>
-        </p:spPr>
-        <p:txBody>
-          <a:bodyPr wrap="square" lIns="0" tIns="0" rIns="0" bIns="0" rtlCol="0" anchor="ctr"/>
-          <a:lstStyle/>
-          <a:p>
-            <a:pPr indent="0" marL="0">
-              <a:buNone/>
-            </a:pPr>
-            <a:r>
-              <a:rPr lang="en-US" sz="1300" b="1" spc="140" kern="0" dirty="0">
-                <a:solidFill>
-                  <a:srgbClr val="C4501A"/>
-                </a:solidFill>
-                <a:latin typeface="Arial" pitchFamily="34" charset="0"/>
-                <a:ea typeface="Arial" pitchFamily="34" charset="-122"/>
-                <a:cs typeface="Arial" pitchFamily="34" charset="-120"/>
-              </a:rPr>
-              <a:t>ABB ACCELERATOR 2026</a:t>
-            </a:r>
-            <a:endParaRPr lang="en-US" sz="1300" dirty="0"/>
-          </a:p>
-        </p:txBody>
-      </p:sp>
-      <p:sp>
-        <p:nvSpPr>
-          <p:cNvPr id="3" name="Text 1"/>
-          <p:cNvSpPr/>
-          <p:nvPr/>
-        </p:nvSpPr>
-        <p:spPr>
-          <a:xfrm>
-            <a:off x="502920" y="1234440"/>
-            <a:ext cx="10972800" cy="777240"/>
-          </a:xfrm>
-          <a:prstGeom prst="rect">
-            <a:avLst/>
-          </a:prstGeom>
-          <a:noFill/>
-          <a:ln/>
-        </p:spPr>
-        <p:txBody>
-          <a:bodyPr wrap="square" lIns="0" tIns="0" rIns="0" bIns="0" rtlCol="0" anchor="ctr"/>
-          <a:lstStyle/>
-          <a:p>
-            <a:pPr indent="0" marL="0">
-              <a:buNone/>
-            </a:pPr>
-            <a:r>
-              <a:rPr lang="en-US" sz="4800" b="1" dirty="0">
-                <a:solidFill>
-                  <a:srgbClr val="F7F4EE"/>
-                </a:solidFill>
-                <a:latin typeface="Arial" pitchFamily="34" charset="0"/>
-                <a:ea typeface="Arial" pitchFamily="34" charset="-122"/>
-                <a:cs typeface="Arial" pitchFamily="34" charset="-120"/>
-              </a:rPr>
-              <a:t>See the decision.</a:t>
-            </a:r>
-            <a:endParaRPr lang="en-US" sz="4800" dirty="0"/>
-          </a:p>
-        </p:txBody>
-      </p:sp>
-      <p:sp>
-        <p:nvSpPr>
-          <p:cNvPr id="4" name="Text 2"/>
-          <p:cNvSpPr/>
-          <p:nvPr/>
-        </p:nvSpPr>
-        <p:spPr>
-          <a:xfrm>
-            <a:off x="502920" y="2103120"/>
-            <a:ext cx="10515600" cy="548640"/>
-          </a:xfrm>
-          <a:prstGeom prst="rect">
-            <a:avLst/>
-          </a:prstGeom>
-          <a:noFill/>
-          <a:ln/>
-        </p:spPr>
-        <p:txBody>
-          <a:bodyPr wrap="square" lIns="0" tIns="0" rIns="0" bIns="0" rtlCol="0" anchor="ctr"/>
-          <a:lstStyle/>
-          <a:p>
-            <a:pPr indent="0" marL="0">
-              <a:buNone/>
-            </a:pPr>
-            <a:r>
-              <a:rPr lang="en-US" sz="1800" dirty="0">
-                <a:solidFill>
-                  <a:srgbClr val="A8B0BC"/>
-                </a:solidFill>
-                <a:latin typeface="Arial" pitchFamily="34" charset="0"/>
-                <a:ea typeface="Arial" pitchFamily="34" charset="-122"/>
-                <a:cs typeface="Arial" pitchFamily="34" charset="-120"/>
-              </a:rPr>
-              <a:t>The demo opens on the IRB 6660 result. Promote turns on for LightGBM, and only for LightGBM.</a:t>
-            </a:r>
-            <a:endParaRPr lang="en-US" sz="1800" dirty="0"/>
-          </a:p>
-        </p:txBody>
-      </p:sp>
-      <p:sp>
-        <p:nvSpPr>
-          <p:cNvPr id="5" name="Shape 3"/>
-          <p:cNvSpPr/>
-          <p:nvPr/>
-        </p:nvSpPr>
-        <p:spPr>
-          <a:xfrm>
-            <a:off x="502920" y="2971800"/>
-            <a:ext cx="11183112" cy="13716"/>
+          <p:cNvPr id="2" name="Shape 0"/>
+          <p:cNvSpPr/>
+          <p:nvPr/>
+        </p:nvSpPr>
+        <p:spPr>
+          <a:xfrm>
+            <a:off x="0" y="0"/>
+            <a:ext cx="4709160" cy="6858000"/>
           </a:xfrm>
           <a:prstGeom prst="rect">
             <a:avLst/>
           </a:prstGeom>
           <a:solidFill>
-            <a:srgbClr val="2A3342"/>
+            <a:srgbClr val="0E1726"/>
           </a:solidFill>
           <a:ln w="12700">
             <a:solidFill>
-              <a:srgbClr val="2A3342"/>
+              <a:srgbClr val="0E1726"/>
             </a:solidFill>
             <a:prstDash val="solid"/>
           </a:ln>
@@ -6584,30 +9364,628 @@
       </p:sp>
       <p:sp>
         <p:nvSpPr>
+          <p:cNvPr id="3" name="Text 1"/>
+          <p:cNvSpPr/>
+          <p:nvPr/>
+        </p:nvSpPr>
+        <p:spPr>
+          <a:xfrm>
+            <a:off x="384048" y="384048"/>
+            <a:ext cx="4023360" cy="274320"/>
+          </a:xfrm>
+          <a:prstGeom prst="rect">
+            <a:avLst/>
+          </a:prstGeom>
+          <a:noFill/>
+          <a:ln/>
+        </p:spPr>
+        <p:txBody>
+          <a:bodyPr wrap="square" lIns="0" tIns="0" rIns="0" bIns="0" rtlCol="0" anchor="ctr"/>
+          <a:lstStyle/>
+          <a:p>
+            <a:pPr indent="0" marL="0">
+              <a:buNone/>
+            </a:pPr>
+            <a:r>
+              <a:rPr lang="en-US" sz="1300" b="1" spc="110" kern="0" dirty="0">
+                <a:solidFill>
+                  <a:srgbClr val="C4501A"/>
+                </a:solidFill>
+                <a:latin typeface="Arial" pitchFamily="34" charset="0"/>
+                <a:ea typeface="Arial" pitchFamily="34" charset="-122"/>
+                <a:cs typeface="Arial" pitchFamily="34" charset="-120"/>
+              </a:rPr>
+              <a:t>08    ON THE FLOOR</a:t>
+            </a:r>
+            <a:endParaRPr lang="en-US" sz="1300" dirty="0"/>
+          </a:p>
+        </p:txBody>
+      </p:sp>
+      <p:sp>
+        <p:nvSpPr>
+          <p:cNvPr id="4" name="Text 2"/>
+          <p:cNvSpPr/>
+          <p:nvPr/>
+        </p:nvSpPr>
+        <p:spPr>
+          <a:xfrm>
+            <a:off x="384048" y="1097280"/>
+            <a:ext cx="4023360" cy="1417320"/>
+          </a:xfrm>
+          <a:prstGeom prst="rect">
+            <a:avLst/>
+          </a:prstGeom>
+          <a:noFill/>
+          <a:ln/>
+        </p:spPr>
+        <p:txBody>
+          <a:bodyPr wrap="square" lIns="0" tIns="0" rIns="0" bIns="0" rtlCol="0" anchor="ctr"/>
+          <a:lstStyle/>
+          <a:p>
+            <a:pPr indent="0" marL="0">
+              <a:buNone/>
+            </a:pPr>
+            <a:r>
+              <a:rPr lang="en-US" sz="4000" b="1" dirty="0">
+                <a:solidFill>
+                  <a:srgbClr val="F7F4EE"/>
+                </a:solidFill>
+                <a:latin typeface="Arial" pitchFamily="34" charset="0"/>
+                <a:ea typeface="Arial" pitchFamily="34" charset="-122"/>
+                <a:cs typeface="Arial" pitchFamily="34" charset="-120"/>
+              </a:rPr>
+              <a:t>It reads</a:t>
+            </a:r>
+            <a:endParaRPr lang="en-US" sz="4000" dirty="0"/>
+          </a:p>
+          <a:p>
+            <a:pPr indent="0" marL="0">
+              <a:buNone/>
+            </a:pPr>
+            <a:r>
+              <a:rPr lang="en-US" sz="4000" b="1" dirty="0">
+                <a:solidFill>
+                  <a:srgbClr val="F7F4EE"/>
+                </a:solidFill>
+                <a:latin typeface="Arial" pitchFamily="34" charset="0"/>
+                <a:ea typeface="Arial" pitchFamily="34" charset="-122"/>
+                <a:cs typeface="Arial" pitchFamily="34" charset="-120"/>
+              </a:rPr>
+              <a:t>the log.</a:t>
+            </a:r>
+            <a:endParaRPr lang="en-US" sz="4000" dirty="0"/>
+          </a:p>
+        </p:txBody>
+      </p:sp>
+      <p:sp>
+        <p:nvSpPr>
+          <p:cNvPr id="5" name="Text 3"/>
+          <p:cNvSpPr/>
+          <p:nvPr/>
+        </p:nvSpPr>
+        <p:spPr>
+          <a:xfrm>
+            <a:off x="384048" y="2606040"/>
+            <a:ext cx="4023360" cy="1143000"/>
+          </a:xfrm>
+          <a:prstGeom prst="rect">
+            <a:avLst/>
+          </a:prstGeom>
+          <a:noFill/>
+          <a:ln/>
+        </p:spPr>
+        <p:txBody>
+          <a:bodyPr wrap="square" lIns="0" tIns="0" rIns="0" bIns="0" rtlCol="0" anchor="ctr"/>
+          <a:lstStyle/>
+          <a:p>
+            <a:pPr indent="0" marL="0">
+              <a:buNone/>
+            </a:pPr>
+            <a:r>
+              <a:rPr lang="en-US" sz="2600" i="1" dirty="0">
+                <a:solidFill>
+                  <a:srgbClr val="E7C4AE"/>
+                </a:solidFill>
+                <a:latin typeface="Arial" pitchFamily="34" charset="0"/>
+                <a:ea typeface="Arial" pitchFamily="34" charset="-122"/>
+                <a:cs typeface="Arial" pitchFamily="34" charset="-120"/>
+              </a:rPr>
+              <a:t>The controller</a:t>
+            </a:r>
+            <a:endParaRPr lang="en-US" sz="2600" dirty="0"/>
+          </a:p>
+          <a:p>
+            <a:pPr indent="0" marL="0">
+              <a:buNone/>
+            </a:pPr>
+            <a:r>
+              <a:rPr lang="en-US" sz="2600" i="1" dirty="0">
+                <a:solidFill>
+                  <a:srgbClr val="E7C4AE"/>
+                </a:solidFill>
+                <a:latin typeface="Arial" pitchFamily="34" charset="0"/>
+                <a:ea typeface="Arial" pitchFamily="34" charset="-122"/>
+                <a:cs typeface="Arial" pitchFamily="34" charset="-120"/>
+              </a:rPr>
+              <a:t>keeps the arm.</a:t>
+            </a:r>
+            <a:endParaRPr lang="en-US" sz="2600" dirty="0"/>
+          </a:p>
+        </p:txBody>
+      </p:sp>
+      <p:sp>
+        <p:nvSpPr>
           <p:cNvPr id="6" name="Text 4"/>
           <p:cNvSpPr/>
           <p:nvPr/>
         </p:nvSpPr>
         <p:spPr>
           <a:xfrm>
-            <a:off x="502920" y="3246120"/>
-            <a:ext cx="1828800" cy="256032"/>
-          </a:xfrm>
-          <a:prstGeom prst="rect">
-            <a:avLst/>
-          </a:prstGeom>
-          <a:noFill/>
-          <a:ln/>
-        </p:spPr>
-        <p:txBody>
-          <a:bodyPr wrap="square" lIns="0" tIns="0" rIns="0" bIns="0" rtlCol="0" anchor="ctr"/>
-          <a:lstStyle/>
-          <a:p>
-            <a:pPr indent="0" marL="0">
-              <a:buNone/>
-            </a:pPr>
-            <a:r>
-              <a:rPr lang="en-US" sz="1200" b="1" spc="130" kern="0" dirty="0">
+            <a:off x="384048" y="3977640"/>
+            <a:ext cx="3931920" cy="1371600"/>
+          </a:xfrm>
+          <a:prstGeom prst="rect">
+            <a:avLst/>
+          </a:prstGeom>
+          <a:noFill/>
+          <a:ln/>
+        </p:spPr>
+        <p:txBody>
+          <a:bodyPr wrap="square" lIns="0" tIns="0" rIns="0" bIns="0" rtlCol="0" anchor="ctr"/>
+          <a:lstStyle/>
+          <a:p>
+            <a:pPr indent="0" marL="0">
+              <a:buNone/>
+            </a:pPr>
+            <a:r>
+              <a:rPr lang="en-US" sz="1600" dirty="0">
+                <a:solidFill>
+                  <a:srgbClr val="A8B0BC"/>
+                </a:solidFill>
+                <a:latin typeface="Arial" pitchFamily="34" charset="0"/>
+                <a:ea typeface="Arial" pitchFamily="34" charset="-122"/>
+                <a:cs typeface="Arial" pitchFamily="34" charset="-120"/>
+              </a:rPr>
+              <a:t>The file the robot already writes is the input. A new model has to beat the one in production before it can watch the next shift.</a:t>
+            </a:r>
+            <a:endParaRPr lang="en-US" sz="1600" dirty="0"/>
+          </a:p>
+        </p:txBody>
+      </p:sp>
+      <p:sp>
+        <p:nvSpPr>
+          <p:cNvPr id="7" name="Text 5"/>
+          <p:cNvSpPr/>
+          <p:nvPr/>
+        </p:nvSpPr>
+        <p:spPr>
+          <a:xfrm>
+            <a:off x="384048" y="5989320"/>
+            <a:ext cx="4023360" cy="365760"/>
+          </a:xfrm>
+          <a:prstGeom prst="rect">
+            <a:avLst/>
+          </a:prstGeom>
+          <a:noFill/>
+          <a:ln/>
+        </p:spPr>
+        <p:txBody>
+          <a:bodyPr wrap="square" lIns="0" tIns="0" rIns="0" bIns="0" rtlCol="0" anchor="ctr"/>
+          <a:lstStyle/>
+          <a:p>
+            <a:pPr indent="0" marL="0">
+              <a:buNone/>
+            </a:pPr>
+            <a:r>
+              <a:rPr lang="en-US" sz="1400" dirty="0">
+                <a:solidFill>
+                  <a:srgbClr val="A8B0BC"/>
+                </a:solidFill>
+                <a:latin typeface="Arial" pitchFamily="34" charset="0"/>
+                <a:ea typeface="Arial" pitchFamily="34" charset="-122"/>
+                <a:cs typeface="Arial" pitchFamily="34" charset="-120"/>
+              </a:rPr>
+              <a:t>ABB Accelerator 2026</a:t>
+            </a:r>
+            <a:endParaRPr lang="en-US" sz="1400" dirty="0"/>
+          </a:p>
+        </p:txBody>
+      </p:sp>
+      <p:sp>
+        <p:nvSpPr>
+          <p:cNvPr id="8" name="Text 6"/>
+          <p:cNvSpPr/>
+          <p:nvPr/>
+        </p:nvSpPr>
+        <p:spPr>
+          <a:xfrm>
+            <a:off x="5074920" y="365760"/>
+            <a:ext cx="6583680" cy="365760"/>
+          </a:xfrm>
+          <a:prstGeom prst="rect">
+            <a:avLst/>
+          </a:prstGeom>
+          <a:noFill/>
+          <a:ln/>
+        </p:spPr>
+        <p:txBody>
+          <a:bodyPr wrap="square" lIns="0" tIns="0" rIns="0" bIns="0" rtlCol="0" anchor="ctr"/>
+          <a:lstStyle/>
+          <a:p>
+            <a:pPr indent="0" marL="0">
+              <a:buNone/>
+            </a:pPr>
+            <a:r>
+              <a:rPr lang="en-US" sz="2200" b="1" dirty="0">
+                <a:solidFill>
+                  <a:srgbClr val="12171F"/>
+                </a:solidFill>
+                <a:latin typeface="Arial" pitchFamily="34" charset="0"/>
+                <a:ea typeface="Arial" pitchFamily="34" charset="-122"/>
+                <a:cs typeface="Arial" pitchFamily="34" charset="-120"/>
+              </a:rPr>
+              <a:t>Same cell</a:t>
+            </a:r>
+            <a:endParaRPr lang="en-US" sz="2200" dirty="0"/>
+          </a:p>
+        </p:txBody>
+      </p:sp>
+      <p:sp>
+        <p:nvSpPr>
+          <p:cNvPr id="9" name="Text 7"/>
+          <p:cNvSpPr/>
+          <p:nvPr/>
+        </p:nvSpPr>
+        <p:spPr>
+          <a:xfrm>
+            <a:off x="5074920" y="804672"/>
+            <a:ext cx="6583680" cy="685800"/>
+          </a:xfrm>
+          <a:prstGeom prst="rect">
+            <a:avLst/>
+          </a:prstGeom>
+          <a:noFill/>
+          <a:ln/>
+        </p:spPr>
+        <p:txBody>
+          <a:bodyPr wrap="square" lIns="0" tIns="0" rIns="0" bIns="0" rtlCol="0" anchor="ctr"/>
+          <a:lstStyle/>
+          <a:p>
+            <a:pPr indent="0" marL="0">
+              <a:buNone/>
+            </a:pPr>
+            <a:r>
+              <a:rPr lang="en-US" sz="1500" dirty="0">
+                <a:solidFill>
+                  <a:srgbClr val="5C6573"/>
+                </a:solidFill>
+                <a:latin typeface="Arial" pitchFamily="34" charset="0"/>
+                <a:ea typeface="Arial" pitchFamily="34" charset="-122"/>
+                <a:cs typeface="Arial" pitchFamily="34" charset="-120"/>
+              </a:rPr>
+              <a:t>Torque, current, force, and vibration are already on the robot. PromoteGate starts from that file.</a:t>
+            </a:r>
+            <a:endParaRPr lang="en-US" sz="1500" dirty="0"/>
+          </a:p>
+        </p:txBody>
+      </p:sp>
+      <p:sp>
+        <p:nvSpPr>
+          <p:cNvPr id="10" name="Text 8"/>
+          <p:cNvSpPr/>
+          <p:nvPr/>
+        </p:nvSpPr>
+        <p:spPr>
+          <a:xfrm>
+            <a:off x="5074920" y="1920240"/>
+            <a:ext cx="6583680" cy="365760"/>
+          </a:xfrm>
+          <a:prstGeom prst="rect">
+            <a:avLst/>
+          </a:prstGeom>
+          <a:noFill/>
+          <a:ln/>
+        </p:spPr>
+        <p:txBody>
+          <a:bodyPr wrap="square" lIns="0" tIns="0" rIns="0" bIns="0" rtlCol="0" anchor="ctr"/>
+          <a:lstStyle/>
+          <a:p>
+            <a:pPr indent="0" marL="0">
+              <a:buNone/>
+            </a:pPr>
+            <a:r>
+              <a:rPr lang="en-US" sz="2200" b="1" dirty="0">
+                <a:solidFill>
+                  <a:srgbClr val="12171F"/>
+                </a:solidFill>
+                <a:latin typeface="Arial" pitchFamily="34" charset="0"/>
+                <a:ea typeface="Arial" pitchFamily="34" charset="-122"/>
+                <a:cs typeface="Arial" pitchFamily="34" charset="-120"/>
+              </a:rPr>
+              <a:t>Same job</a:t>
+            </a:r>
+            <a:endParaRPr lang="en-US" sz="2200" dirty="0"/>
+          </a:p>
+        </p:txBody>
+      </p:sp>
+      <p:sp>
+        <p:nvSpPr>
+          <p:cNvPr id="11" name="Text 9"/>
+          <p:cNvSpPr/>
+          <p:nvPr/>
+        </p:nvSpPr>
+        <p:spPr>
+          <a:xfrm>
+            <a:off x="5074920" y="2359152"/>
+            <a:ext cx="6583680" cy="685800"/>
+          </a:xfrm>
+          <a:prstGeom prst="rect">
+            <a:avLst/>
+          </a:prstGeom>
+          <a:noFill/>
+          <a:ln/>
+        </p:spPr>
+        <p:txBody>
+          <a:bodyPr wrap="square" lIns="0" tIns="0" rIns="0" bIns="0" rtlCol="0" anchor="ctr"/>
+          <a:lstStyle/>
+          <a:p>
+            <a:pPr indent="0" marL="0">
+              <a:buNone/>
+            </a:pPr>
+            <a:r>
+              <a:rPr lang="en-US" sz="1500" dirty="0">
+                <a:solidFill>
+                  <a:srgbClr val="5C6573"/>
+                </a:solidFill>
+                <a:latin typeface="Arial" pitchFamily="34" charset="0"/>
+                <a:ea typeface="Arial" pitchFamily="34" charset="-122"/>
+                <a:cs typeface="Arial" pitchFamily="34" charset="-120"/>
+              </a:rPr>
+              <a:t>The demo is cutting passes on an IRB 6660. A weld cell uses the same check on its own logs.</a:t>
+            </a:r>
+            <a:endParaRPr lang="en-US" sz="1500" dirty="0"/>
+          </a:p>
+        </p:txBody>
+      </p:sp>
+      <p:sp>
+        <p:nvSpPr>
+          <p:cNvPr id="12" name="Text 10"/>
+          <p:cNvSpPr/>
+          <p:nvPr/>
+        </p:nvSpPr>
+        <p:spPr>
+          <a:xfrm>
+            <a:off x="5074920" y="3474720"/>
+            <a:ext cx="6583680" cy="365760"/>
+          </a:xfrm>
+          <a:prstGeom prst="rect">
+            <a:avLst/>
+          </a:prstGeom>
+          <a:noFill/>
+          <a:ln/>
+        </p:spPr>
+        <p:txBody>
+          <a:bodyPr wrap="square" lIns="0" tIns="0" rIns="0" bIns="0" rtlCol="0" anchor="ctr"/>
+          <a:lstStyle/>
+          <a:p>
+            <a:pPr indent="0" marL="0">
+              <a:buNone/>
+            </a:pPr>
+            <a:r>
+              <a:rPr lang="en-US" sz="2200" b="1" dirty="0">
+                <a:solidFill>
+                  <a:srgbClr val="12171F"/>
+                </a:solidFill>
+                <a:latin typeface="Arial" pitchFamily="34" charset="0"/>
+                <a:ea typeface="Arial" pitchFamily="34" charset="-122"/>
+                <a:cs typeface="Arial" pitchFamily="34" charset="-120"/>
+              </a:rPr>
+              <a:t>Same controller</a:t>
+            </a:r>
+            <a:endParaRPr lang="en-US" sz="2200" dirty="0"/>
+          </a:p>
+        </p:txBody>
+      </p:sp>
+      <p:sp>
+        <p:nvSpPr>
+          <p:cNvPr id="13" name="Text 11"/>
+          <p:cNvSpPr/>
+          <p:nvPr/>
+        </p:nvSpPr>
+        <p:spPr>
+          <a:xfrm>
+            <a:off x="5074920" y="3913632"/>
+            <a:ext cx="6583680" cy="685800"/>
+          </a:xfrm>
+          <a:prstGeom prst="rect">
+            <a:avLst/>
+          </a:prstGeom>
+          <a:noFill/>
+          <a:ln/>
+        </p:spPr>
+        <p:txBody>
+          <a:bodyPr wrap="square" lIns="0" tIns="0" rIns="0" bIns="0" rtlCol="0" anchor="ctr"/>
+          <a:lstStyle/>
+          <a:p>
+            <a:pPr indent="0" marL="0">
+              <a:buNone/>
+            </a:pPr>
+            <a:r>
+              <a:rPr lang="en-US" sz="1500" dirty="0">
+                <a:solidFill>
+                  <a:srgbClr val="5C6573"/>
+                </a:solidFill>
+                <a:latin typeface="Arial" pitchFamily="34" charset="0"/>
+                <a:ea typeface="Arial" pitchFamily="34" charset="-122"/>
+                <a:cs typeface="Arial" pitchFamily="34" charset="-120"/>
+              </a:rPr>
+              <a:t>Joint commands stay with the controller. The arm keeps the program it was given.</a:t>
+            </a:r>
+            <a:endParaRPr lang="en-US" sz="1500" dirty="0"/>
+          </a:p>
+        </p:txBody>
+      </p:sp>
+      <p:sp>
+        <p:nvSpPr>
+          <p:cNvPr id="14" name="Text 12"/>
+          <p:cNvSpPr/>
+          <p:nvPr/>
+        </p:nvSpPr>
+        <p:spPr>
+          <a:xfrm>
+            <a:off x="5074920" y="5029200"/>
+            <a:ext cx="6583680" cy="365760"/>
+          </a:xfrm>
+          <a:prstGeom prst="rect">
+            <a:avLst/>
+          </a:prstGeom>
+          <a:noFill/>
+          <a:ln/>
+        </p:spPr>
+        <p:txBody>
+          <a:bodyPr wrap="square" lIns="0" tIns="0" rIns="0" bIns="0" rtlCol="0" anchor="ctr"/>
+          <a:lstStyle/>
+          <a:p>
+            <a:pPr indent="0" marL="0">
+              <a:buNone/>
+            </a:pPr>
+            <a:r>
+              <a:rPr lang="en-US" sz="2200" b="1" dirty="0">
+                <a:solidFill>
+                  <a:srgbClr val="12171F"/>
+                </a:solidFill>
+                <a:latin typeface="Arial" pitchFamily="34" charset="0"/>
+                <a:ea typeface="Arial" pitchFamily="34" charset="-122"/>
+                <a:cs typeface="Arial" pitchFamily="34" charset="-120"/>
+              </a:rPr>
+              <a:t>A separate click</a:t>
+            </a:r>
+            <a:endParaRPr lang="en-US" sz="2200" dirty="0"/>
+          </a:p>
+        </p:txBody>
+      </p:sp>
+      <p:sp>
+        <p:nvSpPr>
+          <p:cNvPr id="15" name="Text 13"/>
+          <p:cNvSpPr/>
+          <p:nvPr/>
+        </p:nvSpPr>
+        <p:spPr>
+          <a:xfrm>
+            <a:off x="5074920" y="5468112"/>
+            <a:ext cx="6583680" cy="685800"/>
+          </a:xfrm>
+          <a:prstGeom prst="rect">
+            <a:avLst/>
+          </a:prstGeom>
+          <a:noFill/>
+          <a:ln/>
+        </p:spPr>
+        <p:txBody>
+          <a:bodyPr wrap="square" lIns="0" tIns="0" rIns="0" bIns="0" rtlCol="0" anchor="ctr"/>
+          <a:lstStyle/>
+          <a:p>
+            <a:pPr indent="0" marL="0">
+              <a:buNone/>
+            </a:pPr>
+            <a:r>
+              <a:rPr lang="en-US" sz="1500" dirty="0">
+                <a:solidFill>
+                  <a:srgbClr val="5C6573"/>
+                </a:solidFill>
+                <a:latin typeface="Arial" pitchFamily="34" charset="0"/>
+                <a:ea typeface="Arial" pitchFamily="34" charset="-122"/>
+                <a:cs typeface="Arial" pitchFamily="34" charset="-120"/>
+              </a:rPr>
+              <a:t>The check can allow a model. Putting it into production is a person’s click, and the click is audited.</a:t>
+            </a:r>
+            <a:endParaRPr lang="en-US" sz="1500" dirty="0"/>
+          </a:p>
+        </p:txBody>
+      </p:sp>
+    </p:spTree>
+  </p:cSld>
+  <p:clrMapOvr>
+    <a:masterClrMapping/>
+  </p:clrMapOvr>
+</p:sld>
+</file>
+
+<file path=ppt/slides/slide9.xml><?xml version="1.0" encoding="utf-8"?>
+<p:sld xmlns:a="http://schemas.openxmlformats.org/drawingml/2006/main" xmlns:r="http://schemas.openxmlformats.org/officeDocument/2006/relationships" xmlns:p="http://schemas.openxmlformats.org/presentationml/2006/main">
+  <p:cSld name="Slide 9">
+    <p:bg>
+      <p:bgPr>
+        <a:solidFill>
+          <a:srgbClr val="F4F0E8"/>
+        </a:solidFill>
+      </p:bgPr>
+    </p:bg>
+    <p:spTree>
+      <p:nvGrpSpPr>
+        <p:cNvPr id="1" name=""/>
+        <p:cNvGrpSpPr/>
+        <p:nvPr/>
+      </p:nvGrpSpPr>
+      <p:grpSpPr>
+        <a:xfrm>
+          <a:off x="0" y="0"/>
+          <a:ext cx="0" cy="0"/>
+          <a:chOff x="0" y="0"/>
+          <a:chExt cx="0" cy="0"/>
+        </a:xfrm>
+      </p:grpSpPr>
+      <p:sp>
+        <p:nvSpPr>
+          <p:cNvPr id="2" name="Shape 0"/>
+          <p:cNvSpPr/>
+          <p:nvPr/>
+        </p:nvSpPr>
+        <p:spPr>
+          <a:xfrm>
+            <a:off x="6095390" y="0"/>
+            <a:ext cx="6096305" cy="6858000"/>
+          </a:xfrm>
+          <a:prstGeom prst="rect">
+            <a:avLst/>
+          </a:prstGeom>
+          <a:solidFill>
+            <a:srgbClr val="0E1726"/>
+          </a:solidFill>
+          <a:ln w="12700">
+            <a:solidFill>
+              <a:srgbClr val="0E1726"/>
+            </a:solidFill>
+            <a:prstDash val="solid"/>
+          </a:ln>
+        </p:spPr>
+      </p:sp>
+      <p:sp>
+        <p:nvSpPr>
+          <p:cNvPr id="3" name="Text 1"/>
+          <p:cNvSpPr/>
+          <p:nvPr/>
+        </p:nvSpPr>
+        <p:spPr>
+          <a:xfrm>
+            <a:off x="438912" y="411480"/>
+            <a:ext cx="5120640" cy="274320"/>
+          </a:xfrm>
+          <a:prstGeom prst="rect">
+            <a:avLst/>
+          </a:prstGeom>
+          <a:noFill/>
+          <a:ln/>
+        </p:spPr>
+        <p:txBody>
+          <a:bodyPr wrap="square" lIns="0" tIns="0" rIns="0" bIns="0" rtlCol="0" anchor="ctr"/>
+          <a:lstStyle/>
+          <a:p>
+            <a:pPr indent="0" marL="0">
+              <a:buNone/>
+            </a:pPr>
+            <a:r>
+              <a:rPr lang="en-US" sz="1300" b="1" spc="120" kern="0" dirty="0">
                 <a:solidFill>
                   <a:srgbClr val="C4501A"/>
                 </a:solidFill>
@@ -6615,55 +9993,280 @@
                 <a:ea typeface="Arial" pitchFamily="34" charset="-122"/>
                 <a:cs typeface="Arial" pitchFamily="34" charset="-120"/>
               </a:rPr>
-              <a:t>DEMO</a:t>
-            </a:r>
-            <a:endParaRPr lang="en-US" sz="1200" dirty="0"/>
-          </a:p>
-        </p:txBody>
-      </p:sp>
-      <p:sp>
-        <p:nvSpPr>
-          <p:cNvPr id="7" name="Text 5">
-            <a:hlinkClick r:id="rId1" tooltip=""/>
-          </p:cNvPr>
-          <p:cNvSpPr/>
-          <p:nvPr/>
-        </p:nvSpPr>
-        <p:spPr>
-          <a:xfrm>
-            <a:off x="502920" y="3566160"/>
-            <a:ext cx="10972800" cy="411480"/>
-          </a:xfrm>
-          <a:prstGeom prst="rect">
-            <a:avLst/>
-          </a:prstGeom>
-          <a:noFill/>
-          <a:ln/>
-        </p:spPr>
-        <p:txBody>
-          <a:bodyPr wrap="square" lIns="0" tIns="0" rIns="0" bIns="0" rtlCol="0" anchor="ctr"/>
-          <a:lstStyle/>
-          <a:p>
-            <a:pPr indent="0" marL="0">
-              <a:buNone/>
-            </a:pPr>
-            <a:r>
-              <a:rPr lang="en-US" sz="2200" u="sng" dirty="0">
+              <a:t>09    THIS DEMO</a:t>
+            </a:r>
+            <a:endParaRPr lang="en-US" sz="1300" dirty="0"/>
+          </a:p>
+        </p:txBody>
+      </p:sp>
+      <p:sp>
+        <p:nvSpPr>
+          <p:cNvPr id="4" name="Text 2"/>
+          <p:cNvSpPr/>
+          <p:nvPr/>
+        </p:nvSpPr>
+        <p:spPr>
+          <a:xfrm>
+            <a:off x="438912" y="1554480"/>
+            <a:ext cx="5120640" cy="1051560"/>
+          </a:xfrm>
+          <a:prstGeom prst="rect">
+            <a:avLst/>
+          </a:prstGeom>
+          <a:noFill/>
+          <a:ln/>
+        </p:spPr>
+        <p:txBody>
+          <a:bodyPr wrap="square" lIns="0" tIns="0" rIns="0" bIns="0" rtlCol="0" anchor="ctr"/>
+          <a:lstStyle/>
+          <a:p>
+            <a:pPr indent="0" marL="0">
+              <a:buNone/>
+            </a:pPr>
+            <a:r>
+              <a:rPr lang="en-US" sz="7200" b="1" dirty="0">
+                <a:solidFill>
+                  <a:srgbClr val="12171F"/>
+                </a:solidFill>
+                <a:latin typeface="Arial" pitchFamily="34" charset="0"/>
+                <a:ea typeface="Arial" pitchFamily="34" charset="-122"/>
+                <a:cs typeface="Arial" pitchFamily="34" charset="-120"/>
+              </a:rPr>
+              <a:t>272</a:t>
+            </a:r>
+            <a:endParaRPr lang="en-US" sz="7200" dirty="0"/>
+          </a:p>
+        </p:txBody>
+      </p:sp>
+      <p:sp>
+        <p:nvSpPr>
+          <p:cNvPr id="5" name="Text 3"/>
+          <p:cNvSpPr/>
+          <p:nvPr/>
+        </p:nvSpPr>
+        <p:spPr>
+          <a:xfrm>
+            <a:off x="438912" y="2697480"/>
+            <a:ext cx="5120640" cy="411480"/>
+          </a:xfrm>
+          <a:prstGeom prst="rect">
+            <a:avLst/>
+          </a:prstGeom>
+          <a:noFill/>
+          <a:ln/>
+        </p:spPr>
+        <p:txBody>
+          <a:bodyPr wrap="square" lIns="0" tIns="0" rIns="0" bIns="0" rtlCol="0" anchor="ctr"/>
+          <a:lstStyle/>
+          <a:p>
+            <a:pPr indent="0" marL="0">
+              <a:buNone/>
+            </a:pPr>
+            <a:r>
+              <a:rPr lang="en-US" sz="2200" b="1" dirty="0">
+                <a:solidFill>
+                  <a:srgbClr val="12171F"/>
+                </a:solidFill>
+                <a:latin typeface="Arial" pitchFamily="34" charset="0"/>
+                <a:ea typeface="Arial" pitchFamily="34" charset="-122"/>
+                <a:cs typeface="Arial" pitchFamily="34" charset="-120"/>
+              </a:rPr>
+              <a:t>passes on one IRB 6660.</a:t>
+            </a:r>
+            <a:endParaRPr lang="en-US" sz="2200" dirty="0"/>
+          </a:p>
+        </p:txBody>
+      </p:sp>
+      <p:sp>
+        <p:nvSpPr>
+          <p:cNvPr id="6" name="Text 4"/>
+          <p:cNvSpPr/>
+          <p:nvPr/>
+        </p:nvSpPr>
+        <p:spPr>
+          <a:xfrm>
+            <a:off x="438912" y="3291840"/>
+            <a:ext cx="5120640" cy="1005840"/>
+          </a:xfrm>
+          <a:prstGeom prst="rect">
+            <a:avLst/>
+          </a:prstGeom>
+          <a:noFill/>
+          <a:ln/>
+        </p:spPr>
+        <p:txBody>
+          <a:bodyPr wrap="square" lIns="0" tIns="0" rIns="0" bIns="0" rtlCol="0" anchor="ctr"/>
+          <a:lstStyle/>
+          <a:p>
+            <a:pPr indent="0" marL="0">
+              <a:buNone/>
+            </a:pPr>
+            <a:r>
+              <a:rPr lang="en-US" sz="1800" dirty="0">
+                <a:solidFill>
+                  <a:srgbClr val="5C6573"/>
+                </a:solidFill>
+                <a:latin typeface="Arial" pitchFamily="34" charset="0"/>
+                <a:ea typeface="Arial" pitchFamily="34" charset="-122"/>
+                <a:cs typeface="Arial" pitchFamily="34" charset="-120"/>
+              </a:rPr>
+              <a:t>LightGBM has to beat a vibration limit. It missed 4 faults. Production missed 43.</a:t>
+            </a:r>
+            <a:endParaRPr lang="en-US" sz="1800" dirty="0"/>
+          </a:p>
+        </p:txBody>
+      </p:sp>
+      <p:sp>
+        <p:nvSpPr>
+          <p:cNvPr id="7" name="Text 5"/>
+          <p:cNvSpPr/>
+          <p:nvPr/>
+        </p:nvSpPr>
+        <p:spPr>
+          <a:xfrm>
+            <a:off x="438912" y="5989320"/>
+            <a:ext cx="5120640" cy="365760"/>
+          </a:xfrm>
+          <a:prstGeom prst="rect">
+            <a:avLst/>
+          </a:prstGeom>
+          <a:noFill/>
+          <a:ln/>
+        </p:spPr>
+        <p:txBody>
+          <a:bodyPr wrap="square" lIns="0" tIns="0" rIns="0" bIns="0" rtlCol="0" anchor="ctr"/>
+          <a:lstStyle/>
+          <a:p>
+            <a:pPr indent="0" marL="0">
+              <a:buNone/>
+            </a:pPr>
+            <a:r>
+              <a:rPr lang="en-US" sz="1500" i="1" dirty="0">
+                <a:solidFill>
+                  <a:srgbClr val="C4501A"/>
+                </a:solidFill>
+                <a:latin typeface="Arial" pitchFamily="34" charset="0"/>
+                <a:ea typeface="Arial" pitchFamily="34" charset="-122"/>
+                <a:cs typeface="Arial" pitchFamily="34" charset="-120"/>
+              </a:rPr>
+              <a:t>That result is already in the demo.</a:t>
+            </a:r>
+            <a:endParaRPr lang="en-US" sz="1500" dirty="0"/>
+          </a:p>
+        </p:txBody>
+      </p:sp>
+      <p:sp>
+        <p:nvSpPr>
+          <p:cNvPr id="8" name="Text 6"/>
+          <p:cNvSpPr/>
+          <p:nvPr/>
+        </p:nvSpPr>
+        <p:spPr>
+          <a:xfrm>
+            <a:off x="6537960" y="411480"/>
+            <a:ext cx="5120640" cy="274320"/>
+          </a:xfrm>
+          <a:prstGeom prst="rect">
+            <a:avLst/>
+          </a:prstGeom>
+          <a:noFill/>
+          <a:ln/>
+        </p:spPr>
+        <p:txBody>
+          <a:bodyPr wrap="square" lIns="0" tIns="0" rIns="0" bIns="0" rtlCol="0" anchor="ctr"/>
+          <a:lstStyle/>
+          <a:p>
+            <a:pPr indent="0" marL="0">
+              <a:buNone/>
+            </a:pPr>
+            <a:r>
+              <a:rPr lang="en-US" sz="1300" b="1" spc="120" kern="0" dirty="0">
+                <a:solidFill>
+                  <a:srgbClr val="C4501A"/>
+                </a:solidFill>
+                <a:latin typeface="Arial" pitchFamily="34" charset="0"/>
+                <a:ea typeface="Arial" pitchFamily="34" charset="-122"/>
+                <a:cs typeface="Arial" pitchFamily="34" charset="-120"/>
+              </a:rPr>
+              <a:t>ON THE LINE</a:t>
+            </a:r>
+            <a:endParaRPr lang="en-US" sz="1300" dirty="0"/>
+          </a:p>
+        </p:txBody>
+      </p:sp>
+      <p:sp>
+        <p:nvSpPr>
+          <p:cNvPr id="9" name="Text 7"/>
+          <p:cNvSpPr/>
+          <p:nvPr/>
+        </p:nvSpPr>
+        <p:spPr>
+          <a:xfrm>
+            <a:off x="6537960" y="1554480"/>
+            <a:ext cx="5120640" cy="1051560"/>
+          </a:xfrm>
+          <a:prstGeom prst="rect">
+            <a:avLst/>
+          </a:prstGeom>
+          <a:noFill/>
+          <a:ln/>
+        </p:spPr>
+        <p:txBody>
+          <a:bodyPr wrap="square" lIns="0" tIns="0" rIns="0" bIns="0" rtlCol="0" anchor="ctr"/>
+          <a:lstStyle/>
+          <a:p>
+            <a:pPr indent="0" marL="0">
+              <a:buNone/>
+            </a:pPr>
+            <a:r>
+              <a:rPr lang="en-US" sz="7200" b="1" dirty="0">
                 <a:solidFill>
                   <a:srgbClr val="F7F4EE"/>
                 </a:solidFill>
                 <a:latin typeface="Arial" pitchFamily="34" charset="0"/>
                 <a:ea typeface="Arial" pitchFamily="34" charset="-122"/>
                 <a:cs typeface="Arial" pitchFamily="34" charset="-120"/>
-                <a:hlinkClick r:id="rId1" invalidUrl="" action="" tgtFrame="" tooltip="" history="1" highlightClick="0" endSnd="0">
-                  <a:extLst>
-                    <a:ext uri="{A12FA001-AC4F-418D-AE19-62706E023703}">
-                      <ahyp:hlinkClr xmlns:ahyp="http://schemas.microsoft.com/office/drawing/2018/hyperlinkcolor" val="tx"/>
-                    </a:ext>
-                  </a:extLst>
-                </a:hlinkClick>
-              </a:rPr>
-              <a:t>dhamarit.github.io/promotegate-demo</a:t>
+              </a:rPr>
+              <a:t>Next</a:t>
+            </a:r>
+            <a:endParaRPr lang="en-US" sz="7200" dirty="0"/>
+          </a:p>
+        </p:txBody>
+      </p:sp>
+      <p:sp>
+        <p:nvSpPr>
+          <p:cNvPr id="10" name="Text 8"/>
+          <p:cNvSpPr/>
+          <p:nvPr/>
+        </p:nvSpPr>
+        <p:spPr>
+          <a:xfrm>
+            <a:off x="6537960" y="2697480"/>
+            <a:ext cx="5120640" cy="411480"/>
+          </a:xfrm>
+          <a:prstGeom prst="rect">
+            <a:avLst/>
+          </a:prstGeom>
+          <a:noFill/>
+          <a:ln/>
+        </p:spPr>
+        <p:txBody>
+          <a:bodyPr wrap="square" lIns="0" tIns="0" rIns="0" bIns="0" rtlCol="0" anchor="ctr"/>
+          <a:lstStyle/>
+          <a:p>
+            <a:pPr indent="0" marL="0">
+              <a:buNone/>
+            </a:pPr>
+            <a:r>
+              <a:rPr lang="en-US" sz="2200" b="1" dirty="0">
+                <a:solidFill>
+                  <a:srgbClr val="F7F4EE"/>
+                </a:solidFill>
+                <a:latin typeface="Arial" pitchFamily="34" charset="0"/>
+                <a:ea typeface="Arial" pitchFamily="34" charset="-122"/>
+                <a:cs typeface="Arial" pitchFamily="34" charset="-120"/>
+              </a:rPr>
+              <a:t>model has to beat this one.</a:t>
             </a:r>
             <a:endParaRPr lang="en-US" sz="2200" dirty="0"/>
           </a:p>
@@ -6671,117 +10274,30 @@
       </p:sp>
       <p:sp>
         <p:nvSpPr>
-          <p:cNvPr id="8" name="Text 6"/>
-          <p:cNvSpPr/>
-          <p:nvPr/>
-        </p:nvSpPr>
-        <p:spPr>
-          <a:xfrm>
-            <a:off x="502920" y="4206240"/>
-            <a:ext cx="1828800" cy="256032"/>
-          </a:xfrm>
-          <a:prstGeom prst="rect">
-            <a:avLst/>
-          </a:prstGeom>
-          <a:noFill/>
-          <a:ln/>
-        </p:spPr>
-        <p:txBody>
-          <a:bodyPr wrap="square" lIns="0" tIns="0" rIns="0" bIns="0" rtlCol="0" anchor="ctr"/>
-          <a:lstStyle/>
-          <a:p>
-            <a:pPr indent="0" marL="0">
-              <a:buNone/>
-            </a:pPr>
-            <a:r>
-              <a:rPr lang="en-US" sz="1200" b="1" spc="130" kern="0" dirty="0">
-                <a:solidFill>
-                  <a:srgbClr val="C4501A"/>
-                </a:solidFill>
-                <a:latin typeface="Arial" pitchFamily="34" charset="0"/>
-                <a:ea typeface="Arial" pitchFamily="34" charset="-122"/>
-                <a:cs typeface="Arial" pitchFamily="34" charset="-120"/>
-              </a:rPr>
-              <a:t>CODE</a:t>
-            </a:r>
-            <a:endParaRPr lang="en-US" sz="1200" dirty="0"/>
-          </a:p>
-        </p:txBody>
-      </p:sp>
-      <p:sp>
-        <p:nvSpPr>
-          <p:cNvPr id="9" name="Text 7">
-            <a:hlinkClick r:id="rId2" tooltip=""/>
-          </p:cNvPr>
-          <p:cNvSpPr/>
-          <p:nvPr/>
-        </p:nvSpPr>
-        <p:spPr>
-          <a:xfrm>
-            <a:off x="502920" y="4526280"/>
-            <a:ext cx="10972800" cy="384048"/>
-          </a:xfrm>
-          <a:prstGeom prst="rect">
-            <a:avLst/>
-          </a:prstGeom>
-          <a:noFill/>
-          <a:ln/>
-        </p:spPr>
-        <p:txBody>
-          <a:bodyPr wrap="square" lIns="0" tIns="0" rIns="0" bIns="0" rtlCol="0" anchor="ctr"/>
-          <a:lstStyle/>
-          <a:p>
-            <a:pPr indent="0" marL="0">
-              <a:buNone/>
-            </a:pPr>
-            <a:r>
-              <a:rPr lang="en-US" sz="2200" u="sng" dirty="0">
-                <a:solidFill>
-                  <a:srgbClr val="F7F4EE"/>
-                </a:solidFill>
-                <a:latin typeface="Arial" pitchFamily="34" charset="0"/>
-                <a:ea typeface="Arial" pitchFamily="34" charset="-122"/>
-                <a:cs typeface="Arial" pitchFamily="34" charset="-120"/>
-                <a:hlinkClick r:id="rId2" invalidUrl="" action="" tgtFrame="" tooltip="" history="1" highlightClick="0" endSnd="0">
-                  <a:extLst>
-                    <a:ext uri="{A12FA001-AC4F-418D-AE19-62706E023703}">
-                      <ahyp:hlinkClr xmlns:ahyp="http://schemas.microsoft.com/office/drawing/2018/hyperlinkcolor" val="tx"/>
-                    </a:ext>
-                  </a:extLst>
-                </a:hlinkClick>
-              </a:rPr>
-              <a:t>github.com/dhamariT/promotegate</a:t>
-            </a:r>
-            <a:endParaRPr lang="en-US" sz="2200" dirty="0"/>
-          </a:p>
-        </p:txBody>
-      </p:sp>
-      <p:sp>
-        <p:nvSpPr>
-          <p:cNvPr id="10" name="Text 8"/>
-          <p:cNvSpPr/>
-          <p:nvPr/>
-        </p:nvSpPr>
-        <p:spPr>
-          <a:xfrm>
-            <a:off x="502920" y="6126480"/>
-            <a:ext cx="10972800" cy="274320"/>
-          </a:xfrm>
-          <a:prstGeom prst="rect">
-            <a:avLst/>
-          </a:prstGeom>
-          <a:noFill/>
-          <a:ln/>
-        </p:spPr>
-        <p:txBody>
-          <a:bodyPr wrap="square" lIns="0" tIns="0" rIns="0" bIns="0" rtlCol="0" anchor="ctr"/>
-          <a:lstStyle/>
-          <a:p>
-            <a:pPr indent="0" marL="0">
-              <a:buNone/>
-            </a:pPr>
-            <a:r>
-              <a:rPr lang="en-US" sz="1400" dirty="0">
+          <p:cNvPr id="11" name="Text 9"/>
+          <p:cNvSpPr/>
+          <p:nvPr/>
+        </p:nvSpPr>
+        <p:spPr>
+          <a:xfrm>
+            <a:off x="6537960" y="3291840"/>
+            <a:ext cx="5120640" cy="1188720"/>
+          </a:xfrm>
+          <a:prstGeom prst="rect">
+            <a:avLst/>
+          </a:prstGeom>
+          <a:noFill/>
+          <a:ln/>
+        </p:spPr>
+        <p:txBody>
+          <a:bodyPr wrap="square" lIns="0" tIns="0" rIns="0" bIns="0" rtlCol="0" anchor="ctr"/>
+          <a:lstStyle/>
+          <a:p>
+            <a:pPr indent="0" marL="0">
+              <a:buNone/>
+            </a:pPr>
+            <a:r>
+              <a:rPr lang="en-US" sz="1800" dirty="0">
                 <a:solidFill>
                   <a:srgbClr val="A8B0BC"/>
                 </a:solidFill>
@@ -6789,9 +10305,48 @@
                 <a:ea typeface="Arial" pitchFamily="34" charset="-122"/>
                 <a:cs typeface="Arial" pitchFamily="34" charset="-120"/>
               </a:rPr>
-              <a:t>PromoteGate  ·  A person still clicks.</a:t>
-            </a:r>
-            <a:endParaRPr lang="en-US" sz="1400" dirty="0"/>
+              <a:t>Every new shift is another test. A busier plant is a harder bar. Production is whatever just earned the click.</a:t>
+            </a:r>
+            <a:endParaRPr lang="en-US" sz="1800" dirty="0"/>
+          </a:p>
+        </p:txBody>
+      </p:sp>
+      <p:sp>
+        <p:nvSpPr>
+          <p:cNvPr id="12" name="Text 10"/>
+          <p:cNvSpPr/>
+          <p:nvPr/>
+        </p:nvSpPr>
+        <p:spPr>
+          <a:xfrm>
+            <a:off x="6537960" y="5989320"/>
+            <a:ext cx="5120640" cy="365760"/>
+          </a:xfrm>
+          <a:prstGeom prst="rect">
+            <a:avLst/>
+          </a:prstGeom>
+          <a:noFill/>
+          <a:ln/>
+        </p:spPr>
+        <p:txBody>
+          <a:bodyPr wrap="square" lIns="0" tIns="0" rIns="0" bIns="0" rtlCol="0" anchor="ctr"/>
+          <a:lstStyle/>
+          <a:p>
+            <a:pPr indent="0" marL="0">
+              <a:buNone/>
+            </a:pPr>
+            <a:r>
+              <a:rPr lang="en-US" sz="1500" i="1" dirty="0">
+                <a:solidFill>
+                  <a:srgbClr val="E7C4AE"/>
+                </a:solidFill>
+                <a:latin typeface="Arial" pitchFamily="34" charset="0"/>
+                <a:ea typeface="Arial" pitchFamily="34" charset="-122"/>
+                <a:cs typeface="Arial" pitchFamily="34" charset="-120"/>
+              </a:rPr>
+              <a:t>More data makes promotion harder.</a:t>
+            </a:r>
+            <a:endParaRPr lang="en-US" sz="1500" dirty="0"/>
           </a:p>
         </p:txBody>
       </p:sp>
